--- a/02_SW_SPEC/Schema de cablage.pptx
+++ b/02_SW_SPEC/Schema de cablage.pptx
@@ -7,7 +7,6 @@
   <p:sldIdLst>
     <p:sldId id="258" r:id="rId2"/>
     <p:sldId id="257" r:id="rId3"/>
-    <p:sldId id="259" r:id="rId4"/>
   </p:sldIdLst>
   <p:sldSz cx="12192000" cy="6858000"/>
   <p:notesSz cx="6858000" cy="9144000"/>
@@ -261,7 +260,7 @@
           <a:p>
             <a:fld id="{4307A016-5FBC-4672-8EE7-F1B0774DE149}" type="datetimeFigureOut">
               <a:rPr lang="fr-FR" smtClean="0"/>
-              <a:t>18/01/2026</a:t>
+              <a:t>22/10/2026</a:t>
             </a:fld>
             <a:endParaRPr lang="fr-FR"/>
           </a:p>
@@ -459,7 +458,7 @@
           <a:p>
             <a:fld id="{4307A016-5FBC-4672-8EE7-F1B0774DE149}" type="datetimeFigureOut">
               <a:rPr lang="fr-FR" smtClean="0"/>
-              <a:t>18/01/2026</a:t>
+              <a:t>22/10/2026</a:t>
             </a:fld>
             <a:endParaRPr lang="fr-FR"/>
           </a:p>
@@ -667,7 +666,7 @@
           <a:p>
             <a:fld id="{4307A016-5FBC-4672-8EE7-F1B0774DE149}" type="datetimeFigureOut">
               <a:rPr lang="fr-FR" smtClean="0"/>
-              <a:t>18/01/2026</a:t>
+              <a:t>22/10/2026</a:t>
             </a:fld>
             <a:endParaRPr lang="fr-FR"/>
           </a:p>
@@ -865,7 +864,7 @@
           <a:p>
             <a:fld id="{4307A016-5FBC-4672-8EE7-F1B0774DE149}" type="datetimeFigureOut">
               <a:rPr lang="fr-FR" smtClean="0"/>
-              <a:t>18/01/2026</a:t>
+              <a:t>22/10/2026</a:t>
             </a:fld>
             <a:endParaRPr lang="fr-FR"/>
           </a:p>
@@ -1140,7 +1139,7 @@
           <a:p>
             <a:fld id="{4307A016-5FBC-4672-8EE7-F1B0774DE149}" type="datetimeFigureOut">
               <a:rPr lang="fr-FR" smtClean="0"/>
-              <a:t>18/01/2026</a:t>
+              <a:t>22/10/2026</a:t>
             </a:fld>
             <a:endParaRPr lang="fr-FR"/>
           </a:p>
@@ -1405,7 +1404,7 @@
           <a:p>
             <a:fld id="{4307A016-5FBC-4672-8EE7-F1B0774DE149}" type="datetimeFigureOut">
               <a:rPr lang="fr-FR" smtClean="0"/>
-              <a:t>18/01/2026</a:t>
+              <a:t>22/10/2026</a:t>
             </a:fld>
             <a:endParaRPr lang="fr-FR"/>
           </a:p>
@@ -1817,7 +1816,7 @@
           <a:p>
             <a:fld id="{4307A016-5FBC-4672-8EE7-F1B0774DE149}" type="datetimeFigureOut">
               <a:rPr lang="fr-FR" smtClean="0"/>
-              <a:t>18/01/2026</a:t>
+              <a:t>22/10/2026</a:t>
             </a:fld>
             <a:endParaRPr lang="fr-FR"/>
           </a:p>
@@ -1958,7 +1957,7 @@
           <a:p>
             <a:fld id="{4307A016-5FBC-4672-8EE7-F1B0774DE149}" type="datetimeFigureOut">
               <a:rPr lang="fr-FR" smtClean="0"/>
-              <a:t>18/01/2026</a:t>
+              <a:t>22/10/2026</a:t>
             </a:fld>
             <a:endParaRPr lang="fr-FR"/>
           </a:p>
@@ -2071,7 +2070,7 @@
           <a:p>
             <a:fld id="{4307A016-5FBC-4672-8EE7-F1B0774DE149}" type="datetimeFigureOut">
               <a:rPr lang="fr-FR" smtClean="0"/>
-              <a:t>18/01/2026</a:t>
+              <a:t>22/10/2026</a:t>
             </a:fld>
             <a:endParaRPr lang="fr-FR"/>
           </a:p>
@@ -2382,7 +2381,7 @@
           <a:p>
             <a:fld id="{4307A016-5FBC-4672-8EE7-F1B0774DE149}" type="datetimeFigureOut">
               <a:rPr lang="fr-FR" smtClean="0"/>
-              <a:t>18/01/2026</a:t>
+              <a:t>22/10/2026</a:t>
             </a:fld>
             <a:endParaRPr lang="fr-FR"/>
           </a:p>
@@ -2670,7 +2669,7 @@
           <a:p>
             <a:fld id="{4307A016-5FBC-4672-8EE7-F1B0774DE149}" type="datetimeFigureOut">
               <a:rPr lang="fr-FR" smtClean="0"/>
-              <a:t>18/01/2026</a:t>
+              <a:t>22/10/2026</a:t>
             </a:fld>
             <a:endParaRPr lang="fr-FR"/>
           </a:p>
@@ -2911,7 +2910,7 @@
           <a:p>
             <a:fld id="{4307A016-5FBC-4672-8EE7-F1B0774DE149}" type="datetimeFigureOut">
               <a:rPr lang="fr-FR" smtClean="0"/>
-              <a:t>18/01/2026</a:t>
+              <a:t>22/10/2026</a:t>
             </a:fld>
             <a:endParaRPr lang="fr-FR"/>
           </a:p>
@@ -3328,43 +3327,184 @@
           <a:chExt cx="0" cy="0"/>
         </a:xfrm>
       </p:grpSpPr>
-      <p:pic>
-        <p:nvPicPr>
-          <p:cNvPr id="5" name="Image 4">
-            <a:extLst>
-              <a:ext uri="{FF2B5EF4-FFF2-40B4-BE49-F238E27FC236}">
-                <a16:creationId xmlns:a16="http://schemas.microsoft.com/office/drawing/2014/main" id="{CF369036-C498-36B6-A7B4-70709A99BA28}"/>
-              </a:ext>
-            </a:extLst>
-          </p:cNvPr>
-          <p:cNvPicPr>
-            <a:picLocks noChangeAspect="1"/>
-          </p:cNvPicPr>
+      <p:cxnSp>
+        <p:nvCxnSpPr>
+          <p:cNvPr id="21" name="Connecteur droit 20">
+            <a:extLst>
+              <a:ext uri="{FF2B5EF4-FFF2-40B4-BE49-F238E27FC236}">
+                <a16:creationId xmlns:a16="http://schemas.microsoft.com/office/drawing/2014/main" id="{C2502832-5496-5546-14F5-A44ED46C04D6}"/>
+              </a:ext>
+            </a:extLst>
+          </p:cNvPr>
+          <p:cNvCxnSpPr>
+            <a:cxnSpLocks/>
+          </p:cNvCxnSpPr>
           <p:nvPr/>
-        </p:nvPicPr>
-        <p:blipFill>
-          <a:blip r:embed="rId2"/>
-          <a:srcRect t="6303" b="9132"/>
-          <a:stretch>
-            <a:fillRect/>
-          </a:stretch>
-        </p:blipFill>
+        </p:nvCxnSpPr>
         <p:spPr>
           <a:xfrm>
-            <a:off x="1162377" y="47133"/>
-            <a:ext cx="5049070" cy="6820293"/>
-          </a:xfrm>
-          <a:prstGeom prst="rect">
+            <a:off x="9649533" y="1797162"/>
+            <a:ext cx="0" cy="690880"/>
+          </a:xfrm>
+          <a:prstGeom prst="line">
             <a:avLst/>
           </a:prstGeom>
-        </p:spPr>
-      </p:pic>
-      <p:sp>
-        <p:nvSpPr>
-          <p:cNvPr id="10" name="Rectangle 9">
-            <a:extLst>
-              <a:ext uri="{FF2B5EF4-FFF2-40B4-BE49-F238E27FC236}">
-                <a16:creationId xmlns:a16="http://schemas.microsoft.com/office/drawing/2014/main" id="{8C0D9B2B-EC38-F2B3-5615-5D90A0FEF2B9}"/>
+          <a:ln w="28575">
+            <a:solidFill>
+              <a:srgbClr val="FF0000"/>
+            </a:solidFill>
+          </a:ln>
+        </p:spPr>
+        <p:style>
+          <a:lnRef idx="1">
+            <a:schemeClr val="accent1"/>
+          </a:lnRef>
+          <a:fillRef idx="0">
+            <a:schemeClr val="accent1"/>
+          </a:fillRef>
+          <a:effectRef idx="0">
+            <a:schemeClr val="accent1"/>
+          </a:effectRef>
+          <a:fontRef idx="minor">
+            <a:schemeClr val="tx1"/>
+          </a:fontRef>
+        </p:style>
+      </p:cxnSp>
+      <p:cxnSp>
+        <p:nvCxnSpPr>
+          <p:cNvPr id="22" name="Connecteur droit 21">
+            <a:extLst>
+              <a:ext uri="{FF2B5EF4-FFF2-40B4-BE49-F238E27FC236}">
+                <a16:creationId xmlns:a16="http://schemas.microsoft.com/office/drawing/2014/main" id="{29347A99-855F-60A5-CBF0-2A3EE74A5162}"/>
+              </a:ext>
+            </a:extLst>
+          </p:cNvPr>
+          <p:cNvCxnSpPr>
+            <a:cxnSpLocks/>
+          </p:cNvCxnSpPr>
+          <p:nvPr/>
+        </p:nvCxnSpPr>
+        <p:spPr>
+          <a:xfrm>
+            <a:off x="9649532" y="3295762"/>
+            <a:ext cx="0" cy="1495192"/>
+          </a:xfrm>
+          <a:prstGeom prst="line">
+            <a:avLst/>
+          </a:prstGeom>
+          <a:ln w="28575">
+            <a:solidFill>
+              <a:srgbClr val="FF0000"/>
+            </a:solidFill>
+          </a:ln>
+        </p:spPr>
+        <p:style>
+          <a:lnRef idx="1">
+            <a:schemeClr val="accent1"/>
+          </a:lnRef>
+          <a:fillRef idx="0">
+            <a:schemeClr val="accent1"/>
+          </a:fillRef>
+          <a:effectRef idx="0">
+            <a:schemeClr val="accent1"/>
+          </a:effectRef>
+          <a:fontRef idx="minor">
+            <a:schemeClr val="tx1"/>
+          </a:fontRef>
+        </p:style>
+      </p:cxnSp>
+      <p:cxnSp>
+        <p:nvCxnSpPr>
+          <p:cNvPr id="24" name="Connecteur droit 23">
+            <a:extLst>
+              <a:ext uri="{FF2B5EF4-FFF2-40B4-BE49-F238E27FC236}">
+                <a16:creationId xmlns:a16="http://schemas.microsoft.com/office/drawing/2014/main" id="{327536F0-1C3C-AD28-ED9A-3C8ECC8DCB69}"/>
+              </a:ext>
+            </a:extLst>
+          </p:cNvPr>
+          <p:cNvCxnSpPr>
+            <a:cxnSpLocks/>
+          </p:cNvCxnSpPr>
+          <p:nvPr/>
+        </p:nvCxnSpPr>
+        <p:spPr>
+          <a:xfrm>
+            <a:off x="11326902" y="3069925"/>
+            <a:ext cx="16848" cy="1721028"/>
+          </a:xfrm>
+          <a:prstGeom prst="line">
+            <a:avLst/>
+          </a:prstGeom>
+          <a:ln w="28575">
+            <a:solidFill>
+              <a:schemeClr val="tx1"/>
+            </a:solidFill>
+          </a:ln>
+        </p:spPr>
+        <p:style>
+          <a:lnRef idx="1">
+            <a:schemeClr val="accent1"/>
+          </a:lnRef>
+          <a:fillRef idx="0">
+            <a:schemeClr val="accent1"/>
+          </a:fillRef>
+          <a:effectRef idx="0">
+            <a:schemeClr val="accent1"/>
+          </a:effectRef>
+          <a:fontRef idx="minor">
+            <a:schemeClr val="tx1"/>
+          </a:fontRef>
+        </p:style>
+      </p:cxnSp>
+      <p:cxnSp>
+        <p:nvCxnSpPr>
+          <p:cNvPr id="29" name="Connecteur droit 28">
+            <a:extLst>
+              <a:ext uri="{FF2B5EF4-FFF2-40B4-BE49-F238E27FC236}">
+                <a16:creationId xmlns:a16="http://schemas.microsoft.com/office/drawing/2014/main" id="{40A45F03-715F-CC33-AA3E-58C599BEE898}"/>
+              </a:ext>
+            </a:extLst>
+          </p:cNvPr>
+          <p:cNvCxnSpPr>
+            <a:cxnSpLocks/>
+          </p:cNvCxnSpPr>
+          <p:nvPr/>
+        </p:nvCxnSpPr>
+        <p:spPr>
+          <a:xfrm flipH="1">
+            <a:off x="9928179" y="3069925"/>
+            <a:ext cx="1411025" cy="0"/>
+          </a:xfrm>
+          <a:prstGeom prst="line">
+            <a:avLst/>
+          </a:prstGeom>
+          <a:ln w="28575">
+            <a:solidFill>
+              <a:schemeClr val="tx1"/>
+            </a:solidFill>
+          </a:ln>
+        </p:spPr>
+        <p:style>
+          <a:lnRef idx="1">
+            <a:schemeClr val="accent1"/>
+          </a:lnRef>
+          <a:fillRef idx="0">
+            <a:schemeClr val="accent1"/>
+          </a:fillRef>
+          <a:effectRef idx="0">
+            <a:schemeClr val="accent1"/>
+          </a:effectRef>
+          <a:fontRef idx="minor">
+            <a:schemeClr val="tx1"/>
+          </a:fontRef>
+        </p:style>
+      </p:cxnSp>
+      <p:sp>
+        <p:nvSpPr>
+          <p:cNvPr id="43" name="Rectangle 42">
+            <a:extLst>
+              <a:ext uri="{FF2B5EF4-FFF2-40B4-BE49-F238E27FC236}">
+                <a16:creationId xmlns:a16="http://schemas.microsoft.com/office/drawing/2014/main" id="{4069B1F4-6E4E-FC1F-035A-94EB06AA3A02}"/>
               </a:ext>
             </a:extLst>
           </p:cNvPr>
@@ -3373,8 +3513,8 @@
         </p:nvSpPr>
         <p:spPr>
           <a:xfrm>
-            <a:off x="6049926" y="4520069"/>
-            <a:ext cx="2375919" cy="380600"/>
+            <a:off x="5189179" y="404219"/>
+            <a:ext cx="906821" cy="380601"/>
           </a:xfrm>
           <a:prstGeom prst="rect">
             <a:avLst/>
@@ -3415,17 +3555,17 @@
                   <a:srgbClr val="28AAE1"/>
                 </a:solidFill>
               </a:rPr>
-              <a:t>Capteur Température</a:t>
-            </a:r>
-          </a:p>
-        </p:txBody>
-      </p:sp>
-      <p:sp>
-        <p:nvSpPr>
-          <p:cNvPr id="11" name="Rectangle 10">
-            <a:extLst>
-              <a:ext uri="{FF2B5EF4-FFF2-40B4-BE49-F238E27FC236}">
-                <a16:creationId xmlns:a16="http://schemas.microsoft.com/office/drawing/2014/main" id="{A17F07F2-92D1-4DE2-E2F9-4DD3428EC191}"/>
+              <a:t>PB3</a:t>
+            </a:r>
+          </a:p>
+        </p:txBody>
+      </p:sp>
+      <p:sp>
+        <p:nvSpPr>
+          <p:cNvPr id="45" name="Rectangle 44">
+            <a:extLst>
+              <a:ext uri="{FF2B5EF4-FFF2-40B4-BE49-F238E27FC236}">
+                <a16:creationId xmlns:a16="http://schemas.microsoft.com/office/drawing/2014/main" id="{E344CE09-2A4B-E538-6C84-09B576A82DD0}"/>
               </a:ext>
             </a:extLst>
           </p:cNvPr>
@@ -3434,8 +3574,8 @@
         </p:nvSpPr>
         <p:spPr>
           <a:xfrm>
-            <a:off x="6049927" y="4908433"/>
-            <a:ext cx="2375919" cy="380601"/>
+            <a:off x="4243912" y="815461"/>
+            <a:ext cx="906821" cy="380601"/>
           </a:xfrm>
           <a:prstGeom prst="rect">
             <a:avLst/>
@@ -3476,275 +3616,17 @@
                   <a:srgbClr val="28AAE1"/>
                 </a:solidFill>
               </a:rPr>
-              <a:t>Capteur Humidité</a:t>
-            </a:r>
-          </a:p>
-        </p:txBody>
-      </p:sp>
-      <p:cxnSp>
-        <p:nvCxnSpPr>
-          <p:cNvPr id="21" name="Connecteur droit 20">
-            <a:extLst>
-              <a:ext uri="{FF2B5EF4-FFF2-40B4-BE49-F238E27FC236}">
-                <a16:creationId xmlns:a16="http://schemas.microsoft.com/office/drawing/2014/main" id="{C2502832-5496-5546-14F5-A44ED46C04D6}"/>
-              </a:ext>
-            </a:extLst>
-          </p:cNvPr>
-          <p:cNvCxnSpPr>
-            <a:cxnSpLocks/>
-          </p:cNvCxnSpPr>
-          <p:nvPr/>
-        </p:nvCxnSpPr>
-        <p:spPr>
-          <a:xfrm>
-            <a:off x="9879949" y="1930400"/>
-            <a:ext cx="0" cy="690880"/>
-          </a:xfrm>
-          <a:prstGeom prst="line">
-            <a:avLst/>
-          </a:prstGeom>
-          <a:ln w="28575">
-            <a:solidFill>
-              <a:srgbClr val="FF0000"/>
-            </a:solidFill>
-          </a:ln>
-        </p:spPr>
-        <p:style>
-          <a:lnRef idx="1">
-            <a:schemeClr val="accent1"/>
-          </a:lnRef>
-          <a:fillRef idx="0">
-            <a:schemeClr val="accent1"/>
-          </a:fillRef>
-          <a:effectRef idx="0">
-            <a:schemeClr val="accent1"/>
-          </a:effectRef>
-          <a:fontRef idx="minor">
-            <a:schemeClr val="tx1"/>
-          </a:fontRef>
-        </p:style>
-      </p:cxnSp>
-      <p:cxnSp>
-        <p:nvCxnSpPr>
-          <p:cNvPr id="22" name="Connecteur droit 21">
-            <a:extLst>
-              <a:ext uri="{FF2B5EF4-FFF2-40B4-BE49-F238E27FC236}">
-                <a16:creationId xmlns:a16="http://schemas.microsoft.com/office/drawing/2014/main" id="{29347A99-855F-60A5-CBF0-2A3EE74A5162}"/>
-              </a:ext>
-            </a:extLst>
-          </p:cNvPr>
-          <p:cNvCxnSpPr>
-            <a:cxnSpLocks/>
-          </p:cNvCxnSpPr>
-          <p:nvPr/>
-        </p:nvCxnSpPr>
-        <p:spPr>
-          <a:xfrm>
-            <a:off x="9879948" y="3429000"/>
-            <a:ext cx="0" cy="970280"/>
-          </a:xfrm>
-          <a:prstGeom prst="line">
-            <a:avLst/>
-          </a:prstGeom>
-          <a:ln w="28575">
-            <a:solidFill>
-              <a:srgbClr val="FF0000"/>
-            </a:solidFill>
-          </a:ln>
-        </p:spPr>
-        <p:style>
-          <a:lnRef idx="1">
-            <a:schemeClr val="accent1"/>
-          </a:lnRef>
-          <a:fillRef idx="0">
-            <a:schemeClr val="accent1"/>
-          </a:fillRef>
-          <a:effectRef idx="0">
-            <a:schemeClr val="accent1"/>
-          </a:effectRef>
-          <a:fontRef idx="minor">
-            <a:schemeClr val="tx1"/>
-          </a:fontRef>
-        </p:style>
-      </p:cxnSp>
-      <p:cxnSp>
-        <p:nvCxnSpPr>
-          <p:cNvPr id="24" name="Connecteur droit 23">
-            <a:extLst>
-              <a:ext uri="{FF2B5EF4-FFF2-40B4-BE49-F238E27FC236}">
-                <a16:creationId xmlns:a16="http://schemas.microsoft.com/office/drawing/2014/main" id="{327536F0-1C3C-AD28-ED9A-3C8ECC8DCB69}"/>
-              </a:ext>
-            </a:extLst>
-          </p:cNvPr>
-          <p:cNvCxnSpPr>
-            <a:cxnSpLocks/>
-          </p:cNvCxnSpPr>
-          <p:nvPr/>
-        </p:nvCxnSpPr>
-        <p:spPr>
-          <a:xfrm>
-            <a:off x="11550824" y="3078480"/>
-            <a:ext cx="0" cy="1145540"/>
-          </a:xfrm>
-          <a:prstGeom prst="line">
-            <a:avLst/>
-          </a:prstGeom>
-          <a:ln w="28575">
-            <a:solidFill>
-              <a:schemeClr val="tx1"/>
-            </a:solidFill>
-          </a:ln>
-        </p:spPr>
-        <p:style>
-          <a:lnRef idx="1">
-            <a:schemeClr val="accent1"/>
-          </a:lnRef>
-          <a:fillRef idx="0">
-            <a:schemeClr val="accent1"/>
-          </a:fillRef>
-          <a:effectRef idx="0">
-            <a:schemeClr val="accent1"/>
-          </a:effectRef>
-          <a:fontRef idx="minor">
-            <a:schemeClr val="tx1"/>
-          </a:fontRef>
-        </p:style>
-      </p:cxnSp>
-      <p:cxnSp>
-        <p:nvCxnSpPr>
-          <p:cNvPr id="29" name="Connecteur droit 28">
-            <a:extLst>
-              <a:ext uri="{FF2B5EF4-FFF2-40B4-BE49-F238E27FC236}">
-                <a16:creationId xmlns:a16="http://schemas.microsoft.com/office/drawing/2014/main" id="{40A45F03-715F-CC33-AA3E-58C599BEE898}"/>
-              </a:ext>
-            </a:extLst>
-          </p:cNvPr>
-          <p:cNvCxnSpPr>
-            <a:cxnSpLocks/>
-          </p:cNvCxnSpPr>
-          <p:nvPr/>
-        </p:nvCxnSpPr>
-        <p:spPr>
-          <a:xfrm flipH="1">
-            <a:off x="10169381" y="3078480"/>
-            <a:ext cx="1381443" cy="0"/>
-          </a:xfrm>
-          <a:prstGeom prst="line">
-            <a:avLst/>
-          </a:prstGeom>
-          <a:ln w="28575">
-            <a:solidFill>
-              <a:schemeClr val="tx1"/>
-            </a:solidFill>
-          </a:ln>
-        </p:spPr>
-        <p:style>
-          <a:lnRef idx="1">
-            <a:schemeClr val="accent1"/>
-          </a:lnRef>
-          <a:fillRef idx="0">
-            <a:schemeClr val="accent1"/>
-          </a:fillRef>
-          <a:effectRef idx="0">
-            <a:schemeClr val="accent1"/>
-          </a:effectRef>
-          <a:fontRef idx="minor">
-            <a:schemeClr val="tx1"/>
-          </a:fontRef>
-        </p:style>
-      </p:cxnSp>
-      <p:cxnSp>
-        <p:nvCxnSpPr>
-          <p:cNvPr id="34" name="Connecteur droit 33">
-            <a:extLst>
-              <a:ext uri="{FF2B5EF4-FFF2-40B4-BE49-F238E27FC236}">
-                <a16:creationId xmlns:a16="http://schemas.microsoft.com/office/drawing/2014/main" id="{842DE523-DB84-2641-9AE6-DBA0A1F00B67}"/>
-              </a:ext>
-            </a:extLst>
-          </p:cNvPr>
-          <p:cNvCxnSpPr>
-            <a:cxnSpLocks/>
-          </p:cNvCxnSpPr>
-          <p:nvPr/>
-        </p:nvCxnSpPr>
-        <p:spPr>
-          <a:xfrm>
-            <a:off x="5512884" y="4722542"/>
-            <a:ext cx="518474" cy="0"/>
-          </a:xfrm>
-          <a:prstGeom prst="line">
-            <a:avLst/>
-          </a:prstGeom>
-          <a:ln w="28575">
-            <a:solidFill>
-              <a:srgbClr val="28AAE1"/>
-            </a:solidFill>
-          </a:ln>
-        </p:spPr>
-        <p:style>
-          <a:lnRef idx="1">
-            <a:schemeClr val="accent1"/>
-          </a:lnRef>
-          <a:fillRef idx="0">
-            <a:schemeClr val="accent1"/>
-          </a:fillRef>
-          <a:effectRef idx="0">
-            <a:schemeClr val="accent1"/>
-          </a:effectRef>
-          <a:fontRef idx="minor">
-            <a:schemeClr val="tx1"/>
-          </a:fontRef>
-        </p:style>
-      </p:cxnSp>
-      <p:cxnSp>
-        <p:nvCxnSpPr>
-          <p:cNvPr id="36" name="Connecteur droit 35">
-            <a:extLst>
-              <a:ext uri="{FF2B5EF4-FFF2-40B4-BE49-F238E27FC236}">
-                <a16:creationId xmlns:a16="http://schemas.microsoft.com/office/drawing/2014/main" id="{C7A2A548-79AA-38AC-F373-A41A9A9570C6}"/>
-              </a:ext>
-            </a:extLst>
-          </p:cNvPr>
-          <p:cNvCxnSpPr>
-            <a:endCxn id="11" idx="1"/>
-          </p:cNvCxnSpPr>
-          <p:nvPr/>
-        </p:nvCxnSpPr>
-        <p:spPr>
-          <a:xfrm>
-            <a:off x="5512884" y="5098733"/>
-            <a:ext cx="537042" cy="0"/>
-          </a:xfrm>
-          <a:prstGeom prst="line">
-            <a:avLst/>
-          </a:prstGeom>
-          <a:ln w="28575">
-            <a:solidFill>
-              <a:srgbClr val="28AAE1"/>
-            </a:solidFill>
-          </a:ln>
-        </p:spPr>
-        <p:style>
-          <a:lnRef idx="1">
-            <a:schemeClr val="accent1"/>
-          </a:lnRef>
-          <a:fillRef idx="0">
-            <a:schemeClr val="accent1"/>
-          </a:fillRef>
-          <a:effectRef idx="0">
-            <a:schemeClr val="accent1"/>
-          </a:effectRef>
-          <a:fontRef idx="minor">
-            <a:schemeClr val="tx1"/>
-          </a:fontRef>
-        </p:style>
-      </p:cxnSp>
-      <p:sp>
-        <p:nvSpPr>
-          <p:cNvPr id="43" name="Rectangle 42">
-            <a:extLst>
-              <a:ext uri="{FF2B5EF4-FFF2-40B4-BE49-F238E27FC236}">
-                <a16:creationId xmlns:a16="http://schemas.microsoft.com/office/drawing/2014/main" id="{4069B1F4-6E4E-FC1F-035A-94EB06AA3A02}"/>
+              <a:t>PB1</a:t>
+            </a:r>
+          </a:p>
+        </p:txBody>
+      </p:sp>
+      <p:sp>
+        <p:nvSpPr>
+          <p:cNvPr id="44" name="Rectangle 43">
+            <a:extLst>
+              <a:ext uri="{FF2B5EF4-FFF2-40B4-BE49-F238E27FC236}">
+                <a16:creationId xmlns:a16="http://schemas.microsoft.com/office/drawing/2014/main" id="{F0F06605-62C7-B1AB-BDB5-298F9270F1AA}"/>
               </a:ext>
             </a:extLst>
           </p:cNvPr>
@@ -3753,7 +3635,7 @@
         </p:nvSpPr>
         <p:spPr>
           <a:xfrm>
-            <a:off x="5814262" y="3224507"/>
+            <a:off x="5189179" y="815460"/>
             <a:ext cx="906821" cy="380601"/>
           </a:xfrm>
           <a:prstGeom prst="rect">
@@ -3795,17 +3677,229 @@
                   <a:srgbClr val="28AAE1"/>
                 </a:solidFill>
               </a:rPr>
-              <a:t>PB3</a:t>
-            </a:r>
-          </a:p>
-        </p:txBody>
-      </p:sp>
-      <p:sp>
-        <p:nvSpPr>
-          <p:cNvPr id="45" name="Rectangle 44">
-            <a:extLst>
-              <a:ext uri="{FF2B5EF4-FFF2-40B4-BE49-F238E27FC236}">
-                <a16:creationId xmlns:a16="http://schemas.microsoft.com/office/drawing/2014/main" id="{E344CE09-2A4B-E538-6C84-09B576A82DD0}"/>
+              <a:t>PB2</a:t>
+            </a:r>
+          </a:p>
+        </p:txBody>
+      </p:sp>
+      <p:sp>
+        <p:nvSpPr>
+          <p:cNvPr id="60" name="ZoneTexte 59">
+            <a:extLst>
+              <a:ext uri="{FF2B5EF4-FFF2-40B4-BE49-F238E27FC236}">
+                <a16:creationId xmlns:a16="http://schemas.microsoft.com/office/drawing/2014/main" id="{3F43AF37-EC7B-9B18-CA07-1D840CAC793D}"/>
+              </a:ext>
+            </a:extLst>
+          </p:cNvPr>
+          <p:cNvSpPr txBox="1"/>
+          <p:nvPr/>
+        </p:nvSpPr>
+        <p:spPr>
+          <a:xfrm>
+            <a:off x="6923983" y="3295762"/>
+            <a:ext cx="1733323" cy="261610"/>
+          </a:xfrm>
+          <a:prstGeom prst="rect">
+            <a:avLst/>
+          </a:prstGeom>
+          <a:noFill/>
+        </p:spPr>
+        <p:txBody>
+          <a:bodyPr wrap="square">
+            <a:spAutoFit/>
+          </a:bodyPr>
+          <a:lstStyle/>
+          <a:p>
+            <a:r>
+              <a:rPr lang="fr-FR" sz="1100" dirty="0">
+                <a:solidFill>
+                  <a:schemeClr val="tx1">
+                    <a:lumMod val="50000"/>
+                    <a:lumOff val="50000"/>
+                  </a:schemeClr>
+                </a:solidFill>
+              </a:rPr>
+              <a:t>GND – VCC – SIG -&gt; Io34</a:t>
+            </a:r>
+          </a:p>
+        </p:txBody>
+      </p:sp>
+      <p:cxnSp>
+        <p:nvCxnSpPr>
+          <p:cNvPr id="67" name="Connecteur droit 66">
+            <a:extLst>
+              <a:ext uri="{FF2B5EF4-FFF2-40B4-BE49-F238E27FC236}">
+                <a16:creationId xmlns:a16="http://schemas.microsoft.com/office/drawing/2014/main" id="{993A1672-FFF2-D5D0-CE92-C95CF0B3DC26}"/>
+              </a:ext>
+            </a:extLst>
+          </p:cNvPr>
+          <p:cNvCxnSpPr/>
+          <p:nvPr/>
+        </p:nvCxnSpPr>
+        <p:spPr>
+          <a:xfrm>
+            <a:off x="9801933" y="1764365"/>
+            <a:ext cx="0" cy="690880"/>
+          </a:xfrm>
+          <a:prstGeom prst="line">
+            <a:avLst/>
+          </a:prstGeom>
+          <a:ln w="28575">
+            <a:solidFill>
+              <a:schemeClr val="tx1"/>
+            </a:solidFill>
+          </a:ln>
+        </p:spPr>
+        <p:style>
+          <a:lnRef idx="1">
+            <a:schemeClr val="accent1"/>
+          </a:lnRef>
+          <a:fillRef idx="0">
+            <a:schemeClr val="accent1"/>
+          </a:fillRef>
+          <a:effectRef idx="0">
+            <a:schemeClr val="accent1"/>
+          </a:effectRef>
+          <a:fontRef idx="minor">
+            <a:schemeClr val="tx1"/>
+          </a:fontRef>
+        </p:style>
+      </p:cxnSp>
+      <p:cxnSp>
+        <p:nvCxnSpPr>
+          <p:cNvPr id="70" name="Connecteur droit 69">
+            <a:extLst>
+              <a:ext uri="{FF2B5EF4-FFF2-40B4-BE49-F238E27FC236}">
+                <a16:creationId xmlns:a16="http://schemas.microsoft.com/office/drawing/2014/main" id="{B36487D0-E460-8200-DEFC-34D1688346DB}"/>
+              </a:ext>
+            </a:extLst>
+          </p:cNvPr>
+          <p:cNvCxnSpPr>
+            <a:cxnSpLocks/>
+          </p:cNvCxnSpPr>
+          <p:nvPr/>
+        </p:nvCxnSpPr>
+        <p:spPr>
+          <a:xfrm>
+            <a:off x="9813507" y="3262964"/>
+            <a:ext cx="0" cy="1527990"/>
+          </a:xfrm>
+          <a:prstGeom prst="line">
+            <a:avLst/>
+          </a:prstGeom>
+          <a:ln w="28575">
+            <a:solidFill>
+              <a:schemeClr val="tx1"/>
+            </a:solidFill>
+          </a:ln>
+        </p:spPr>
+        <p:style>
+          <a:lnRef idx="1">
+            <a:schemeClr val="accent1"/>
+          </a:lnRef>
+          <a:fillRef idx="0">
+            <a:schemeClr val="accent1"/>
+          </a:fillRef>
+          <a:effectRef idx="0">
+            <a:schemeClr val="accent1"/>
+          </a:effectRef>
+          <a:fontRef idx="minor">
+            <a:schemeClr val="tx1"/>
+          </a:fontRef>
+        </p:style>
+      </p:cxnSp>
+      <p:cxnSp>
+        <p:nvCxnSpPr>
+          <p:cNvPr id="71" name="Connecteur droit 70">
+            <a:extLst>
+              <a:ext uri="{FF2B5EF4-FFF2-40B4-BE49-F238E27FC236}">
+                <a16:creationId xmlns:a16="http://schemas.microsoft.com/office/drawing/2014/main" id="{C2663933-C3A2-5788-6CF7-67C97E1393A7}"/>
+              </a:ext>
+            </a:extLst>
+          </p:cNvPr>
+          <p:cNvCxnSpPr>
+            <a:cxnSpLocks/>
+          </p:cNvCxnSpPr>
+          <p:nvPr/>
+        </p:nvCxnSpPr>
+        <p:spPr>
+          <a:xfrm>
+            <a:off x="11073810" y="3236254"/>
+            <a:ext cx="6240" cy="1554700"/>
+          </a:xfrm>
+          <a:prstGeom prst="line">
+            <a:avLst/>
+          </a:prstGeom>
+          <a:ln w="28575">
+            <a:solidFill>
+              <a:srgbClr val="FF0000"/>
+            </a:solidFill>
+          </a:ln>
+        </p:spPr>
+        <p:style>
+          <a:lnRef idx="1">
+            <a:schemeClr val="accent1"/>
+          </a:lnRef>
+          <a:fillRef idx="0">
+            <a:schemeClr val="accent1"/>
+          </a:fillRef>
+          <a:effectRef idx="0">
+            <a:schemeClr val="accent1"/>
+          </a:effectRef>
+          <a:fontRef idx="minor">
+            <a:schemeClr val="tx1"/>
+          </a:fontRef>
+        </p:style>
+      </p:cxnSp>
+      <p:cxnSp>
+        <p:nvCxnSpPr>
+          <p:cNvPr id="72" name="Connecteur droit 71">
+            <a:extLst>
+              <a:ext uri="{FF2B5EF4-FFF2-40B4-BE49-F238E27FC236}">
+                <a16:creationId xmlns:a16="http://schemas.microsoft.com/office/drawing/2014/main" id="{C19A11B1-4D97-FF8E-EABD-F4A69186F4AB}"/>
+              </a:ext>
+            </a:extLst>
+          </p:cNvPr>
+          <p:cNvCxnSpPr>
+            <a:cxnSpLocks/>
+          </p:cNvCxnSpPr>
+          <p:nvPr/>
+        </p:nvCxnSpPr>
+        <p:spPr>
+          <a:xfrm flipH="1">
+            <a:off x="9767274" y="3220727"/>
+            <a:ext cx="1312776" cy="0"/>
+          </a:xfrm>
+          <a:prstGeom prst="line">
+            <a:avLst/>
+          </a:prstGeom>
+          <a:ln w="28575">
+            <a:solidFill>
+              <a:srgbClr val="FF0000"/>
+            </a:solidFill>
+          </a:ln>
+        </p:spPr>
+        <p:style>
+          <a:lnRef idx="1">
+            <a:schemeClr val="accent1"/>
+          </a:lnRef>
+          <a:fillRef idx="0">
+            <a:schemeClr val="accent1"/>
+          </a:fillRef>
+          <a:effectRef idx="0">
+            <a:schemeClr val="accent1"/>
+          </a:effectRef>
+          <a:fontRef idx="minor">
+            <a:schemeClr val="tx1"/>
+          </a:fontRef>
+        </p:style>
+      </p:cxnSp>
+      <p:sp>
+        <p:nvSpPr>
+          <p:cNvPr id="8" name="Rectangle 7">
+            <a:extLst>
+              <a:ext uri="{FF2B5EF4-FFF2-40B4-BE49-F238E27FC236}">
+                <a16:creationId xmlns:a16="http://schemas.microsoft.com/office/drawing/2014/main" id="{5E5586FA-F5C1-8F2F-194F-BE4108D12B7F}"/>
               </a:ext>
             </a:extLst>
           </p:cNvPr>
@@ -3814,8 +3908,8 @@
         </p:nvSpPr>
         <p:spPr>
           <a:xfrm>
-            <a:off x="5815442" y="2443480"/>
-            <a:ext cx="906821" cy="380601"/>
+            <a:off x="9040580" y="4790954"/>
+            <a:ext cx="1421314" cy="883920"/>
           </a:xfrm>
           <a:prstGeom prst="rect">
             <a:avLst/>
@@ -3856,183 +3950,17 @@
                   <a:srgbClr val="28AAE1"/>
                 </a:solidFill>
               </a:rPr>
-              <a:t>PB1</a:t>
-            </a:r>
-          </a:p>
-        </p:txBody>
-      </p:sp>
-      <p:cxnSp>
-        <p:nvCxnSpPr>
-          <p:cNvPr id="46" name="Connecteur droit 45">
-            <a:extLst>
-              <a:ext uri="{FF2B5EF4-FFF2-40B4-BE49-F238E27FC236}">
-                <a16:creationId xmlns:a16="http://schemas.microsoft.com/office/drawing/2014/main" id="{D6FC7524-BBDF-FECA-AC31-08F63B304D62}"/>
-              </a:ext>
-            </a:extLst>
-          </p:cNvPr>
-          <p:cNvCxnSpPr/>
-          <p:nvPr/>
-        </p:nvCxnSpPr>
-        <p:spPr>
-          <a:xfrm>
-            <a:off x="1666748" y="1342067"/>
-            <a:ext cx="537042" cy="0"/>
-          </a:xfrm>
-          <a:prstGeom prst="line">
-            <a:avLst/>
-          </a:prstGeom>
-          <a:ln w="28575">
-            <a:solidFill>
-              <a:srgbClr val="28AAE1"/>
-            </a:solidFill>
-          </a:ln>
-        </p:spPr>
-        <p:style>
-          <a:lnRef idx="1">
-            <a:schemeClr val="accent1"/>
-          </a:lnRef>
-          <a:fillRef idx="0">
-            <a:schemeClr val="accent1"/>
-          </a:fillRef>
-          <a:effectRef idx="0">
-            <a:schemeClr val="accent1"/>
-          </a:effectRef>
-          <a:fontRef idx="minor">
-            <a:schemeClr val="tx1"/>
-          </a:fontRef>
-        </p:style>
-      </p:cxnSp>
-      <p:cxnSp>
-        <p:nvCxnSpPr>
-          <p:cNvPr id="47" name="Connecteur droit 46">
-            <a:extLst>
-              <a:ext uri="{FF2B5EF4-FFF2-40B4-BE49-F238E27FC236}">
-                <a16:creationId xmlns:a16="http://schemas.microsoft.com/office/drawing/2014/main" id="{06CFCB6C-0BFC-C599-31ED-A90AA64635D0}"/>
-              </a:ext>
-            </a:extLst>
-          </p:cNvPr>
-          <p:cNvCxnSpPr/>
-          <p:nvPr/>
-        </p:nvCxnSpPr>
-        <p:spPr>
-          <a:xfrm>
-            <a:off x="1631444" y="4392616"/>
-            <a:ext cx="537042" cy="0"/>
-          </a:xfrm>
-          <a:prstGeom prst="line">
-            <a:avLst/>
-          </a:prstGeom>
-          <a:ln w="28575">
-            <a:solidFill>
-              <a:srgbClr val="28AAE1"/>
-            </a:solidFill>
-          </a:ln>
-        </p:spPr>
-        <p:style>
-          <a:lnRef idx="1">
-            <a:schemeClr val="accent1"/>
-          </a:lnRef>
-          <a:fillRef idx="0">
-            <a:schemeClr val="accent1"/>
-          </a:fillRef>
-          <a:effectRef idx="0">
-            <a:schemeClr val="accent1"/>
-          </a:effectRef>
-          <a:fontRef idx="minor">
-            <a:schemeClr val="tx1"/>
-          </a:fontRef>
-        </p:style>
-      </p:cxnSp>
-      <p:cxnSp>
-        <p:nvCxnSpPr>
-          <p:cNvPr id="48" name="Connecteur droit 47">
-            <a:extLst>
-              <a:ext uri="{FF2B5EF4-FFF2-40B4-BE49-F238E27FC236}">
-                <a16:creationId xmlns:a16="http://schemas.microsoft.com/office/drawing/2014/main" id="{5BD5BEAD-C297-AD82-37E4-3C5CF835636D}"/>
-              </a:ext>
-            </a:extLst>
-          </p:cNvPr>
-          <p:cNvCxnSpPr>
-            <a:cxnSpLocks/>
-          </p:cNvCxnSpPr>
-          <p:nvPr/>
-        </p:nvCxnSpPr>
-        <p:spPr>
-          <a:xfrm>
-            <a:off x="5446750" y="2716260"/>
-            <a:ext cx="367512" cy="0"/>
-          </a:xfrm>
-          <a:prstGeom prst="line">
-            <a:avLst/>
-          </a:prstGeom>
-          <a:ln w="28575">
-            <a:solidFill>
-              <a:srgbClr val="28AAE1"/>
-            </a:solidFill>
-          </a:ln>
-        </p:spPr>
-        <p:style>
-          <a:lnRef idx="1">
-            <a:schemeClr val="accent1"/>
-          </a:lnRef>
-          <a:fillRef idx="0">
-            <a:schemeClr val="accent1"/>
-          </a:fillRef>
-          <a:effectRef idx="0">
-            <a:schemeClr val="accent1"/>
-          </a:effectRef>
-          <a:fontRef idx="minor">
-            <a:schemeClr val="tx1"/>
-          </a:fontRef>
-        </p:style>
-      </p:cxnSp>
-      <p:cxnSp>
-        <p:nvCxnSpPr>
-          <p:cNvPr id="50" name="Connecteur droit 49">
-            <a:extLst>
-              <a:ext uri="{FF2B5EF4-FFF2-40B4-BE49-F238E27FC236}">
-                <a16:creationId xmlns:a16="http://schemas.microsoft.com/office/drawing/2014/main" id="{56FA1F1B-5FA8-FC44-EA85-5C7376888F55}"/>
-              </a:ext>
-            </a:extLst>
-          </p:cNvPr>
-          <p:cNvCxnSpPr/>
-          <p:nvPr/>
-        </p:nvCxnSpPr>
-        <p:spPr>
-          <a:xfrm>
-            <a:off x="1646380" y="4758263"/>
-            <a:ext cx="537042" cy="0"/>
-          </a:xfrm>
-          <a:prstGeom prst="line">
-            <a:avLst/>
-          </a:prstGeom>
-          <a:ln w="28575">
-            <a:solidFill>
-              <a:srgbClr val="28AAE1"/>
-            </a:solidFill>
-          </a:ln>
-        </p:spPr>
-        <p:style>
-          <a:lnRef idx="1">
-            <a:schemeClr val="accent1"/>
-          </a:lnRef>
-          <a:fillRef idx="0">
-            <a:schemeClr val="accent1"/>
-          </a:fillRef>
-          <a:effectRef idx="0">
-            <a:schemeClr val="accent1"/>
-          </a:effectRef>
-          <a:fontRef idx="minor">
-            <a:schemeClr val="tx1"/>
-          </a:fontRef>
-        </p:style>
-      </p:cxnSp>
-      <p:sp>
-        <p:nvSpPr>
-          <p:cNvPr id="44" name="Rectangle 43">
-            <a:extLst>
-              <a:ext uri="{FF2B5EF4-FFF2-40B4-BE49-F238E27FC236}">
-                <a16:creationId xmlns:a16="http://schemas.microsoft.com/office/drawing/2014/main" id="{F0F06605-62C7-B1AB-BDB5-298F9270F1AA}"/>
+              <a:t>Pompe</a:t>
+            </a:r>
+          </a:p>
+        </p:txBody>
+      </p:sp>
+      <p:sp>
+        <p:nvSpPr>
+          <p:cNvPr id="9" name="Rectangle 8">
+            <a:extLst>
+              <a:ext uri="{FF2B5EF4-FFF2-40B4-BE49-F238E27FC236}">
+                <a16:creationId xmlns:a16="http://schemas.microsoft.com/office/drawing/2014/main" id="{813E4796-817F-5D6A-49E2-D8FA3580C0E4}"/>
               </a:ext>
             </a:extLst>
           </p:cNvPr>
@@ -4041,8 +3969,8 @@
         </p:nvSpPr>
         <p:spPr>
           <a:xfrm>
-            <a:off x="5815442" y="2830915"/>
-            <a:ext cx="906821" cy="380601"/>
+            <a:off x="10514939" y="4790954"/>
+            <a:ext cx="1436604" cy="883920"/>
           </a:xfrm>
           <a:prstGeom prst="rect">
             <a:avLst/>
@@ -4083,164 +4011,17 @@
                   <a:srgbClr val="28AAE1"/>
                 </a:solidFill>
               </a:rPr>
-              <a:t>PB2</a:t>
-            </a:r>
-          </a:p>
-        </p:txBody>
-      </p:sp>
-      <p:cxnSp>
-        <p:nvCxnSpPr>
-          <p:cNvPr id="51" name="Connecteur droit 50">
-            <a:extLst>
-              <a:ext uri="{FF2B5EF4-FFF2-40B4-BE49-F238E27FC236}">
-                <a16:creationId xmlns:a16="http://schemas.microsoft.com/office/drawing/2014/main" id="{94EED7CE-446A-D815-C7E0-B05E23F07249}"/>
-              </a:ext>
-            </a:extLst>
-          </p:cNvPr>
-          <p:cNvCxnSpPr/>
-          <p:nvPr/>
-        </p:nvCxnSpPr>
-        <p:spPr>
-          <a:xfrm>
-            <a:off x="1667263" y="1702812"/>
-            <a:ext cx="537042" cy="0"/>
-          </a:xfrm>
-          <a:prstGeom prst="line">
-            <a:avLst/>
-          </a:prstGeom>
-          <a:ln w="28575">
-            <a:solidFill>
-              <a:srgbClr val="28AAE1"/>
-            </a:solidFill>
-          </a:ln>
-        </p:spPr>
-        <p:style>
-          <a:lnRef idx="1">
-            <a:schemeClr val="accent1"/>
-          </a:lnRef>
-          <a:fillRef idx="0">
-            <a:schemeClr val="accent1"/>
-          </a:fillRef>
-          <a:effectRef idx="0">
-            <a:schemeClr val="accent1"/>
-          </a:effectRef>
-          <a:fontRef idx="minor">
-            <a:schemeClr val="tx1"/>
-          </a:fontRef>
-        </p:style>
-      </p:cxnSp>
-      <p:sp>
-        <p:nvSpPr>
-          <p:cNvPr id="52" name="Rectangle 51">
-            <a:extLst>
-              <a:ext uri="{FF2B5EF4-FFF2-40B4-BE49-F238E27FC236}">
-                <a16:creationId xmlns:a16="http://schemas.microsoft.com/office/drawing/2014/main" id="{8F7E9A96-B426-4C20-2888-8F62F74606BD}"/>
-              </a:ext>
-            </a:extLst>
-          </p:cNvPr>
-          <p:cNvSpPr/>
-          <p:nvPr/>
-        </p:nvSpPr>
-        <p:spPr>
-          <a:xfrm>
-            <a:off x="270083" y="2815547"/>
-            <a:ext cx="1376297" cy="380601"/>
-          </a:xfrm>
-          <a:prstGeom prst="rect">
-            <a:avLst/>
-          </a:prstGeom>
-          <a:solidFill>
-            <a:srgbClr val="CCE3F6"/>
-          </a:solidFill>
-          <a:ln w="28575">
-            <a:solidFill>
-              <a:srgbClr val="28AAE1"/>
-            </a:solidFill>
-          </a:ln>
-        </p:spPr>
-        <p:style>
-          <a:lnRef idx="2">
-            <a:schemeClr val="accent1">
-              <a:shade val="15000"/>
-            </a:schemeClr>
-          </a:lnRef>
-          <a:fillRef idx="1">
-            <a:schemeClr val="accent1"/>
-          </a:fillRef>
-          <a:effectRef idx="0">
-            <a:schemeClr val="accent1"/>
-          </a:effectRef>
-          <a:fontRef idx="minor">
-            <a:schemeClr val="lt1"/>
-          </a:fontRef>
-        </p:style>
-        <p:txBody>
-          <a:bodyPr rtlCol="0" anchor="ctr"/>
-          <a:lstStyle/>
-          <a:p>
-            <a:pPr algn="ctr"/>
-            <a:r>
-              <a:rPr lang="fr-FR" b="1" dirty="0">
-                <a:solidFill>
-                  <a:srgbClr val="28AAE1"/>
-                </a:solidFill>
-              </a:rPr>
-              <a:t>Écran LCD </a:t>
-            </a:r>
-          </a:p>
-        </p:txBody>
-      </p:sp>
-      <p:cxnSp>
-        <p:nvCxnSpPr>
-          <p:cNvPr id="54" name="Connecteur : en angle 53">
-            <a:extLst>
-              <a:ext uri="{FF2B5EF4-FFF2-40B4-BE49-F238E27FC236}">
-                <a16:creationId xmlns:a16="http://schemas.microsoft.com/office/drawing/2014/main" id="{952DF366-120A-6023-9660-4A68C0F7F064}"/>
-              </a:ext>
-            </a:extLst>
-          </p:cNvPr>
-          <p:cNvCxnSpPr>
-            <a:cxnSpLocks/>
-          </p:cNvCxnSpPr>
-          <p:nvPr/>
-        </p:nvCxnSpPr>
-        <p:spPr>
-          <a:xfrm rot="10800000" flipV="1">
-            <a:off x="5512889" y="2874822"/>
-            <a:ext cx="3587277" cy="3191647"/>
-          </a:xfrm>
-          <a:prstGeom prst="bentConnector3">
-            <a:avLst>
-              <a:gd name="adj1" fmla="val 11633"/>
-            </a:avLst>
-          </a:prstGeom>
-          <a:ln w="28575">
-            <a:solidFill>
-              <a:srgbClr val="28AAE1"/>
-            </a:solidFill>
-          </a:ln>
-        </p:spPr>
-        <p:style>
-          <a:lnRef idx="1">
-            <a:schemeClr val="accent1"/>
-          </a:lnRef>
-          <a:fillRef idx="0">
-            <a:schemeClr val="accent1"/>
-          </a:fillRef>
-          <a:effectRef idx="0">
-            <a:schemeClr val="accent1"/>
-          </a:effectRef>
-          <a:fontRef idx="minor">
-            <a:schemeClr val="tx1"/>
-          </a:fontRef>
-        </p:style>
-      </p:cxnSp>
-      <p:sp>
-        <p:nvSpPr>
-          <p:cNvPr id="59" name="ZoneTexte 58">
-            <a:extLst>
-              <a:ext uri="{FF2B5EF4-FFF2-40B4-BE49-F238E27FC236}">
-                <a16:creationId xmlns:a16="http://schemas.microsoft.com/office/drawing/2014/main" id="{1BD7F523-C267-0D4A-F25F-0E558DEFB5AC}"/>
+              <a:t>Ventilateur</a:t>
+            </a:r>
+          </a:p>
+        </p:txBody>
+      </p:sp>
+      <p:sp>
+        <p:nvSpPr>
+          <p:cNvPr id="2" name="ZoneTexte 1">
+            <a:extLst>
+              <a:ext uri="{FF2B5EF4-FFF2-40B4-BE49-F238E27FC236}">
+                <a16:creationId xmlns:a16="http://schemas.microsoft.com/office/drawing/2014/main" id="{758B562E-F804-C3EB-DD14-9FE94914E997}"/>
               </a:ext>
             </a:extLst>
           </p:cNvPr>
@@ -4249,91 +4030,7 @@
         </p:nvSpPr>
         <p:spPr>
           <a:xfrm>
-            <a:off x="5928914" y="5255164"/>
-            <a:ext cx="1126248" cy="261610"/>
-          </a:xfrm>
-          <a:prstGeom prst="rect">
-            <a:avLst/>
-          </a:prstGeom>
-          <a:noFill/>
-        </p:spPr>
-        <p:txBody>
-          <a:bodyPr wrap="square">
-            <a:spAutoFit/>
-          </a:bodyPr>
-          <a:lstStyle/>
-          <a:p>
-            <a:r>
-              <a:rPr lang="fr-FR" sz="1100" dirty="0">
-                <a:solidFill>
-                  <a:schemeClr val="tx1">
-                    <a:lumMod val="50000"/>
-                    <a:lumOff val="50000"/>
-                  </a:schemeClr>
-                </a:solidFill>
-              </a:rPr>
-              <a:t>PA0 (ADC1_IN0)</a:t>
-            </a:r>
-          </a:p>
-        </p:txBody>
-      </p:sp>
-      <p:sp>
-        <p:nvSpPr>
-          <p:cNvPr id="60" name="ZoneTexte 59">
-            <a:extLst>
-              <a:ext uri="{FF2B5EF4-FFF2-40B4-BE49-F238E27FC236}">
-                <a16:creationId xmlns:a16="http://schemas.microsoft.com/office/drawing/2014/main" id="{3F43AF37-EC7B-9B18-CA07-1D840CAC793D}"/>
-              </a:ext>
-            </a:extLst>
-          </p:cNvPr>
-          <p:cNvSpPr txBox="1"/>
-          <p:nvPr/>
-        </p:nvSpPr>
-        <p:spPr>
-          <a:xfrm>
-            <a:off x="5946995" y="4258459"/>
-            <a:ext cx="1126248" cy="261610"/>
-          </a:xfrm>
-          <a:prstGeom prst="rect">
-            <a:avLst/>
-          </a:prstGeom>
-          <a:noFill/>
-        </p:spPr>
-        <p:txBody>
-          <a:bodyPr wrap="square">
-            <a:spAutoFit/>
-          </a:bodyPr>
-          <a:lstStyle/>
-          <a:p>
-            <a:r>
-              <a:rPr lang="fr-FR" sz="1100" dirty="0">
-                <a:solidFill>
-                  <a:schemeClr val="tx1">
-                    <a:lumMod val="50000"/>
-                    <a:lumOff val="50000"/>
-                  </a:schemeClr>
-                </a:solidFill>
-              </a:rPr>
-              <a:t>PA1 (ADC1_IN1)</a:t>
-            </a:r>
-          </a:p>
-        </p:txBody>
-      </p:sp>
-      <p:sp>
-        <p:nvSpPr>
-          <p:cNvPr id="61" name="ZoneTexte 60">
-            <a:extLst>
-              <a:ext uri="{FF2B5EF4-FFF2-40B4-BE49-F238E27FC236}">
-                <a16:creationId xmlns:a16="http://schemas.microsoft.com/office/drawing/2014/main" id="{7268EE56-B9DD-7F73-94C9-F6F1C03F9BB1}"/>
-              </a:ext>
-            </a:extLst>
-          </p:cNvPr>
-          <p:cNvSpPr txBox="1"/>
-          <p:nvPr/>
-        </p:nvSpPr>
-        <p:spPr>
-          <a:xfrm>
-            <a:off x="6725042" y="2479256"/>
+            <a:off x="8986910" y="2651304"/>
             <a:ext cx="1126248" cy="261610"/>
           </a:xfrm>
           <a:prstGeom prst="rect">
@@ -4363,17 +4060,17 @@
           <a:p>
             <a:r>
               <a:rPr lang="fr-FR" dirty="0"/>
-              <a:t>PA7 (GPIO IN)</a:t>
-            </a:r>
-          </a:p>
-        </p:txBody>
-      </p:sp>
-      <p:sp>
-        <p:nvSpPr>
-          <p:cNvPr id="62" name="ZoneTexte 61">
-            <a:extLst>
-              <a:ext uri="{FF2B5EF4-FFF2-40B4-BE49-F238E27FC236}">
-                <a16:creationId xmlns:a16="http://schemas.microsoft.com/office/drawing/2014/main" id="{C4305649-8D7D-3D5E-D261-610DBF479A25}"/>
+              <a:t>IN1</a:t>
+            </a:r>
+          </a:p>
+        </p:txBody>
+      </p:sp>
+      <p:sp>
+        <p:nvSpPr>
+          <p:cNvPr id="12" name="ZoneTexte 11">
+            <a:extLst>
+              <a:ext uri="{FF2B5EF4-FFF2-40B4-BE49-F238E27FC236}">
+                <a16:creationId xmlns:a16="http://schemas.microsoft.com/office/drawing/2014/main" id="{A41AB072-B646-1074-9607-FABCADA879F5}"/>
               </a:ext>
             </a:extLst>
           </p:cNvPr>
@@ -4382,7 +4079,7 @@
         </p:nvSpPr>
         <p:spPr>
           <a:xfrm>
-            <a:off x="6717287" y="2875043"/>
+            <a:off x="9014217" y="2974644"/>
             <a:ext cx="1126248" cy="261610"/>
           </a:xfrm>
           <a:prstGeom prst="rect">
@@ -4412,17 +4109,139 @@
           <a:p>
             <a:r>
               <a:rPr lang="fr-FR" dirty="0"/>
-              <a:t>PA6 (GPIO IN)</a:t>
-            </a:r>
-          </a:p>
-        </p:txBody>
-      </p:sp>
-      <p:sp>
-        <p:nvSpPr>
-          <p:cNvPr id="63" name="ZoneTexte 62">
-            <a:extLst>
-              <a:ext uri="{FF2B5EF4-FFF2-40B4-BE49-F238E27FC236}">
-                <a16:creationId xmlns:a16="http://schemas.microsoft.com/office/drawing/2014/main" id="{AAE0B0D5-392F-6761-B8A5-5B0683DBF1DA}"/>
+              <a:t>IN2</a:t>
+            </a:r>
+          </a:p>
+        </p:txBody>
+      </p:sp>
+      <p:sp>
+        <p:nvSpPr>
+          <p:cNvPr id="7" name="Rectangle 6">
+            <a:extLst>
+              <a:ext uri="{FF2B5EF4-FFF2-40B4-BE49-F238E27FC236}">
+                <a16:creationId xmlns:a16="http://schemas.microsoft.com/office/drawing/2014/main" id="{DD81C1D1-55E4-121B-1ECA-21E7BD754CDC}"/>
+              </a:ext>
+            </a:extLst>
+          </p:cNvPr>
+          <p:cNvSpPr/>
+          <p:nvPr/>
+        </p:nvSpPr>
+        <p:spPr>
+          <a:xfrm>
+            <a:off x="8782012" y="2411842"/>
+            <a:ext cx="1920240" cy="883920"/>
+          </a:xfrm>
+          <a:prstGeom prst="rect">
+            <a:avLst/>
+          </a:prstGeom>
+          <a:solidFill>
+            <a:srgbClr val="CCE3F6"/>
+          </a:solidFill>
+          <a:ln w="28575">
+            <a:solidFill>
+              <a:srgbClr val="28AAE1"/>
+            </a:solidFill>
+          </a:ln>
+        </p:spPr>
+        <p:style>
+          <a:lnRef idx="2">
+            <a:schemeClr val="accent1">
+              <a:shade val="15000"/>
+            </a:schemeClr>
+          </a:lnRef>
+          <a:fillRef idx="1">
+            <a:schemeClr val="accent1"/>
+          </a:fillRef>
+          <a:effectRef idx="0">
+            <a:schemeClr val="accent1"/>
+          </a:effectRef>
+          <a:fontRef idx="minor">
+            <a:schemeClr val="lt1"/>
+          </a:fontRef>
+        </p:style>
+        <p:txBody>
+          <a:bodyPr rtlCol="0" anchor="ctr"/>
+          <a:lstStyle/>
+          <a:p>
+            <a:pPr algn="ctr"/>
+            <a:r>
+              <a:rPr lang="fr-FR" b="1" dirty="0">
+                <a:solidFill>
+                  <a:srgbClr val="28AAE1"/>
+                </a:solidFill>
+              </a:rPr>
+              <a:t>Carte moteur</a:t>
+            </a:r>
+          </a:p>
+        </p:txBody>
+      </p:sp>
+      <p:sp>
+        <p:nvSpPr>
+          <p:cNvPr id="6" name="Rectangle 5">
+            <a:extLst>
+              <a:ext uri="{FF2B5EF4-FFF2-40B4-BE49-F238E27FC236}">
+                <a16:creationId xmlns:a16="http://schemas.microsoft.com/office/drawing/2014/main" id="{FAA73638-B5E7-9ABA-78B3-E8603F753D66}"/>
+              </a:ext>
+            </a:extLst>
+          </p:cNvPr>
+          <p:cNvSpPr/>
+          <p:nvPr/>
+        </p:nvSpPr>
+        <p:spPr>
+          <a:xfrm>
+            <a:off x="8782012" y="885467"/>
+            <a:ext cx="1920240" cy="911695"/>
+          </a:xfrm>
+          <a:prstGeom prst="rect">
+            <a:avLst/>
+          </a:prstGeom>
+          <a:solidFill>
+            <a:srgbClr val="CCE3F6"/>
+          </a:solidFill>
+          <a:ln w="28575">
+            <a:solidFill>
+              <a:srgbClr val="28AAE1"/>
+            </a:solidFill>
+          </a:ln>
+        </p:spPr>
+        <p:style>
+          <a:lnRef idx="2">
+            <a:schemeClr val="accent1">
+              <a:shade val="15000"/>
+            </a:schemeClr>
+          </a:lnRef>
+          <a:fillRef idx="1">
+            <a:schemeClr val="accent1"/>
+          </a:fillRef>
+          <a:effectRef idx="0">
+            <a:schemeClr val="accent1"/>
+          </a:effectRef>
+          <a:fontRef idx="minor">
+            <a:schemeClr val="lt1"/>
+          </a:fontRef>
+        </p:style>
+        <p:txBody>
+          <a:bodyPr rtlCol="0" anchor="ctr"/>
+          <a:lstStyle/>
+          <a:p>
+            <a:pPr algn="ctr"/>
+            <a:r>
+              <a:rPr lang="fr-FR" b="1" dirty="0">
+                <a:solidFill>
+                  <a:srgbClr val="28AAE1"/>
+                </a:solidFill>
+              </a:rPr>
+              <a:t>Alimentation 5VDC</a:t>
+            </a:r>
+          </a:p>
+        </p:txBody>
+      </p:sp>
+      <p:sp>
+        <p:nvSpPr>
+          <p:cNvPr id="38" name="ZoneTexte 37">
+            <a:extLst>
+              <a:ext uri="{FF2B5EF4-FFF2-40B4-BE49-F238E27FC236}">
+                <a16:creationId xmlns:a16="http://schemas.microsoft.com/office/drawing/2014/main" id="{FEA2F9C0-BE87-E7FF-B337-A9903AF79A26}"/>
               </a:ext>
             </a:extLst>
           </p:cNvPr>
@@ -4431,8 +4250,8 @@
         </p:nvSpPr>
         <p:spPr>
           <a:xfrm>
-            <a:off x="6734225" y="3280607"/>
-            <a:ext cx="1126248" cy="261610"/>
+            <a:off x="6525857" y="1322417"/>
+            <a:ext cx="906204" cy="769441"/>
           </a:xfrm>
           <a:prstGeom prst="rect">
             <a:avLst/>
@@ -4461,17 +4280,119 @@
           <a:p>
             <a:r>
               <a:rPr lang="fr-FR" dirty="0"/>
-              <a:t>PA11 (GPIO IN)</a:t>
-            </a:r>
-          </a:p>
-        </p:txBody>
-      </p:sp>
-      <p:sp>
-        <p:nvSpPr>
-          <p:cNvPr id="65" name="ZoneTexte 64">
-            <a:extLst>
-              <a:ext uri="{FF2B5EF4-FFF2-40B4-BE49-F238E27FC236}">
-                <a16:creationId xmlns:a16="http://schemas.microsoft.com/office/drawing/2014/main" id="{2F43A1B0-5FDD-B438-136F-22818FB536CC}"/>
+              <a:t>Io16 to IN4</a:t>
+            </a:r>
+          </a:p>
+          <a:p>
+            <a:r>
+              <a:rPr lang="fr-FR" dirty="0"/>
+              <a:t>Io17 to IN3</a:t>
+            </a:r>
+          </a:p>
+          <a:p>
+            <a:r>
+              <a:rPr lang="fr-FR" dirty="0"/>
+              <a:t>Io25 to IN2</a:t>
+            </a:r>
+          </a:p>
+          <a:p>
+            <a:r>
+              <a:rPr lang="fr-FR" dirty="0"/>
+              <a:t>Io26 to IN1</a:t>
+            </a:r>
+          </a:p>
+        </p:txBody>
+      </p:sp>
+      <p:cxnSp>
+        <p:nvCxnSpPr>
+          <p:cNvPr id="39" name="Connecteur droit 38">
+            <a:extLst>
+              <a:ext uri="{FF2B5EF4-FFF2-40B4-BE49-F238E27FC236}">
+                <a16:creationId xmlns:a16="http://schemas.microsoft.com/office/drawing/2014/main" id="{F6AA2759-F91E-FCFB-1EFA-3F3348F2D54A}"/>
+              </a:ext>
+            </a:extLst>
+          </p:cNvPr>
+          <p:cNvCxnSpPr/>
+          <p:nvPr/>
+        </p:nvCxnSpPr>
+        <p:spPr>
+          <a:xfrm flipH="1">
+            <a:off x="10702252" y="2552507"/>
+            <a:ext cx="537042" cy="0"/>
+          </a:xfrm>
+          <a:prstGeom prst="line">
+            <a:avLst/>
+          </a:prstGeom>
+          <a:ln w="28575">
+            <a:solidFill>
+              <a:schemeClr val="accent2"/>
+            </a:solidFill>
+            <a:tailEnd type="triangle"/>
+          </a:ln>
+        </p:spPr>
+        <p:style>
+          <a:lnRef idx="3">
+            <a:schemeClr val="accent1"/>
+          </a:lnRef>
+          <a:fillRef idx="0">
+            <a:schemeClr val="accent1"/>
+          </a:fillRef>
+          <a:effectRef idx="2">
+            <a:schemeClr val="accent1"/>
+          </a:effectRef>
+          <a:fontRef idx="minor">
+            <a:schemeClr val="tx1"/>
+          </a:fontRef>
+        </p:style>
+      </p:cxnSp>
+      <p:cxnSp>
+        <p:nvCxnSpPr>
+          <p:cNvPr id="40" name="Connecteur droit 39">
+            <a:extLst>
+              <a:ext uri="{FF2B5EF4-FFF2-40B4-BE49-F238E27FC236}">
+                <a16:creationId xmlns:a16="http://schemas.microsoft.com/office/drawing/2014/main" id="{4E6144FE-C452-5707-573B-3C2018F62C2D}"/>
+              </a:ext>
+            </a:extLst>
+          </p:cNvPr>
+          <p:cNvCxnSpPr/>
+          <p:nvPr/>
+        </p:nvCxnSpPr>
+        <p:spPr>
+          <a:xfrm flipH="1">
+            <a:off x="10702252" y="2757663"/>
+            <a:ext cx="537042" cy="0"/>
+          </a:xfrm>
+          <a:prstGeom prst="line">
+            <a:avLst/>
+          </a:prstGeom>
+          <a:ln w="28575">
+            <a:solidFill>
+              <a:schemeClr val="accent2"/>
+            </a:solidFill>
+            <a:tailEnd type="triangle"/>
+          </a:ln>
+        </p:spPr>
+        <p:style>
+          <a:lnRef idx="3">
+            <a:schemeClr val="accent1"/>
+          </a:lnRef>
+          <a:fillRef idx="0">
+            <a:schemeClr val="accent1"/>
+          </a:fillRef>
+          <a:effectRef idx="2">
+            <a:schemeClr val="accent1"/>
+          </a:effectRef>
+          <a:fontRef idx="minor">
+            <a:schemeClr val="tx1"/>
+          </a:fontRef>
+        </p:style>
+      </p:cxnSp>
+      <p:sp>
+        <p:nvSpPr>
+          <p:cNvPr id="41" name="ZoneTexte 40">
+            <a:extLst>
+              <a:ext uri="{FF2B5EF4-FFF2-40B4-BE49-F238E27FC236}">
+                <a16:creationId xmlns:a16="http://schemas.microsoft.com/office/drawing/2014/main" id="{E559D9A4-FFF5-403B-FC90-E22129267DD5}"/>
               </a:ext>
             </a:extLst>
           </p:cNvPr>
@@ -4480,8 +4401,8 @@
         </p:nvSpPr>
         <p:spPr>
           <a:xfrm>
-            <a:off x="270083" y="1928385"/>
-            <a:ext cx="1563262" cy="261610"/>
+            <a:off x="10719787" y="2540901"/>
+            <a:ext cx="390952" cy="261610"/>
           </a:xfrm>
           <a:prstGeom prst="rect">
             <a:avLst/>
@@ -4510,17 +4431,17 @@
           <a:p>
             <a:r>
               <a:rPr lang="fr-FR" dirty="0"/>
-              <a:t>PB6 et PB7 (GPIO OUT)</a:t>
-            </a:r>
-          </a:p>
-        </p:txBody>
-      </p:sp>
-      <p:sp>
-        <p:nvSpPr>
-          <p:cNvPr id="66" name="ZoneTexte 65">
-            <a:extLst>
-              <a:ext uri="{FF2B5EF4-FFF2-40B4-BE49-F238E27FC236}">
-                <a16:creationId xmlns:a16="http://schemas.microsoft.com/office/drawing/2014/main" id="{4CA2440D-3DF9-1746-26A3-C0B1004ED51A}"/>
+              <a:t>IN4</a:t>
+            </a:r>
+          </a:p>
+        </p:txBody>
+      </p:sp>
+      <p:sp>
+        <p:nvSpPr>
+          <p:cNvPr id="42" name="ZoneTexte 41">
+            <a:extLst>
+              <a:ext uri="{FF2B5EF4-FFF2-40B4-BE49-F238E27FC236}">
+                <a16:creationId xmlns:a16="http://schemas.microsoft.com/office/drawing/2014/main" id="{7813F324-E34D-0A1A-1064-A44A61DAB51A}"/>
               </a:ext>
             </a:extLst>
           </p:cNvPr>
@@ -4529,8 +4450,8 @@
         </p:nvSpPr>
         <p:spPr>
           <a:xfrm>
-            <a:off x="5507057" y="5787928"/>
-            <a:ext cx="1126248" cy="261610"/>
+            <a:off x="11166722" y="2439280"/>
+            <a:ext cx="679133" cy="261610"/>
           </a:xfrm>
           <a:prstGeom prst="rect">
             <a:avLst/>
@@ -4559,309 +4480,17 @@
           <a:p>
             <a:r>
               <a:rPr lang="fr-FR" dirty="0"/>
-              <a:t>PB3 (GPIO OUT)</a:t>
-            </a:r>
-          </a:p>
-        </p:txBody>
-      </p:sp>
-      <p:cxnSp>
-        <p:nvCxnSpPr>
-          <p:cNvPr id="67" name="Connecteur droit 66">
-            <a:extLst>
-              <a:ext uri="{FF2B5EF4-FFF2-40B4-BE49-F238E27FC236}">
-                <a16:creationId xmlns:a16="http://schemas.microsoft.com/office/drawing/2014/main" id="{993A1672-FFF2-D5D0-CE92-C95CF0B3DC26}"/>
-              </a:ext>
-            </a:extLst>
-          </p:cNvPr>
-          <p:cNvCxnSpPr/>
-          <p:nvPr/>
-        </p:nvCxnSpPr>
-        <p:spPr>
-          <a:xfrm>
-            <a:off x="10032349" y="1897603"/>
-            <a:ext cx="0" cy="690880"/>
-          </a:xfrm>
-          <a:prstGeom prst="line">
-            <a:avLst/>
-          </a:prstGeom>
-          <a:ln w="28575">
-            <a:solidFill>
-              <a:schemeClr val="tx1"/>
-            </a:solidFill>
-          </a:ln>
-        </p:spPr>
-        <p:style>
-          <a:lnRef idx="1">
-            <a:schemeClr val="accent1"/>
-          </a:lnRef>
-          <a:fillRef idx="0">
-            <a:schemeClr val="accent1"/>
-          </a:fillRef>
-          <a:effectRef idx="0">
-            <a:schemeClr val="accent1"/>
-          </a:effectRef>
-          <a:fontRef idx="minor">
-            <a:schemeClr val="tx1"/>
-          </a:fontRef>
-        </p:style>
-      </p:cxnSp>
-      <p:cxnSp>
-        <p:nvCxnSpPr>
-          <p:cNvPr id="70" name="Connecteur droit 69">
-            <a:extLst>
-              <a:ext uri="{FF2B5EF4-FFF2-40B4-BE49-F238E27FC236}">
-                <a16:creationId xmlns:a16="http://schemas.microsoft.com/office/drawing/2014/main" id="{B36487D0-E460-8200-DEFC-34D1688346DB}"/>
-              </a:ext>
-            </a:extLst>
-          </p:cNvPr>
-          <p:cNvCxnSpPr>
-            <a:cxnSpLocks/>
-          </p:cNvCxnSpPr>
-          <p:nvPr/>
-        </p:nvCxnSpPr>
-        <p:spPr>
-          <a:xfrm>
-            <a:off x="10043923" y="3396202"/>
-            <a:ext cx="0" cy="970280"/>
-          </a:xfrm>
-          <a:prstGeom prst="line">
-            <a:avLst/>
-          </a:prstGeom>
-          <a:ln w="28575">
-            <a:solidFill>
-              <a:schemeClr val="tx1"/>
-            </a:solidFill>
-          </a:ln>
-        </p:spPr>
-        <p:style>
-          <a:lnRef idx="1">
-            <a:schemeClr val="accent1"/>
-          </a:lnRef>
-          <a:fillRef idx="0">
-            <a:schemeClr val="accent1"/>
-          </a:fillRef>
-          <a:effectRef idx="0">
-            <a:schemeClr val="accent1"/>
-          </a:effectRef>
-          <a:fontRef idx="minor">
-            <a:schemeClr val="tx1"/>
-          </a:fontRef>
-        </p:style>
-      </p:cxnSp>
-      <p:cxnSp>
-        <p:nvCxnSpPr>
-          <p:cNvPr id="71" name="Connecteur droit 70">
-            <a:extLst>
-              <a:ext uri="{FF2B5EF4-FFF2-40B4-BE49-F238E27FC236}">
-                <a16:creationId xmlns:a16="http://schemas.microsoft.com/office/drawing/2014/main" id="{C2663933-C3A2-5788-6CF7-67C97E1393A7}"/>
-              </a:ext>
-            </a:extLst>
-          </p:cNvPr>
-          <p:cNvCxnSpPr>
-            <a:cxnSpLocks/>
-          </p:cNvCxnSpPr>
-          <p:nvPr/>
-        </p:nvCxnSpPr>
-        <p:spPr>
-          <a:xfrm>
-            <a:off x="11379133" y="3257151"/>
-            <a:ext cx="0" cy="1145540"/>
-          </a:xfrm>
-          <a:prstGeom prst="line">
-            <a:avLst/>
-          </a:prstGeom>
-          <a:ln w="28575">
-            <a:solidFill>
-              <a:srgbClr val="FF0000"/>
-            </a:solidFill>
-          </a:ln>
-        </p:spPr>
-        <p:style>
-          <a:lnRef idx="1">
-            <a:schemeClr val="accent1"/>
-          </a:lnRef>
-          <a:fillRef idx="0">
-            <a:schemeClr val="accent1"/>
-          </a:fillRef>
-          <a:effectRef idx="0">
-            <a:schemeClr val="accent1"/>
-          </a:effectRef>
-          <a:fontRef idx="minor">
-            <a:schemeClr val="tx1"/>
-          </a:fontRef>
-        </p:style>
-      </p:cxnSp>
-      <p:cxnSp>
-        <p:nvCxnSpPr>
-          <p:cNvPr id="72" name="Connecteur droit 71">
-            <a:extLst>
-              <a:ext uri="{FF2B5EF4-FFF2-40B4-BE49-F238E27FC236}">
-                <a16:creationId xmlns:a16="http://schemas.microsoft.com/office/drawing/2014/main" id="{C19A11B1-4D97-FF8E-EABD-F4A69186F4AB}"/>
-              </a:ext>
-            </a:extLst>
-          </p:cNvPr>
-          <p:cNvCxnSpPr>
-            <a:cxnSpLocks/>
-          </p:cNvCxnSpPr>
-          <p:nvPr/>
-        </p:nvCxnSpPr>
-        <p:spPr>
-          <a:xfrm flipH="1">
-            <a:off x="9997690" y="3257151"/>
-            <a:ext cx="1381443" cy="0"/>
-          </a:xfrm>
-          <a:prstGeom prst="line">
-            <a:avLst/>
-          </a:prstGeom>
-          <a:ln w="28575">
-            <a:solidFill>
-              <a:srgbClr val="FF0000"/>
-            </a:solidFill>
-          </a:ln>
-        </p:spPr>
-        <p:style>
-          <a:lnRef idx="1">
-            <a:schemeClr val="accent1"/>
-          </a:lnRef>
-          <a:fillRef idx="0">
-            <a:schemeClr val="accent1"/>
-          </a:fillRef>
-          <a:effectRef idx="0">
-            <a:schemeClr val="accent1"/>
-          </a:effectRef>
-          <a:fontRef idx="minor">
-            <a:schemeClr val="tx1"/>
-          </a:fontRef>
-        </p:style>
-      </p:cxnSp>
-      <p:sp>
-        <p:nvSpPr>
-          <p:cNvPr id="8" name="Rectangle 7">
-            <a:extLst>
-              <a:ext uri="{FF2B5EF4-FFF2-40B4-BE49-F238E27FC236}">
-                <a16:creationId xmlns:a16="http://schemas.microsoft.com/office/drawing/2014/main" id="{5E5586FA-F5C1-8F2F-194F-BE4108D12B7F}"/>
-              </a:ext>
-            </a:extLst>
-          </p:cNvPr>
-          <p:cNvSpPr/>
-          <p:nvPr/>
-        </p:nvSpPr>
-        <p:spPr>
-          <a:xfrm>
-            <a:off x="9253248" y="4224020"/>
-            <a:ext cx="1421314" cy="883920"/>
-          </a:xfrm>
-          <a:prstGeom prst="rect">
-            <a:avLst/>
-          </a:prstGeom>
-          <a:solidFill>
-            <a:srgbClr val="CCE3F6"/>
-          </a:solidFill>
-          <a:ln w="28575">
-            <a:solidFill>
-              <a:srgbClr val="28AAE1"/>
-            </a:solidFill>
-          </a:ln>
-        </p:spPr>
-        <p:style>
-          <a:lnRef idx="2">
-            <a:schemeClr val="accent1">
-              <a:shade val="15000"/>
-            </a:schemeClr>
-          </a:lnRef>
-          <a:fillRef idx="1">
-            <a:schemeClr val="accent1"/>
-          </a:fillRef>
-          <a:effectRef idx="0">
-            <a:schemeClr val="accent1"/>
-          </a:effectRef>
-          <a:fontRef idx="minor">
-            <a:schemeClr val="lt1"/>
-          </a:fontRef>
-        </p:style>
-        <p:txBody>
-          <a:bodyPr rtlCol="0" anchor="ctr"/>
-          <a:lstStyle/>
-          <a:p>
-            <a:pPr algn="ctr"/>
-            <a:r>
-              <a:rPr lang="fr-FR" b="1" dirty="0">
-                <a:solidFill>
-                  <a:srgbClr val="28AAE1"/>
-                </a:solidFill>
-              </a:rPr>
-              <a:t>Pompe</a:t>
-            </a:r>
-          </a:p>
-        </p:txBody>
-      </p:sp>
-      <p:sp>
-        <p:nvSpPr>
-          <p:cNvPr id="9" name="Rectangle 8">
-            <a:extLst>
-              <a:ext uri="{FF2B5EF4-FFF2-40B4-BE49-F238E27FC236}">
-                <a16:creationId xmlns:a16="http://schemas.microsoft.com/office/drawing/2014/main" id="{813E4796-817F-5D6A-49E2-D8FA3580C0E4}"/>
-              </a:ext>
-            </a:extLst>
-          </p:cNvPr>
-          <p:cNvSpPr/>
-          <p:nvPr/>
-        </p:nvSpPr>
-        <p:spPr>
-          <a:xfrm>
-            <a:off x="10727607" y="4224020"/>
-            <a:ext cx="1436604" cy="883920"/>
-          </a:xfrm>
-          <a:prstGeom prst="rect">
-            <a:avLst/>
-          </a:prstGeom>
-          <a:solidFill>
-            <a:srgbClr val="CCE3F6"/>
-          </a:solidFill>
-          <a:ln w="28575">
-            <a:solidFill>
-              <a:srgbClr val="28AAE1"/>
-            </a:solidFill>
-          </a:ln>
-        </p:spPr>
-        <p:style>
-          <a:lnRef idx="2">
-            <a:schemeClr val="accent1">
-              <a:shade val="15000"/>
-            </a:schemeClr>
-          </a:lnRef>
-          <a:fillRef idx="1">
-            <a:schemeClr val="accent1"/>
-          </a:fillRef>
-          <a:effectRef idx="0">
-            <a:schemeClr val="accent1"/>
-          </a:effectRef>
-          <a:fontRef idx="minor">
-            <a:schemeClr val="lt1"/>
-          </a:fontRef>
-        </p:style>
-        <p:txBody>
-          <a:bodyPr rtlCol="0" anchor="ctr"/>
-          <a:lstStyle/>
-          <a:p>
-            <a:pPr algn="ctr"/>
-            <a:r>
-              <a:rPr lang="fr-FR" b="1" dirty="0">
-                <a:solidFill>
-                  <a:srgbClr val="28AAE1"/>
-                </a:solidFill>
-              </a:rPr>
-              <a:t>Ventilateur</a:t>
-            </a:r>
-          </a:p>
-        </p:txBody>
-      </p:sp>
-      <p:sp>
-        <p:nvSpPr>
-          <p:cNvPr id="2" name="ZoneTexte 1">
-            <a:extLst>
-              <a:ext uri="{FF2B5EF4-FFF2-40B4-BE49-F238E27FC236}">
-                <a16:creationId xmlns:a16="http://schemas.microsoft.com/office/drawing/2014/main" id="{758B562E-F804-C3EB-DD14-9FE94914E997}"/>
+              <a:t>De Io17</a:t>
+            </a:r>
+          </a:p>
+        </p:txBody>
+      </p:sp>
+      <p:sp>
+        <p:nvSpPr>
+          <p:cNvPr id="53" name="ZoneTexte 52">
+            <a:extLst>
+              <a:ext uri="{FF2B5EF4-FFF2-40B4-BE49-F238E27FC236}">
+                <a16:creationId xmlns:a16="http://schemas.microsoft.com/office/drawing/2014/main" id="{242DC180-DD47-0F6C-F422-E38717AF5B84}"/>
               </a:ext>
             </a:extLst>
           </p:cNvPr>
@@ -4870,8 +4499,8 @@
         </p:nvSpPr>
         <p:spPr>
           <a:xfrm>
-            <a:off x="8662817" y="2651304"/>
-            <a:ext cx="1126248" cy="261610"/>
+            <a:off x="11166722" y="2644276"/>
+            <a:ext cx="679133" cy="261610"/>
           </a:xfrm>
           <a:prstGeom prst="rect">
             <a:avLst/>
@@ -4900,17 +4529,1514 @@
           <a:p>
             <a:r>
               <a:rPr lang="fr-FR" dirty="0"/>
-              <a:t>IN1</a:t>
-            </a:r>
-          </a:p>
-        </p:txBody>
-      </p:sp>
-      <p:sp>
-        <p:nvSpPr>
-          <p:cNvPr id="12" name="ZoneTexte 11">
-            <a:extLst>
-              <a:ext uri="{FF2B5EF4-FFF2-40B4-BE49-F238E27FC236}">
-                <a16:creationId xmlns:a16="http://schemas.microsoft.com/office/drawing/2014/main" id="{A41AB072-B646-1074-9607-FABCADA879F5}"/>
+              <a:t>De Io16</a:t>
+            </a:r>
+          </a:p>
+        </p:txBody>
+      </p:sp>
+      <p:grpSp>
+        <p:nvGrpSpPr>
+          <p:cNvPr id="177" name="Groupe 176">
+            <a:extLst>
+              <a:ext uri="{FF2B5EF4-FFF2-40B4-BE49-F238E27FC236}">
+                <a16:creationId xmlns:a16="http://schemas.microsoft.com/office/drawing/2014/main" id="{31C086C2-EC9C-03E8-5EA7-0CEEDCFC72D0}"/>
+              </a:ext>
+            </a:extLst>
+          </p:cNvPr>
+          <p:cNvGrpSpPr/>
+          <p:nvPr/>
+        </p:nvGrpSpPr>
+        <p:grpSpPr>
+          <a:xfrm>
+            <a:off x="73949" y="25138"/>
+            <a:ext cx="8867995" cy="4789834"/>
+            <a:chOff x="73949" y="25138"/>
+            <a:chExt cx="8867995" cy="4789834"/>
+          </a:xfrm>
+        </p:grpSpPr>
+        <p:grpSp>
+          <p:nvGrpSpPr>
+            <p:cNvPr id="87" name="Groupe 86">
+              <a:extLst>
+                <a:ext uri="{FF2B5EF4-FFF2-40B4-BE49-F238E27FC236}">
+                  <a16:creationId xmlns:a16="http://schemas.microsoft.com/office/drawing/2014/main" id="{B77C8540-7511-CFFD-45FE-037371B59F66}"/>
+                </a:ext>
+              </a:extLst>
+            </p:cNvPr>
+            <p:cNvGrpSpPr/>
+            <p:nvPr/>
+          </p:nvGrpSpPr>
+          <p:grpSpPr>
+            <a:xfrm>
+              <a:off x="73949" y="25138"/>
+              <a:ext cx="8867995" cy="4789834"/>
+              <a:chOff x="42876" y="23449"/>
+              <a:chExt cx="8867995" cy="4789834"/>
+            </a:xfrm>
+          </p:grpSpPr>
+          <p:sp>
+            <p:nvSpPr>
+              <p:cNvPr id="10" name="Rectangle 9">
+                <a:extLst>
+                  <a:ext uri="{FF2B5EF4-FFF2-40B4-BE49-F238E27FC236}">
+                    <a16:creationId xmlns:a16="http://schemas.microsoft.com/office/drawing/2014/main" id="{8C0D9B2B-EC38-F2B3-5615-5D90A0FEF2B9}"/>
+                  </a:ext>
+                </a:extLst>
+              </p:cNvPr>
+              <p:cNvSpPr/>
+              <p:nvPr/>
+            </p:nvSpPr>
+            <p:spPr>
+              <a:xfrm>
+                <a:off x="42876" y="3426567"/>
+                <a:ext cx="2375919" cy="380600"/>
+              </a:xfrm>
+              <a:prstGeom prst="rect">
+                <a:avLst/>
+              </a:prstGeom>
+              <a:solidFill>
+                <a:srgbClr val="CCE3F6"/>
+              </a:solidFill>
+              <a:ln w="28575">
+                <a:solidFill>
+                  <a:srgbClr val="28AAE1"/>
+                </a:solidFill>
+              </a:ln>
+            </p:spPr>
+            <p:style>
+              <a:lnRef idx="2">
+                <a:schemeClr val="accent1">
+                  <a:shade val="15000"/>
+                </a:schemeClr>
+              </a:lnRef>
+              <a:fillRef idx="1">
+                <a:schemeClr val="accent1"/>
+              </a:fillRef>
+              <a:effectRef idx="0">
+                <a:schemeClr val="accent1"/>
+              </a:effectRef>
+              <a:fontRef idx="minor">
+                <a:schemeClr val="lt1"/>
+              </a:fontRef>
+            </p:style>
+            <p:txBody>
+              <a:bodyPr rtlCol="0" anchor="ctr"/>
+              <a:lstStyle/>
+              <a:p>
+                <a:pPr algn="ctr"/>
+                <a:r>
+                  <a:rPr lang="fr-FR" b="1" dirty="0">
+                    <a:solidFill>
+                      <a:srgbClr val="28AAE1"/>
+                    </a:solidFill>
+                  </a:rPr>
+                  <a:t>Capteur Température</a:t>
+                </a:r>
+              </a:p>
+            </p:txBody>
+          </p:sp>
+          <p:sp>
+            <p:nvSpPr>
+              <p:cNvPr id="11" name="Rectangle 10">
+                <a:extLst>
+                  <a:ext uri="{FF2B5EF4-FFF2-40B4-BE49-F238E27FC236}">
+                    <a16:creationId xmlns:a16="http://schemas.microsoft.com/office/drawing/2014/main" id="{A17F07F2-92D1-4DE2-E2F9-4DD3428EC191}"/>
+                  </a:ext>
+                </a:extLst>
+              </p:cNvPr>
+              <p:cNvSpPr/>
+              <p:nvPr/>
+            </p:nvSpPr>
+            <p:spPr>
+              <a:xfrm>
+                <a:off x="6534952" y="3550587"/>
+                <a:ext cx="2375919" cy="380601"/>
+              </a:xfrm>
+              <a:prstGeom prst="rect">
+                <a:avLst/>
+              </a:prstGeom>
+              <a:solidFill>
+                <a:srgbClr val="CCE3F6"/>
+              </a:solidFill>
+              <a:ln w="28575">
+                <a:solidFill>
+                  <a:srgbClr val="28AAE1"/>
+                </a:solidFill>
+              </a:ln>
+            </p:spPr>
+            <p:style>
+              <a:lnRef idx="2">
+                <a:schemeClr val="accent1">
+                  <a:shade val="15000"/>
+                </a:schemeClr>
+              </a:lnRef>
+              <a:fillRef idx="1">
+                <a:schemeClr val="accent1"/>
+              </a:fillRef>
+              <a:effectRef idx="0">
+                <a:schemeClr val="accent1"/>
+              </a:effectRef>
+              <a:fontRef idx="minor">
+                <a:schemeClr val="lt1"/>
+              </a:fontRef>
+            </p:style>
+            <p:txBody>
+              <a:bodyPr rtlCol="0" anchor="ctr"/>
+              <a:lstStyle/>
+              <a:p>
+                <a:pPr algn="ctr"/>
+                <a:r>
+                  <a:rPr lang="fr-FR" b="1" dirty="0">
+                    <a:solidFill>
+                      <a:srgbClr val="28AAE1"/>
+                    </a:solidFill>
+                  </a:rPr>
+                  <a:t>Capteur Humidité</a:t>
+                </a:r>
+              </a:p>
+            </p:txBody>
+          </p:sp>
+          <p:sp>
+            <p:nvSpPr>
+              <p:cNvPr id="65" name="ZoneTexte 64">
+                <a:extLst>
+                  <a:ext uri="{FF2B5EF4-FFF2-40B4-BE49-F238E27FC236}">
+                    <a16:creationId xmlns:a16="http://schemas.microsoft.com/office/drawing/2014/main" id="{2F43A1B0-5FDD-B438-136F-22818FB536CC}"/>
+                  </a:ext>
+                </a:extLst>
+              </p:cNvPr>
+              <p:cNvSpPr txBox="1"/>
+              <p:nvPr/>
+            </p:nvSpPr>
+            <p:spPr>
+              <a:xfrm>
+                <a:off x="447455" y="3194351"/>
+                <a:ext cx="1563262" cy="261610"/>
+              </a:xfrm>
+              <a:prstGeom prst="rect">
+                <a:avLst/>
+              </a:prstGeom>
+              <a:noFill/>
+            </p:spPr>
+            <p:txBody>
+              <a:bodyPr wrap="square">
+                <a:spAutoFit/>
+              </a:bodyPr>
+              <a:lstStyle>
+                <a:defPPr>
+                  <a:defRPr lang="fr-FR"/>
+                </a:defPPr>
+                <a:lvl1pPr>
+                  <a:defRPr sz="1100">
+                    <a:solidFill>
+                      <a:schemeClr val="tx1">
+                        <a:lumMod val="50000"/>
+                        <a:lumOff val="50000"/>
+                      </a:schemeClr>
+                    </a:solidFill>
+                  </a:defRPr>
+                </a:lvl1pPr>
+              </a:lstStyle>
+              <a:p>
+                <a:r>
+                  <a:rPr lang="fr-FR" dirty="0"/>
+                  <a:t>GND – VCC- OUT -&gt; Io35</a:t>
+                </a:r>
+              </a:p>
+            </p:txBody>
+          </p:sp>
+          <p:grpSp>
+            <p:nvGrpSpPr>
+              <p:cNvPr id="84" name="Groupe 83">
+                <a:extLst>
+                  <a:ext uri="{FF2B5EF4-FFF2-40B4-BE49-F238E27FC236}">
+                    <a16:creationId xmlns:a16="http://schemas.microsoft.com/office/drawing/2014/main" id="{97C62BDD-E84A-F5C1-7923-D0BC14FCAF6B}"/>
+                  </a:ext>
+                </a:extLst>
+              </p:cNvPr>
+              <p:cNvGrpSpPr/>
+              <p:nvPr/>
+            </p:nvGrpSpPr>
+            <p:grpSpPr>
+              <a:xfrm>
+                <a:off x="1095164" y="23449"/>
+                <a:ext cx="5871114" cy="4789834"/>
+                <a:chOff x="595784" y="52225"/>
+                <a:chExt cx="5871114" cy="4789834"/>
+              </a:xfrm>
+            </p:grpSpPr>
+            <p:sp>
+              <p:nvSpPr>
+                <p:cNvPr id="49" name="Rectangle 48">
+                  <a:extLst>
+                    <a:ext uri="{FF2B5EF4-FFF2-40B4-BE49-F238E27FC236}">
+                      <a16:creationId xmlns:a16="http://schemas.microsoft.com/office/drawing/2014/main" id="{4EFB177D-477F-52CC-3E6A-439205F74410}"/>
+                    </a:ext>
+                  </a:extLst>
+                </p:cNvPr>
+                <p:cNvSpPr/>
+                <p:nvPr/>
+              </p:nvSpPr>
+              <p:spPr>
+                <a:xfrm>
+                  <a:off x="595784" y="302275"/>
+                  <a:ext cx="2308581" cy="992057"/>
+                </a:xfrm>
+                <a:prstGeom prst="rect">
+                  <a:avLst/>
+                </a:prstGeom>
+                <a:solidFill>
+                  <a:srgbClr val="CCE3F6"/>
+                </a:solidFill>
+                <a:ln w="28575">
+                  <a:solidFill>
+                    <a:srgbClr val="28AAE1"/>
+                  </a:solidFill>
+                </a:ln>
+              </p:spPr>
+              <p:style>
+                <a:lnRef idx="2">
+                  <a:schemeClr val="accent1">
+                    <a:shade val="15000"/>
+                  </a:schemeClr>
+                </a:lnRef>
+                <a:fillRef idx="1">
+                  <a:schemeClr val="accent1"/>
+                </a:fillRef>
+                <a:effectRef idx="0">
+                  <a:schemeClr val="accent1"/>
+                </a:effectRef>
+                <a:fontRef idx="minor">
+                  <a:schemeClr val="lt1"/>
+                </a:fontRef>
+              </p:style>
+              <p:txBody>
+                <a:bodyPr rtlCol="0" anchor="ctr"/>
+                <a:lstStyle/>
+                <a:p>
+                  <a:pPr algn="ctr"/>
+                  <a:r>
+                    <a:rPr lang="fr-FR" b="1" dirty="0">
+                      <a:solidFill>
+                        <a:srgbClr val="28AAE1"/>
+                      </a:solidFill>
+                    </a:rPr>
+                    <a:t>Écran LCD</a:t>
+                  </a:r>
+                </a:p>
+                <a:p>
+                  <a:pPr algn="ctr"/>
+                  <a:r>
+                    <a:rPr lang="fr-FR" b="1" dirty="0">
+                      <a:solidFill>
+                        <a:srgbClr val="28AAE1"/>
+                      </a:solidFill>
+                    </a:rPr>
+                    <a:t>I2C</a:t>
+                  </a:r>
+                </a:p>
+              </p:txBody>
+            </p:sp>
+            <p:pic>
+              <p:nvPicPr>
+                <p:cNvPr id="26" name="Image 25">
+                  <a:extLst>
+                    <a:ext uri="{FF2B5EF4-FFF2-40B4-BE49-F238E27FC236}">
+                      <a16:creationId xmlns:a16="http://schemas.microsoft.com/office/drawing/2014/main" id="{CE9D3A15-1544-CBE8-1344-EA0A87C27947}"/>
+                    </a:ext>
+                  </a:extLst>
+                </p:cNvPr>
+                <p:cNvPicPr>
+                  <a:picLocks noChangeAspect="1"/>
+                </p:cNvPicPr>
+                <p:nvPr/>
+              </p:nvPicPr>
+              <p:blipFill>
+                <a:blip r:embed="rId2"/>
+                <a:stretch>
+                  <a:fillRect/>
+                </a:stretch>
+              </p:blipFill>
+              <p:spPr>
+                <a:xfrm>
+                  <a:off x="2347192" y="2009503"/>
+                  <a:ext cx="3612342" cy="2832556"/>
+                </a:xfrm>
+                <a:prstGeom prst="rect">
+                  <a:avLst/>
+                </a:prstGeom>
+              </p:spPr>
+            </p:pic>
+            <p:cxnSp>
+              <p:nvCxnSpPr>
+                <p:cNvPr id="79" name="Connecteur droit 78">
+                  <a:extLst>
+                    <a:ext uri="{FF2B5EF4-FFF2-40B4-BE49-F238E27FC236}">
+                      <a16:creationId xmlns:a16="http://schemas.microsoft.com/office/drawing/2014/main" id="{6D74CC8D-DD7D-11DD-5A69-FFC6FADB082A}"/>
+                    </a:ext>
+                  </a:extLst>
+                </p:cNvPr>
+                <p:cNvCxnSpPr>
+                  <a:cxnSpLocks/>
+                </p:cNvCxnSpPr>
+                <p:nvPr/>
+              </p:nvCxnSpPr>
+              <p:spPr>
+                <a:xfrm flipV="1">
+                  <a:off x="3333509" y="1926379"/>
+                  <a:ext cx="0" cy="258789"/>
+                </a:xfrm>
+                <a:prstGeom prst="line">
+                  <a:avLst/>
+                </a:prstGeom>
+                <a:ln w="28575">
+                  <a:solidFill>
+                    <a:schemeClr val="accent1"/>
+                  </a:solidFill>
+                </a:ln>
+              </p:spPr>
+              <p:style>
+                <a:lnRef idx="2">
+                  <a:schemeClr val="accent1"/>
+                </a:lnRef>
+                <a:fillRef idx="0">
+                  <a:schemeClr val="accent1"/>
+                </a:fillRef>
+                <a:effectRef idx="1">
+                  <a:schemeClr val="accent1"/>
+                </a:effectRef>
+                <a:fontRef idx="minor">
+                  <a:schemeClr val="tx1"/>
+                </a:fontRef>
+              </p:style>
+            </p:cxnSp>
+            <p:cxnSp>
+              <p:nvCxnSpPr>
+                <p:cNvPr id="80" name="Connecteur droit 79">
+                  <a:extLst>
+                    <a:ext uri="{FF2B5EF4-FFF2-40B4-BE49-F238E27FC236}">
+                      <a16:creationId xmlns:a16="http://schemas.microsoft.com/office/drawing/2014/main" id="{FED2C31A-989A-147A-7EEA-34D1C1824E4C}"/>
+                    </a:ext>
+                  </a:extLst>
+                </p:cNvPr>
+                <p:cNvCxnSpPr>
+                  <a:cxnSpLocks/>
+                </p:cNvCxnSpPr>
+                <p:nvPr/>
+              </p:nvCxnSpPr>
+              <p:spPr>
+                <a:xfrm flipV="1">
+                  <a:off x="3472465" y="1795718"/>
+                  <a:ext cx="0" cy="385974"/>
+                </a:xfrm>
+                <a:prstGeom prst="line">
+                  <a:avLst/>
+                </a:prstGeom>
+                <a:ln w="28575">
+                  <a:solidFill>
+                    <a:schemeClr val="accent1"/>
+                  </a:solidFill>
+                </a:ln>
+              </p:spPr>
+              <p:style>
+                <a:lnRef idx="2">
+                  <a:schemeClr val="accent1"/>
+                </a:lnRef>
+                <a:fillRef idx="0">
+                  <a:schemeClr val="accent1"/>
+                </a:fillRef>
+                <a:effectRef idx="1">
+                  <a:schemeClr val="accent1"/>
+                </a:effectRef>
+                <a:fontRef idx="minor">
+                  <a:schemeClr val="tx1"/>
+                </a:fontRef>
+              </p:style>
+            </p:cxnSp>
+            <p:cxnSp>
+              <p:nvCxnSpPr>
+                <p:cNvPr id="81" name="Connecteur droit 80">
+                  <a:extLst>
+                    <a:ext uri="{FF2B5EF4-FFF2-40B4-BE49-F238E27FC236}">
+                      <a16:creationId xmlns:a16="http://schemas.microsoft.com/office/drawing/2014/main" id="{D6CED4FB-9D28-B5D3-4EFF-80A584CA3841}"/>
+                    </a:ext>
+                  </a:extLst>
+                </p:cNvPr>
+                <p:cNvCxnSpPr>
+                  <a:cxnSpLocks/>
+                </p:cNvCxnSpPr>
+                <p:nvPr/>
+              </p:nvCxnSpPr>
+              <p:spPr>
+                <a:xfrm flipV="1">
+                  <a:off x="3624865" y="1550525"/>
+                  <a:ext cx="0" cy="631167"/>
+                </a:xfrm>
+                <a:prstGeom prst="line">
+                  <a:avLst/>
+                </a:prstGeom>
+                <a:ln w="28575">
+                  <a:solidFill>
+                    <a:schemeClr val="accent1"/>
+                  </a:solidFill>
+                </a:ln>
+              </p:spPr>
+              <p:style>
+                <a:lnRef idx="2">
+                  <a:schemeClr val="accent1"/>
+                </a:lnRef>
+                <a:fillRef idx="0">
+                  <a:schemeClr val="accent1"/>
+                </a:fillRef>
+                <a:effectRef idx="1">
+                  <a:schemeClr val="accent1"/>
+                </a:effectRef>
+                <a:fontRef idx="minor">
+                  <a:schemeClr val="tx1"/>
+                </a:fontRef>
+              </p:style>
+            </p:cxnSp>
+            <p:cxnSp>
+              <p:nvCxnSpPr>
+                <p:cNvPr id="82" name="Connecteur droit 81">
+                  <a:extLst>
+                    <a:ext uri="{FF2B5EF4-FFF2-40B4-BE49-F238E27FC236}">
+                      <a16:creationId xmlns:a16="http://schemas.microsoft.com/office/drawing/2014/main" id="{1A29467A-8797-9D5D-D539-E1FDA8373823}"/>
+                    </a:ext>
+                  </a:extLst>
+                </p:cNvPr>
+                <p:cNvCxnSpPr>
+                  <a:cxnSpLocks/>
+                </p:cNvCxnSpPr>
+                <p:nvPr/>
+              </p:nvCxnSpPr>
+              <p:spPr>
+                <a:xfrm flipV="1">
+                  <a:off x="3744532" y="1448452"/>
+                  <a:ext cx="0" cy="733240"/>
+                </a:xfrm>
+                <a:prstGeom prst="line">
+                  <a:avLst/>
+                </a:prstGeom>
+                <a:ln w="28575">
+                  <a:solidFill>
+                    <a:schemeClr val="accent1"/>
+                  </a:solidFill>
+                </a:ln>
+              </p:spPr>
+              <p:style>
+                <a:lnRef idx="2">
+                  <a:schemeClr val="accent1"/>
+                </a:lnRef>
+                <a:fillRef idx="0">
+                  <a:schemeClr val="accent1"/>
+                </a:fillRef>
+                <a:effectRef idx="1">
+                  <a:schemeClr val="accent1"/>
+                </a:effectRef>
+                <a:fontRef idx="minor">
+                  <a:schemeClr val="tx1"/>
+                </a:fontRef>
+              </p:style>
+            </p:cxnSp>
+            <p:sp>
+              <p:nvSpPr>
+                <p:cNvPr id="83" name="ZoneTexte 82">
+                  <a:extLst>
+                    <a:ext uri="{FF2B5EF4-FFF2-40B4-BE49-F238E27FC236}">
+                      <a16:creationId xmlns:a16="http://schemas.microsoft.com/office/drawing/2014/main" id="{E8FBB1AA-AA6B-FD7E-DB6A-72CA2F38667D}"/>
+                    </a:ext>
+                  </a:extLst>
+                </p:cNvPr>
+                <p:cNvSpPr txBox="1"/>
+                <p:nvPr/>
+              </p:nvSpPr>
+              <p:spPr>
+                <a:xfrm>
+                  <a:off x="1252945" y="1058647"/>
+                  <a:ext cx="1126248" cy="261610"/>
+                </a:xfrm>
+                <a:prstGeom prst="rect">
+                  <a:avLst/>
+                </a:prstGeom>
+                <a:noFill/>
+              </p:spPr>
+              <p:txBody>
+                <a:bodyPr wrap="square">
+                  <a:spAutoFit/>
+                </a:bodyPr>
+                <a:lstStyle>
+                  <a:defPPr>
+                    <a:defRPr lang="fr-FR"/>
+                  </a:defPPr>
+                  <a:lvl1pPr>
+                    <a:defRPr sz="1100">
+                      <a:solidFill>
+                        <a:schemeClr val="tx1">
+                          <a:lumMod val="50000"/>
+                          <a:lumOff val="50000"/>
+                        </a:schemeClr>
+                      </a:solidFill>
+                    </a:defRPr>
+                  </a:lvl1pPr>
+                </a:lstStyle>
+                <a:p>
+                  <a:r>
+                    <a:rPr lang="fr-FR" dirty="0"/>
+                    <a:t>SCL SDA 5V GND</a:t>
+                  </a:r>
+                </a:p>
+              </p:txBody>
+            </p:sp>
+            <p:cxnSp>
+              <p:nvCxnSpPr>
+                <p:cNvPr id="85" name="Connecteur droit 84">
+                  <a:extLst>
+                    <a:ext uri="{FF2B5EF4-FFF2-40B4-BE49-F238E27FC236}">
+                      <a16:creationId xmlns:a16="http://schemas.microsoft.com/office/drawing/2014/main" id="{ACB0DE91-F252-6865-CD41-B4B2FBE40C89}"/>
+                    </a:ext>
+                  </a:extLst>
+                </p:cNvPr>
+                <p:cNvCxnSpPr>
+                  <a:cxnSpLocks/>
+                </p:cNvCxnSpPr>
+                <p:nvPr/>
+              </p:nvCxnSpPr>
+              <p:spPr>
+                <a:xfrm flipH="1">
+                  <a:off x="1919415" y="3656876"/>
+                  <a:ext cx="2334754" cy="0"/>
+                </a:xfrm>
+                <a:prstGeom prst="line">
+                  <a:avLst/>
+                </a:prstGeom>
+                <a:ln w="28575">
+                  <a:solidFill>
+                    <a:srgbClr val="FF0000"/>
+                  </a:solidFill>
+                </a:ln>
+              </p:spPr>
+              <p:style>
+                <a:lnRef idx="2">
+                  <a:schemeClr val="accent1"/>
+                </a:lnRef>
+                <a:fillRef idx="0">
+                  <a:schemeClr val="accent1"/>
+                </a:fillRef>
+                <a:effectRef idx="1">
+                  <a:schemeClr val="accent1"/>
+                </a:effectRef>
+                <a:fontRef idx="minor">
+                  <a:schemeClr val="tx1"/>
+                </a:fontRef>
+              </p:style>
+            </p:cxnSp>
+            <p:cxnSp>
+              <p:nvCxnSpPr>
+                <p:cNvPr id="90" name="Connecteur droit 89">
+                  <a:extLst>
+                    <a:ext uri="{FF2B5EF4-FFF2-40B4-BE49-F238E27FC236}">
+                      <a16:creationId xmlns:a16="http://schemas.microsoft.com/office/drawing/2014/main" id="{D334275E-AC5A-AC8A-4FDC-F9952048BD6B}"/>
+                    </a:ext>
+                  </a:extLst>
+                </p:cNvPr>
+                <p:cNvCxnSpPr>
+                  <a:cxnSpLocks/>
+                  <a:stCxn id="11" idx="1"/>
+                </p:cNvCxnSpPr>
+                <p:nvPr/>
+              </p:nvCxnSpPr>
+              <p:spPr>
+                <a:xfrm flipH="1">
+                  <a:off x="3932788" y="3769664"/>
+                  <a:ext cx="2102784" cy="15559"/>
+                </a:xfrm>
+                <a:prstGeom prst="line">
+                  <a:avLst/>
+                </a:prstGeom>
+                <a:ln w="28575">
+                  <a:solidFill>
+                    <a:srgbClr val="FF0000"/>
+                  </a:solidFill>
+                </a:ln>
+              </p:spPr>
+              <p:style>
+                <a:lnRef idx="2">
+                  <a:schemeClr val="accent1"/>
+                </a:lnRef>
+                <a:fillRef idx="0">
+                  <a:schemeClr val="accent1"/>
+                </a:fillRef>
+                <a:effectRef idx="1">
+                  <a:schemeClr val="accent1"/>
+                </a:effectRef>
+                <a:fontRef idx="minor">
+                  <a:schemeClr val="tx1"/>
+                </a:fontRef>
+              </p:style>
+            </p:cxnSp>
+            <p:cxnSp>
+              <p:nvCxnSpPr>
+                <p:cNvPr id="96" name="Connecteur droit 95">
+                  <a:extLst>
+                    <a:ext uri="{FF2B5EF4-FFF2-40B4-BE49-F238E27FC236}">
+                      <a16:creationId xmlns:a16="http://schemas.microsoft.com/office/drawing/2014/main" id="{87429330-1B5F-CA95-3DA7-86B62B71B089}"/>
+                    </a:ext>
+                  </a:extLst>
+                </p:cNvPr>
+                <p:cNvCxnSpPr>
+                  <a:cxnSpLocks/>
+                </p:cNvCxnSpPr>
+                <p:nvPr/>
+              </p:nvCxnSpPr>
+              <p:spPr>
+                <a:xfrm flipV="1">
+                  <a:off x="1446874" y="1317647"/>
+                  <a:ext cx="0" cy="607852"/>
+                </a:xfrm>
+                <a:prstGeom prst="line">
+                  <a:avLst/>
+                </a:prstGeom>
+                <a:ln w="28575">
+                  <a:solidFill>
+                    <a:schemeClr val="accent1"/>
+                  </a:solidFill>
+                </a:ln>
+              </p:spPr>
+              <p:style>
+                <a:lnRef idx="2">
+                  <a:schemeClr val="accent1"/>
+                </a:lnRef>
+                <a:fillRef idx="0">
+                  <a:schemeClr val="accent1"/>
+                </a:fillRef>
+                <a:effectRef idx="1">
+                  <a:schemeClr val="accent1"/>
+                </a:effectRef>
+                <a:fontRef idx="minor">
+                  <a:schemeClr val="tx1"/>
+                </a:fontRef>
+              </p:style>
+            </p:cxnSp>
+            <p:cxnSp>
+              <p:nvCxnSpPr>
+                <p:cNvPr id="97" name="Connecteur droit 96">
+                  <a:extLst>
+                    <a:ext uri="{FF2B5EF4-FFF2-40B4-BE49-F238E27FC236}">
+                      <a16:creationId xmlns:a16="http://schemas.microsoft.com/office/drawing/2014/main" id="{4059D435-6B58-037E-08DA-9964F93231E9}"/>
+                    </a:ext>
+                  </a:extLst>
+                </p:cNvPr>
+                <p:cNvCxnSpPr>
+                  <a:cxnSpLocks/>
+                </p:cNvCxnSpPr>
+                <p:nvPr/>
+              </p:nvCxnSpPr>
+              <p:spPr>
+                <a:xfrm flipV="1">
+                  <a:off x="1684042" y="1294332"/>
+                  <a:ext cx="0" cy="512386"/>
+                </a:xfrm>
+                <a:prstGeom prst="line">
+                  <a:avLst/>
+                </a:prstGeom>
+                <a:ln w="28575">
+                  <a:solidFill>
+                    <a:schemeClr val="accent1"/>
+                  </a:solidFill>
+                </a:ln>
+              </p:spPr>
+              <p:style>
+                <a:lnRef idx="2">
+                  <a:schemeClr val="accent1"/>
+                </a:lnRef>
+                <a:fillRef idx="0">
+                  <a:schemeClr val="accent1"/>
+                </a:fillRef>
+                <a:effectRef idx="1">
+                  <a:schemeClr val="accent1"/>
+                </a:effectRef>
+                <a:fontRef idx="minor">
+                  <a:schemeClr val="tx1"/>
+                </a:fontRef>
+              </p:style>
+            </p:cxnSp>
+            <p:cxnSp>
+              <p:nvCxnSpPr>
+                <p:cNvPr id="99" name="Connecteur droit 98">
+                  <a:extLst>
+                    <a:ext uri="{FF2B5EF4-FFF2-40B4-BE49-F238E27FC236}">
+                      <a16:creationId xmlns:a16="http://schemas.microsoft.com/office/drawing/2014/main" id="{A875F83F-8675-3A4D-6110-35F3C2A0FFE3}"/>
+                    </a:ext>
+                  </a:extLst>
+                </p:cNvPr>
+                <p:cNvCxnSpPr>
+                  <a:cxnSpLocks/>
+                </p:cNvCxnSpPr>
+                <p:nvPr/>
+              </p:nvCxnSpPr>
+              <p:spPr>
+                <a:xfrm flipV="1">
+                  <a:off x="1919415" y="1302686"/>
+                  <a:ext cx="0" cy="247839"/>
+                </a:xfrm>
+                <a:prstGeom prst="line">
+                  <a:avLst/>
+                </a:prstGeom>
+                <a:ln w="28575">
+                  <a:solidFill>
+                    <a:schemeClr val="accent1"/>
+                  </a:solidFill>
+                </a:ln>
+              </p:spPr>
+              <p:style>
+                <a:lnRef idx="2">
+                  <a:schemeClr val="accent1"/>
+                </a:lnRef>
+                <a:fillRef idx="0">
+                  <a:schemeClr val="accent1"/>
+                </a:fillRef>
+                <a:effectRef idx="1">
+                  <a:schemeClr val="accent1"/>
+                </a:effectRef>
+                <a:fontRef idx="minor">
+                  <a:schemeClr val="tx1"/>
+                </a:fontRef>
+              </p:style>
+            </p:cxnSp>
+            <p:cxnSp>
+              <p:nvCxnSpPr>
+                <p:cNvPr id="101" name="Connecteur droit 100">
+                  <a:extLst>
+                    <a:ext uri="{FF2B5EF4-FFF2-40B4-BE49-F238E27FC236}">
+                      <a16:creationId xmlns:a16="http://schemas.microsoft.com/office/drawing/2014/main" id="{CF7EFC79-220B-726D-B39A-858A44B051B0}"/>
+                    </a:ext>
+                  </a:extLst>
+                </p:cNvPr>
+                <p:cNvCxnSpPr>
+                  <a:cxnSpLocks/>
+                </p:cNvCxnSpPr>
+                <p:nvPr/>
+              </p:nvCxnSpPr>
+              <p:spPr>
+                <a:xfrm flipV="1">
+                  <a:off x="2154788" y="1311040"/>
+                  <a:ext cx="0" cy="137412"/>
+                </a:xfrm>
+                <a:prstGeom prst="line">
+                  <a:avLst/>
+                </a:prstGeom>
+                <a:ln w="28575">
+                  <a:solidFill>
+                    <a:schemeClr val="accent1"/>
+                  </a:solidFill>
+                </a:ln>
+              </p:spPr>
+              <p:style>
+                <a:lnRef idx="2">
+                  <a:schemeClr val="accent1"/>
+                </a:lnRef>
+                <a:fillRef idx="0">
+                  <a:schemeClr val="accent1"/>
+                </a:fillRef>
+                <a:effectRef idx="1">
+                  <a:schemeClr val="accent1"/>
+                </a:effectRef>
+                <a:fontRef idx="minor">
+                  <a:schemeClr val="tx1"/>
+                </a:fontRef>
+              </p:style>
+            </p:cxnSp>
+            <p:cxnSp>
+              <p:nvCxnSpPr>
+                <p:cNvPr id="103" name="Connecteur droit 102">
+                  <a:extLst>
+                    <a:ext uri="{FF2B5EF4-FFF2-40B4-BE49-F238E27FC236}">
+                      <a16:creationId xmlns:a16="http://schemas.microsoft.com/office/drawing/2014/main" id="{5CF532DF-C3C4-203A-0E29-48701D6B5756}"/>
+                    </a:ext>
+                  </a:extLst>
+                </p:cNvPr>
+                <p:cNvCxnSpPr>
+                  <a:cxnSpLocks/>
+                </p:cNvCxnSpPr>
+                <p:nvPr/>
+              </p:nvCxnSpPr>
+              <p:spPr>
+                <a:xfrm>
+                  <a:off x="1446874" y="1925499"/>
+                  <a:ext cx="1886635" cy="0"/>
+                </a:xfrm>
+                <a:prstGeom prst="line">
+                  <a:avLst/>
+                </a:prstGeom>
+                <a:ln w="28575">
+                  <a:solidFill>
+                    <a:schemeClr val="accent1"/>
+                  </a:solidFill>
+                </a:ln>
+              </p:spPr>
+              <p:style>
+                <a:lnRef idx="2">
+                  <a:schemeClr val="accent1"/>
+                </a:lnRef>
+                <a:fillRef idx="0">
+                  <a:schemeClr val="accent1"/>
+                </a:fillRef>
+                <a:effectRef idx="1">
+                  <a:schemeClr val="accent1"/>
+                </a:effectRef>
+                <a:fontRef idx="minor">
+                  <a:schemeClr val="tx1"/>
+                </a:fontRef>
+              </p:style>
+            </p:cxnSp>
+            <p:cxnSp>
+              <p:nvCxnSpPr>
+                <p:cNvPr id="127" name="Connecteur droit 126">
+                  <a:extLst>
+                    <a:ext uri="{FF2B5EF4-FFF2-40B4-BE49-F238E27FC236}">
+                      <a16:creationId xmlns:a16="http://schemas.microsoft.com/office/drawing/2014/main" id="{39DB2DCE-986F-6A31-A6F8-193AB7C09BED}"/>
+                    </a:ext>
+                  </a:extLst>
+                </p:cNvPr>
+                <p:cNvCxnSpPr>
+                  <a:cxnSpLocks/>
+                </p:cNvCxnSpPr>
+                <p:nvPr/>
+              </p:nvCxnSpPr>
+              <p:spPr>
+                <a:xfrm flipV="1">
+                  <a:off x="1669106" y="1795717"/>
+                  <a:ext cx="1816353" cy="11001"/>
+                </a:xfrm>
+                <a:prstGeom prst="line">
+                  <a:avLst/>
+                </a:prstGeom>
+                <a:ln w="28575">
+                  <a:solidFill>
+                    <a:schemeClr val="accent1"/>
+                  </a:solidFill>
+                </a:ln>
+              </p:spPr>
+              <p:style>
+                <a:lnRef idx="2">
+                  <a:schemeClr val="accent1"/>
+                </a:lnRef>
+                <a:fillRef idx="0">
+                  <a:schemeClr val="accent1"/>
+                </a:fillRef>
+                <a:effectRef idx="1">
+                  <a:schemeClr val="accent1"/>
+                </a:effectRef>
+                <a:fontRef idx="minor">
+                  <a:schemeClr val="tx1"/>
+                </a:fontRef>
+              </p:style>
+            </p:cxnSp>
+            <p:cxnSp>
+              <p:nvCxnSpPr>
+                <p:cNvPr id="130" name="Connecteur droit 129">
+                  <a:extLst>
+                    <a:ext uri="{FF2B5EF4-FFF2-40B4-BE49-F238E27FC236}">
+                      <a16:creationId xmlns:a16="http://schemas.microsoft.com/office/drawing/2014/main" id="{E91E294F-98E0-ACC3-E6A6-0F0AA8DBBC03}"/>
+                    </a:ext>
+                  </a:extLst>
+                </p:cNvPr>
+                <p:cNvCxnSpPr>
+                  <a:cxnSpLocks/>
+                </p:cNvCxnSpPr>
+                <p:nvPr/>
+              </p:nvCxnSpPr>
+              <p:spPr>
+                <a:xfrm>
+                  <a:off x="1919415" y="1542577"/>
+                  <a:ext cx="1705450" cy="0"/>
+                </a:xfrm>
+                <a:prstGeom prst="line">
+                  <a:avLst/>
+                </a:prstGeom>
+                <a:ln w="28575">
+                  <a:solidFill>
+                    <a:schemeClr val="accent1"/>
+                  </a:solidFill>
+                </a:ln>
+              </p:spPr>
+              <p:style>
+                <a:lnRef idx="2">
+                  <a:schemeClr val="accent1"/>
+                </a:lnRef>
+                <a:fillRef idx="0">
+                  <a:schemeClr val="accent1"/>
+                </a:fillRef>
+                <a:effectRef idx="1">
+                  <a:schemeClr val="accent1"/>
+                </a:effectRef>
+                <a:fontRef idx="minor">
+                  <a:schemeClr val="tx1"/>
+                </a:fontRef>
+              </p:style>
+            </p:cxnSp>
+            <p:cxnSp>
+              <p:nvCxnSpPr>
+                <p:cNvPr id="133" name="Connecteur droit 132">
+                  <a:extLst>
+                    <a:ext uri="{FF2B5EF4-FFF2-40B4-BE49-F238E27FC236}">
+                      <a16:creationId xmlns:a16="http://schemas.microsoft.com/office/drawing/2014/main" id="{2F9A6BF4-C04C-CEE0-9A75-6C04730FD030}"/>
+                    </a:ext>
+                  </a:extLst>
+                </p:cNvPr>
+                <p:cNvCxnSpPr>
+                  <a:cxnSpLocks/>
+                </p:cNvCxnSpPr>
+                <p:nvPr/>
+              </p:nvCxnSpPr>
+              <p:spPr>
+                <a:xfrm>
+                  <a:off x="2144628" y="1443372"/>
+                  <a:ext cx="1599904" cy="5080"/>
+                </a:xfrm>
+                <a:prstGeom prst="line">
+                  <a:avLst/>
+                </a:prstGeom>
+                <a:ln w="28575">
+                  <a:solidFill>
+                    <a:schemeClr val="accent1"/>
+                  </a:solidFill>
+                </a:ln>
+              </p:spPr>
+              <p:style>
+                <a:lnRef idx="2">
+                  <a:schemeClr val="accent1"/>
+                </a:lnRef>
+                <a:fillRef idx="0">
+                  <a:schemeClr val="accent1"/>
+                </a:fillRef>
+                <a:effectRef idx="1">
+                  <a:schemeClr val="accent1"/>
+                </a:effectRef>
+                <a:fontRef idx="minor">
+                  <a:schemeClr val="tx1"/>
+                </a:fontRef>
+              </p:style>
+            </p:cxnSp>
+            <p:cxnSp>
+              <p:nvCxnSpPr>
+                <p:cNvPr id="138" name="Connecteur droit 137">
+                  <a:extLst>
+                    <a:ext uri="{FF2B5EF4-FFF2-40B4-BE49-F238E27FC236}">
+                      <a16:creationId xmlns:a16="http://schemas.microsoft.com/office/drawing/2014/main" id="{7AFBBEA4-1B59-BD9C-29C6-4A296EABC80E}"/>
+                    </a:ext>
+                  </a:extLst>
+                </p:cNvPr>
+                <p:cNvCxnSpPr>
+                  <a:cxnSpLocks/>
+                </p:cNvCxnSpPr>
+                <p:nvPr/>
+              </p:nvCxnSpPr>
+              <p:spPr>
+                <a:xfrm flipV="1">
+                  <a:off x="3878602" y="1220887"/>
+                  <a:ext cx="0" cy="1553603"/>
+                </a:xfrm>
+                <a:prstGeom prst="line">
+                  <a:avLst/>
+                </a:prstGeom>
+                <a:ln w="28575">
+                  <a:solidFill>
+                    <a:srgbClr val="FF0000"/>
+                  </a:solidFill>
+                </a:ln>
+              </p:spPr>
+              <p:style>
+                <a:lnRef idx="2">
+                  <a:schemeClr val="accent1"/>
+                </a:lnRef>
+                <a:fillRef idx="0">
+                  <a:schemeClr val="accent1"/>
+                </a:fillRef>
+                <a:effectRef idx="1">
+                  <a:schemeClr val="accent1"/>
+                </a:effectRef>
+                <a:fontRef idx="minor">
+                  <a:schemeClr val="tx1"/>
+                </a:fontRef>
+              </p:style>
+            </p:cxnSp>
+            <p:cxnSp>
+              <p:nvCxnSpPr>
+                <p:cNvPr id="163" name="Connecteur droit 162">
+                  <a:extLst>
+                    <a:ext uri="{FF2B5EF4-FFF2-40B4-BE49-F238E27FC236}">
+                      <a16:creationId xmlns:a16="http://schemas.microsoft.com/office/drawing/2014/main" id="{77849984-86FE-E381-AD6D-5F40D9427A92}"/>
+                    </a:ext>
+                  </a:extLst>
+                </p:cNvPr>
+                <p:cNvCxnSpPr>
+                  <a:cxnSpLocks/>
+                </p:cNvCxnSpPr>
+                <p:nvPr/>
+              </p:nvCxnSpPr>
+              <p:spPr>
+                <a:xfrm flipV="1">
+                  <a:off x="4012786" y="1317647"/>
+                  <a:ext cx="0" cy="1456843"/>
+                </a:xfrm>
+                <a:prstGeom prst="line">
+                  <a:avLst/>
+                </a:prstGeom>
+                <a:ln w="28575">
+                  <a:solidFill>
+                    <a:srgbClr val="FF0000"/>
+                  </a:solidFill>
+                </a:ln>
+              </p:spPr>
+              <p:style>
+                <a:lnRef idx="2">
+                  <a:schemeClr val="accent1"/>
+                </a:lnRef>
+                <a:fillRef idx="0">
+                  <a:schemeClr val="accent1"/>
+                </a:fillRef>
+                <a:effectRef idx="1">
+                  <a:schemeClr val="accent1"/>
+                </a:effectRef>
+                <a:fontRef idx="minor">
+                  <a:schemeClr val="tx1"/>
+                </a:fontRef>
+              </p:style>
+            </p:cxnSp>
+            <p:cxnSp>
+              <p:nvCxnSpPr>
+                <p:cNvPr id="165" name="Connecteur droit 164">
+                  <a:extLst>
+                    <a:ext uri="{FF2B5EF4-FFF2-40B4-BE49-F238E27FC236}">
+                      <a16:creationId xmlns:a16="http://schemas.microsoft.com/office/drawing/2014/main" id="{D334231E-02D6-462C-95BA-5EC8798AD00E}"/>
+                    </a:ext>
+                  </a:extLst>
+                </p:cNvPr>
+                <p:cNvCxnSpPr>
+                  <a:cxnSpLocks/>
+                  <a:endCxn id="172" idx="3"/>
+                </p:cNvCxnSpPr>
+                <p:nvPr/>
+              </p:nvCxnSpPr>
+              <p:spPr>
+                <a:xfrm flipV="1">
+                  <a:off x="4136272" y="1356470"/>
+                  <a:ext cx="616" cy="1153662"/>
+                </a:xfrm>
+                <a:prstGeom prst="line">
+                  <a:avLst/>
+                </a:prstGeom>
+                <a:ln w="28575">
+                  <a:solidFill>
+                    <a:srgbClr val="FF0000"/>
+                  </a:solidFill>
+                </a:ln>
+              </p:spPr>
+              <p:style>
+                <a:lnRef idx="2">
+                  <a:schemeClr val="accent1"/>
+                </a:lnRef>
+                <a:fillRef idx="0">
+                  <a:schemeClr val="accent1"/>
+                </a:fillRef>
+                <a:effectRef idx="1">
+                  <a:schemeClr val="accent1"/>
+                </a:effectRef>
+                <a:fontRef idx="minor">
+                  <a:schemeClr val="tx1"/>
+                </a:fontRef>
+              </p:style>
+            </p:cxnSp>
+            <p:cxnSp>
+              <p:nvCxnSpPr>
+                <p:cNvPr id="167" name="Connecteur droit 166">
+                  <a:extLst>
+                    <a:ext uri="{FF2B5EF4-FFF2-40B4-BE49-F238E27FC236}">
+                      <a16:creationId xmlns:a16="http://schemas.microsoft.com/office/drawing/2014/main" id="{B76081D5-C08A-C730-582A-6A42F3DFC5D8}"/>
+                    </a:ext>
+                  </a:extLst>
+                </p:cNvPr>
+                <p:cNvCxnSpPr>
+                  <a:cxnSpLocks/>
+                </p:cNvCxnSpPr>
+                <p:nvPr/>
+              </p:nvCxnSpPr>
+              <p:spPr>
+                <a:xfrm flipH="1">
+                  <a:off x="4012786" y="1313724"/>
+                  <a:ext cx="1207357" cy="0"/>
+                </a:xfrm>
+                <a:prstGeom prst="line">
+                  <a:avLst/>
+                </a:prstGeom>
+                <a:ln w="28575">
+                  <a:solidFill>
+                    <a:srgbClr val="FF0000"/>
+                  </a:solidFill>
+                </a:ln>
+              </p:spPr>
+              <p:style>
+                <a:lnRef idx="2">
+                  <a:schemeClr val="accent1"/>
+                </a:lnRef>
+                <a:fillRef idx="0">
+                  <a:schemeClr val="accent1"/>
+                </a:fillRef>
+                <a:effectRef idx="1">
+                  <a:schemeClr val="accent1"/>
+                </a:effectRef>
+                <a:fontRef idx="minor">
+                  <a:schemeClr val="tx1"/>
+                </a:fontRef>
+              </p:style>
+            </p:cxnSp>
+            <p:cxnSp>
+              <p:nvCxnSpPr>
+                <p:cNvPr id="170" name="Connecteur droit 169">
+                  <a:extLst>
+                    <a:ext uri="{FF2B5EF4-FFF2-40B4-BE49-F238E27FC236}">
+                      <a16:creationId xmlns:a16="http://schemas.microsoft.com/office/drawing/2014/main" id="{B69B5348-748E-333F-1F75-658A7C13D212}"/>
+                    </a:ext>
+                  </a:extLst>
+                </p:cNvPr>
+                <p:cNvCxnSpPr>
+                  <a:cxnSpLocks/>
+                </p:cNvCxnSpPr>
+                <p:nvPr/>
+              </p:nvCxnSpPr>
+              <p:spPr>
+                <a:xfrm flipV="1">
+                  <a:off x="5220143" y="1220887"/>
+                  <a:ext cx="0" cy="96760"/>
+                </a:xfrm>
+                <a:prstGeom prst="line">
+                  <a:avLst/>
+                </a:prstGeom>
+                <a:ln w="28575">
+                  <a:solidFill>
+                    <a:srgbClr val="FF0000"/>
+                  </a:solidFill>
+                </a:ln>
+              </p:spPr>
+              <p:style>
+                <a:lnRef idx="2">
+                  <a:schemeClr val="accent1"/>
+                </a:lnRef>
+                <a:fillRef idx="0">
+                  <a:schemeClr val="accent1"/>
+                </a:fillRef>
+                <a:effectRef idx="1">
+                  <a:schemeClr val="accent1"/>
+                </a:effectRef>
+                <a:fontRef idx="minor">
+                  <a:schemeClr val="tx1"/>
+                </a:fontRef>
+              </p:style>
+            </p:cxnSp>
+            <p:sp>
+              <p:nvSpPr>
+                <p:cNvPr id="178" name="ZoneTexte 177">
+                  <a:extLst>
+                    <a:ext uri="{FF2B5EF4-FFF2-40B4-BE49-F238E27FC236}">
+                      <a16:creationId xmlns:a16="http://schemas.microsoft.com/office/drawing/2014/main" id="{9B9294C2-B6D0-B52D-46D8-6139B013B514}"/>
+                    </a:ext>
+                  </a:extLst>
+                </p:cNvPr>
+                <p:cNvSpPr txBox="1"/>
+                <p:nvPr/>
+              </p:nvSpPr>
+              <p:spPr>
+                <a:xfrm>
+                  <a:off x="3058663" y="598955"/>
+                  <a:ext cx="1908245" cy="261610"/>
+                </a:xfrm>
+                <a:prstGeom prst="rect">
+                  <a:avLst/>
+                </a:prstGeom>
+                <a:noFill/>
+              </p:spPr>
+              <p:txBody>
+                <a:bodyPr wrap="square">
+                  <a:spAutoFit/>
+                </a:bodyPr>
+                <a:lstStyle>
+                  <a:defPPr>
+                    <a:defRPr lang="fr-FR"/>
+                  </a:defPPr>
+                  <a:lvl1pPr>
+                    <a:defRPr sz="1100">
+                      <a:solidFill>
+                        <a:schemeClr val="tx1">
+                          <a:lumMod val="50000"/>
+                          <a:lumOff val="50000"/>
+                        </a:schemeClr>
+                      </a:solidFill>
+                    </a:defRPr>
+                  </a:lvl1pPr>
+                </a:lstStyle>
+                <a:p>
+                  <a:r>
+                    <a:rPr lang="fr-FR" dirty="0"/>
+                    <a:t>GND – VCC – SIG1 -&gt; Io18</a:t>
+                  </a:r>
+                </a:p>
+              </p:txBody>
+            </p:sp>
+            <p:sp>
+              <p:nvSpPr>
+                <p:cNvPr id="179" name="ZoneTexte 178">
+                  <a:extLst>
+                    <a:ext uri="{FF2B5EF4-FFF2-40B4-BE49-F238E27FC236}">
+                      <a16:creationId xmlns:a16="http://schemas.microsoft.com/office/drawing/2014/main" id="{31D060CD-A31F-EE7F-B248-4A79108139F9}"/>
+                    </a:ext>
+                  </a:extLst>
+                </p:cNvPr>
+                <p:cNvSpPr txBox="1"/>
+                <p:nvPr/>
+              </p:nvSpPr>
+              <p:spPr>
+                <a:xfrm>
+                  <a:off x="4558653" y="52225"/>
+                  <a:ext cx="1908245" cy="600164"/>
+                </a:xfrm>
+                <a:prstGeom prst="rect">
+                  <a:avLst/>
+                </a:prstGeom>
+                <a:noFill/>
+              </p:spPr>
+              <p:txBody>
+                <a:bodyPr wrap="square">
+                  <a:spAutoFit/>
+                </a:bodyPr>
+                <a:lstStyle>
+                  <a:defPPr>
+                    <a:defRPr lang="fr-FR"/>
+                  </a:defPPr>
+                  <a:lvl1pPr>
+                    <a:defRPr sz="1100">
+                      <a:solidFill>
+                        <a:schemeClr val="tx1">
+                          <a:lumMod val="50000"/>
+                          <a:lumOff val="50000"/>
+                        </a:schemeClr>
+                      </a:solidFill>
+                    </a:defRPr>
+                  </a:lvl1pPr>
+                </a:lstStyle>
+                <a:p>
+                  <a:r>
+                    <a:rPr lang="fr-FR" dirty="0"/>
+                    <a:t>GND – VCC – SIG2 -&gt; Io19</a:t>
+                  </a:r>
+                </a:p>
+                <a:p>
+                  <a:r>
+                    <a:rPr lang="fr-FR" dirty="0"/>
+                    <a:t>SIG1 -&gt; Io23</a:t>
+                  </a:r>
+                </a:p>
+                <a:p>
+                  <a:endParaRPr lang="fr-FR" dirty="0"/>
+                </a:p>
+              </p:txBody>
+            </p:sp>
+          </p:grpSp>
+        </p:grpSp>
+        <p:sp>
+          <p:nvSpPr>
+            <p:cNvPr id="172" name="Ellipse 171">
+              <a:extLst>
+                <a:ext uri="{FF2B5EF4-FFF2-40B4-BE49-F238E27FC236}">
+                  <a16:creationId xmlns:a16="http://schemas.microsoft.com/office/drawing/2014/main" id="{588F6CE1-094F-220C-86CB-C96F981D3D17}"/>
+                </a:ext>
+              </a:extLst>
+            </p:cNvPr>
+            <p:cNvSpPr/>
+            <p:nvPr/>
+          </p:nvSpPr>
+          <p:spPr>
+            <a:xfrm>
+              <a:off x="4621505" y="1248074"/>
+              <a:ext cx="100806" cy="93281"/>
+            </a:xfrm>
+            <a:prstGeom prst="ellipse">
+              <a:avLst/>
+            </a:prstGeom>
+            <a:solidFill>
+              <a:srgbClr val="FF0000"/>
+            </a:solidFill>
+            <a:ln>
+              <a:solidFill>
+                <a:srgbClr val="FF0000"/>
+              </a:solidFill>
+            </a:ln>
+          </p:spPr>
+          <p:style>
+            <a:lnRef idx="2">
+              <a:schemeClr val="accent1">
+                <a:shade val="15000"/>
+              </a:schemeClr>
+            </a:lnRef>
+            <a:fillRef idx="1">
+              <a:schemeClr val="accent1"/>
+            </a:fillRef>
+            <a:effectRef idx="0">
+              <a:schemeClr val="accent1"/>
+            </a:effectRef>
+            <a:fontRef idx="minor">
+              <a:schemeClr val="lt1"/>
+            </a:fontRef>
+          </p:style>
+          <p:txBody>
+            <a:bodyPr rtlCol="0" anchor="ctr"/>
+            <a:lstStyle/>
+            <a:p>
+              <a:pPr algn="ctr"/>
+              <a:endParaRPr lang="fr-FR"/>
+            </a:p>
+          </p:txBody>
+        </p:sp>
+      </p:grpSp>
+      <p:cxnSp>
+        <p:nvCxnSpPr>
+          <p:cNvPr id="182" name="Connecteur droit 181">
+            <a:extLst>
+              <a:ext uri="{FF2B5EF4-FFF2-40B4-BE49-F238E27FC236}">
+                <a16:creationId xmlns:a16="http://schemas.microsoft.com/office/drawing/2014/main" id="{92C3A2D8-D6DF-DF27-63ED-D3F4D5B8062E}"/>
+              </a:ext>
+            </a:extLst>
+          </p:cNvPr>
+          <p:cNvCxnSpPr>
+            <a:cxnSpLocks/>
+          </p:cNvCxnSpPr>
+          <p:nvPr/>
+        </p:nvCxnSpPr>
+        <p:spPr>
+          <a:xfrm>
+            <a:off x="5570220" y="1469770"/>
+            <a:ext cx="1011235" cy="0"/>
+          </a:xfrm>
+          <a:prstGeom prst="line">
+            <a:avLst/>
+          </a:prstGeom>
+          <a:ln w="28575">
+            <a:solidFill>
+              <a:schemeClr val="accent2"/>
+            </a:solidFill>
+            <a:tailEnd type="triangle"/>
+          </a:ln>
+        </p:spPr>
+        <p:style>
+          <a:lnRef idx="3">
+            <a:schemeClr val="accent1"/>
+          </a:lnRef>
+          <a:fillRef idx="0">
+            <a:schemeClr val="accent1"/>
+          </a:fillRef>
+          <a:effectRef idx="2">
+            <a:schemeClr val="accent1"/>
+          </a:effectRef>
+          <a:fontRef idx="minor">
+            <a:schemeClr val="tx1"/>
+          </a:fontRef>
+        </p:style>
+      </p:cxnSp>
+      <p:cxnSp>
+        <p:nvCxnSpPr>
+          <p:cNvPr id="188" name="Connecteur droit 187">
+            <a:extLst>
+              <a:ext uri="{FF2B5EF4-FFF2-40B4-BE49-F238E27FC236}">
+                <a16:creationId xmlns:a16="http://schemas.microsoft.com/office/drawing/2014/main" id="{329BC842-92F4-D30C-CE9C-1CDCB921A0EE}"/>
+              </a:ext>
+            </a:extLst>
+          </p:cNvPr>
+          <p:cNvCxnSpPr>
+            <a:cxnSpLocks/>
+          </p:cNvCxnSpPr>
+          <p:nvPr/>
+        </p:nvCxnSpPr>
+        <p:spPr>
+          <a:xfrm>
+            <a:off x="8378798" y="2580626"/>
+            <a:ext cx="410391" cy="0"/>
+          </a:xfrm>
+          <a:prstGeom prst="line">
+            <a:avLst/>
+          </a:prstGeom>
+          <a:ln w="28575">
+            <a:solidFill>
+              <a:schemeClr val="accent2"/>
+            </a:solidFill>
+            <a:tailEnd type="triangle"/>
+          </a:ln>
+        </p:spPr>
+        <p:style>
+          <a:lnRef idx="3">
+            <a:schemeClr val="accent1"/>
+          </a:lnRef>
+          <a:fillRef idx="0">
+            <a:schemeClr val="accent1"/>
+          </a:fillRef>
+          <a:effectRef idx="2">
+            <a:schemeClr val="accent1"/>
+          </a:effectRef>
+          <a:fontRef idx="minor">
+            <a:schemeClr val="tx1"/>
+          </a:fontRef>
+        </p:style>
+      </p:cxnSp>
+      <p:cxnSp>
+        <p:nvCxnSpPr>
+          <p:cNvPr id="190" name="Connecteur droit 189">
+            <a:extLst>
+              <a:ext uri="{FF2B5EF4-FFF2-40B4-BE49-F238E27FC236}">
+                <a16:creationId xmlns:a16="http://schemas.microsoft.com/office/drawing/2014/main" id="{615347B9-E97A-6C91-C2FF-09B368EDF7A8}"/>
+              </a:ext>
+            </a:extLst>
+          </p:cNvPr>
+          <p:cNvCxnSpPr>
+            <a:cxnSpLocks/>
+          </p:cNvCxnSpPr>
+          <p:nvPr/>
+        </p:nvCxnSpPr>
+        <p:spPr>
+          <a:xfrm>
+            <a:off x="8395736" y="2974644"/>
+            <a:ext cx="393453" cy="0"/>
+          </a:xfrm>
+          <a:prstGeom prst="line">
+            <a:avLst/>
+          </a:prstGeom>
+          <a:ln w="28575">
+            <a:solidFill>
+              <a:schemeClr val="accent2"/>
+            </a:solidFill>
+            <a:tailEnd type="triangle"/>
+          </a:ln>
+        </p:spPr>
+        <p:style>
+          <a:lnRef idx="3">
+            <a:schemeClr val="accent1"/>
+          </a:lnRef>
+          <a:fillRef idx="0">
+            <a:schemeClr val="accent1"/>
+          </a:fillRef>
+          <a:effectRef idx="2">
+            <a:schemeClr val="accent1"/>
+          </a:effectRef>
+          <a:fontRef idx="minor">
+            <a:schemeClr val="tx1"/>
+          </a:fontRef>
+        </p:style>
+      </p:cxnSp>
+      <p:sp>
+        <p:nvSpPr>
+          <p:cNvPr id="193" name="ZoneTexte 192">
+            <a:extLst>
+              <a:ext uri="{FF2B5EF4-FFF2-40B4-BE49-F238E27FC236}">
+                <a16:creationId xmlns:a16="http://schemas.microsoft.com/office/drawing/2014/main" id="{EBEF4987-9518-F817-9665-BC2AA0E9F455}"/>
               </a:ext>
             </a:extLst>
           </p:cNvPr>
@@ -4919,8 +6045,8 @@
         </p:nvSpPr>
         <p:spPr>
           <a:xfrm>
-            <a:off x="8690124" y="2974644"/>
-            <a:ext cx="1126248" cy="261610"/>
+            <a:off x="7782676" y="2439280"/>
+            <a:ext cx="679133" cy="261610"/>
           </a:xfrm>
           <a:prstGeom prst="rect">
             <a:avLst/>
@@ -4949,168 +6075,17 @@
           <a:p>
             <a:r>
               <a:rPr lang="fr-FR" dirty="0"/>
-              <a:t>IN2</a:t>
-            </a:r>
-          </a:p>
-        </p:txBody>
-      </p:sp>
-      <p:cxnSp>
-        <p:nvCxnSpPr>
-          <p:cNvPr id="18" name="Connecteur : en angle 17">
-            <a:extLst>
-              <a:ext uri="{FF2B5EF4-FFF2-40B4-BE49-F238E27FC236}">
-                <a16:creationId xmlns:a16="http://schemas.microsoft.com/office/drawing/2014/main" id="{B2829B63-AAEC-7520-6C50-CD38971F7022}"/>
-              </a:ext>
-            </a:extLst>
-          </p:cNvPr>
-          <p:cNvCxnSpPr>
-            <a:cxnSpLocks/>
-          </p:cNvCxnSpPr>
-          <p:nvPr/>
-        </p:nvCxnSpPr>
-        <p:spPr>
-          <a:xfrm rot="10800000" flipV="1">
-            <a:off x="1925625" y="3189155"/>
-            <a:ext cx="7347841" cy="3503876"/>
-          </a:xfrm>
-          <a:prstGeom prst="bentConnector3">
-            <a:avLst>
-              <a:gd name="adj1" fmla="val 5739"/>
-            </a:avLst>
-          </a:prstGeom>
-          <a:ln w="28575">
-            <a:solidFill>
-              <a:srgbClr val="28AAE1"/>
-            </a:solidFill>
-          </a:ln>
-        </p:spPr>
-        <p:style>
-          <a:lnRef idx="1">
-            <a:schemeClr val="accent1"/>
-          </a:lnRef>
-          <a:fillRef idx="0">
-            <a:schemeClr val="accent1"/>
-          </a:fillRef>
-          <a:effectRef idx="0">
-            <a:schemeClr val="accent1"/>
-          </a:effectRef>
-          <a:fontRef idx="minor">
-            <a:schemeClr val="tx1"/>
-          </a:fontRef>
-        </p:style>
-      </p:cxnSp>
-      <p:sp>
-        <p:nvSpPr>
-          <p:cNvPr id="7" name="Rectangle 6">
-            <a:extLst>
-              <a:ext uri="{FF2B5EF4-FFF2-40B4-BE49-F238E27FC236}">
-                <a16:creationId xmlns:a16="http://schemas.microsoft.com/office/drawing/2014/main" id="{DD81C1D1-55E4-121B-1ECA-21E7BD754CDC}"/>
-              </a:ext>
-            </a:extLst>
-          </p:cNvPr>
-          <p:cNvSpPr/>
-          <p:nvPr/>
-        </p:nvSpPr>
-        <p:spPr>
-          <a:xfrm>
-            <a:off x="9012428" y="2545080"/>
-            <a:ext cx="1920240" cy="883920"/>
-          </a:xfrm>
-          <a:prstGeom prst="rect">
-            <a:avLst/>
-          </a:prstGeom>
-          <a:solidFill>
-            <a:srgbClr val="CCE3F6"/>
-          </a:solidFill>
-          <a:ln w="28575">
-            <a:solidFill>
-              <a:srgbClr val="28AAE1"/>
-            </a:solidFill>
-          </a:ln>
-        </p:spPr>
-        <p:style>
-          <a:lnRef idx="2">
-            <a:schemeClr val="accent1">
-              <a:shade val="15000"/>
-            </a:schemeClr>
-          </a:lnRef>
-          <a:fillRef idx="1">
-            <a:schemeClr val="accent1"/>
-          </a:fillRef>
-          <a:effectRef idx="0">
-            <a:schemeClr val="accent1"/>
-          </a:effectRef>
-          <a:fontRef idx="minor">
-            <a:schemeClr val="lt1"/>
-          </a:fontRef>
-        </p:style>
-        <p:txBody>
-          <a:bodyPr rtlCol="0" anchor="ctr"/>
-          <a:lstStyle/>
-          <a:p>
-            <a:pPr algn="ctr"/>
-            <a:r>
-              <a:rPr lang="fr-FR" b="1" dirty="0">
-                <a:solidFill>
-                  <a:srgbClr val="28AAE1"/>
-                </a:solidFill>
-              </a:rPr>
-              <a:t>Carte moteur</a:t>
-            </a:r>
-          </a:p>
-        </p:txBody>
-      </p:sp>
-      <p:cxnSp>
-        <p:nvCxnSpPr>
-          <p:cNvPr id="27" name="Connecteur : en angle 26">
-            <a:extLst>
-              <a:ext uri="{FF2B5EF4-FFF2-40B4-BE49-F238E27FC236}">
-                <a16:creationId xmlns:a16="http://schemas.microsoft.com/office/drawing/2014/main" id="{AF0A3EDE-0ED6-E6E3-8700-39B0114B6017}"/>
-              </a:ext>
-            </a:extLst>
-          </p:cNvPr>
-          <p:cNvCxnSpPr>
-            <a:cxnSpLocks/>
-          </p:cNvCxnSpPr>
-          <p:nvPr/>
-        </p:nvCxnSpPr>
-        <p:spPr>
-          <a:xfrm rot="5400000">
-            <a:off x="1762146" y="6241228"/>
-            <a:ext cx="604560" cy="299049"/>
-          </a:xfrm>
-          <a:prstGeom prst="bentConnector3">
-            <a:avLst>
-              <a:gd name="adj1" fmla="val 2945"/>
-            </a:avLst>
-          </a:prstGeom>
-          <a:ln w="28575">
-            <a:solidFill>
-              <a:srgbClr val="28AAE1"/>
-            </a:solidFill>
-          </a:ln>
-        </p:spPr>
-        <p:style>
-          <a:lnRef idx="1">
-            <a:schemeClr val="accent1"/>
-          </a:lnRef>
-          <a:fillRef idx="0">
-            <a:schemeClr val="accent1"/>
-          </a:fillRef>
-          <a:effectRef idx="0">
-            <a:schemeClr val="accent1"/>
-          </a:effectRef>
-          <a:fontRef idx="minor">
-            <a:schemeClr val="tx1"/>
-          </a:fontRef>
-        </p:style>
-      </p:cxnSp>
-      <p:sp>
-        <p:nvSpPr>
-          <p:cNvPr id="30" name="ZoneTexte 29">
-            <a:extLst>
-              <a:ext uri="{FF2B5EF4-FFF2-40B4-BE49-F238E27FC236}">
-                <a16:creationId xmlns:a16="http://schemas.microsoft.com/office/drawing/2014/main" id="{009A8EB5-E46D-8F9C-FEEB-4EC255CC48F8}"/>
+              <a:t>De Io26</a:t>
+            </a:r>
+          </a:p>
+        </p:txBody>
+      </p:sp>
+      <p:sp>
+        <p:nvSpPr>
+          <p:cNvPr id="194" name="ZoneTexte 193">
+            <a:extLst>
+              <a:ext uri="{FF2B5EF4-FFF2-40B4-BE49-F238E27FC236}">
+                <a16:creationId xmlns:a16="http://schemas.microsoft.com/office/drawing/2014/main" id="{1E1BA337-34FB-5CF0-759B-3BE8AD450842}"/>
               </a:ext>
             </a:extLst>
           </p:cNvPr>
@@ -5119,8 +6094,8 @@
         </p:nvSpPr>
         <p:spPr>
           <a:xfrm>
-            <a:off x="1155168" y="5826862"/>
-            <a:ext cx="1126248" cy="261610"/>
+            <a:off x="7806642" y="2826599"/>
+            <a:ext cx="679133" cy="261610"/>
           </a:xfrm>
           <a:prstGeom prst="rect">
             <a:avLst/>
@@ -5149,368 +6124,17 @@
           <a:p>
             <a:r>
               <a:rPr lang="fr-FR" dirty="0"/>
-              <a:t>PB4 (GPIO OUT)</a:t>
-            </a:r>
-          </a:p>
-        </p:txBody>
-      </p:sp>
-      <p:sp>
-        <p:nvSpPr>
-          <p:cNvPr id="6" name="Rectangle 5">
-            <a:extLst>
-              <a:ext uri="{FF2B5EF4-FFF2-40B4-BE49-F238E27FC236}">
-                <a16:creationId xmlns:a16="http://schemas.microsoft.com/office/drawing/2014/main" id="{FAA73638-B5E7-9ABA-78B3-E8603F753D66}"/>
-              </a:ext>
-            </a:extLst>
-          </p:cNvPr>
-          <p:cNvSpPr/>
-          <p:nvPr/>
-        </p:nvSpPr>
-        <p:spPr>
-          <a:xfrm>
-            <a:off x="9012428" y="1193800"/>
-            <a:ext cx="1920240" cy="736600"/>
-          </a:xfrm>
-          <a:prstGeom prst="rect">
-            <a:avLst/>
-          </a:prstGeom>
-          <a:solidFill>
-            <a:srgbClr val="CCE3F6"/>
-          </a:solidFill>
-          <a:ln w="28575">
-            <a:solidFill>
-              <a:srgbClr val="28AAE1"/>
-            </a:solidFill>
-          </a:ln>
-        </p:spPr>
-        <p:style>
-          <a:lnRef idx="2">
-            <a:schemeClr val="accent1">
-              <a:shade val="15000"/>
-            </a:schemeClr>
-          </a:lnRef>
-          <a:fillRef idx="1">
-            <a:schemeClr val="accent1"/>
-          </a:fillRef>
-          <a:effectRef idx="0">
-            <a:schemeClr val="accent1"/>
-          </a:effectRef>
-          <a:fontRef idx="minor">
-            <a:schemeClr val="lt1"/>
-          </a:fontRef>
-        </p:style>
-        <p:txBody>
-          <a:bodyPr rtlCol="0" anchor="ctr"/>
-          <a:lstStyle/>
-          <a:p>
-            <a:pPr algn="ctr"/>
-            <a:r>
-              <a:rPr lang="fr-FR" b="1" dirty="0">
-                <a:solidFill>
-                  <a:srgbClr val="28AAE1"/>
-                </a:solidFill>
-              </a:rPr>
-              <a:t>Alimentation 5VDC</a:t>
-            </a:r>
-          </a:p>
-        </p:txBody>
-      </p:sp>
-      <p:cxnSp>
-        <p:nvCxnSpPr>
-          <p:cNvPr id="3" name="Connecteur droit 2">
-            <a:extLst>
-              <a:ext uri="{FF2B5EF4-FFF2-40B4-BE49-F238E27FC236}">
-                <a16:creationId xmlns:a16="http://schemas.microsoft.com/office/drawing/2014/main" id="{4B865E29-8BE3-9A07-7DD8-3CE84FA7C180}"/>
-              </a:ext>
-            </a:extLst>
-          </p:cNvPr>
-          <p:cNvCxnSpPr>
-            <a:cxnSpLocks/>
-          </p:cNvCxnSpPr>
-          <p:nvPr/>
-        </p:nvCxnSpPr>
-        <p:spPr>
-          <a:xfrm>
-            <a:off x="5458776" y="3021060"/>
-            <a:ext cx="367512" cy="0"/>
-          </a:xfrm>
-          <a:prstGeom prst="line">
-            <a:avLst/>
-          </a:prstGeom>
-          <a:ln w="28575">
-            <a:solidFill>
-              <a:srgbClr val="28AAE1"/>
-            </a:solidFill>
-          </a:ln>
-        </p:spPr>
-        <p:style>
-          <a:lnRef idx="1">
-            <a:schemeClr val="accent1"/>
-          </a:lnRef>
-          <a:fillRef idx="0">
-            <a:schemeClr val="accent1"/>
-          </a:fillRef>
-          <a:effectRef idx="0">
-            <a:schemeClr val="accent1"/>
-          </a:effectRef>
-          <a:fontRef idx="minor">
-            <a:schemeClr val="tx1"/>
-          </a:fontRef>
-        </p:style>
-      </p:cxnSp>
-      <p:cxnSp>
-        <p:nvCxnSpPr>
-          <p:cNvPr id="4" name="Connecteur droit 3">
-            <a:extLst>
-              <a:ext uri="{FF2B5EF4-FFF2-40B4-BE49-F238E27FC236}">
-                <a16:creationId xmlns:a16="http://schemas.microsoft.com/office/drawing/2014/main" id="{6A74BB80-93D8-E2CF-8D29-460373A9D2FB}"/>
-              </a:ext>
-            </a:extLst>
-          </p:cNvPr>
-          <p:cNvCxnSpPr>
-            <a:cxnSpLocks/>
-          </p:cNvCxnSpPr>
-          <p:nvPr/>
-        </p:nvCxnSpPr>
-        <p:spPr>
-          <a:xfrm>
-            <a:off x="5618845" y="3396202"/>
-            <a:ext cx="183756" cy="0"/>
-          </a:xfrm>
-          <a:prstGeom prst="line">
-            <a:avLst/>
-          </a:prstGeom>
-          <a:ln w="28575">
-            <a:solidFill>
-              <a:srgbClr val="28AAE1"/>
-            </a:solidFill>
-          </a:ln>
-        </p:spPr>
-        <p:style>
-          <a:lnRef idx="1">
-            <a:schemeClr val="accent1"/>
-          </a:lnRef>
-          <a:fillRef idx="0">
-            <a:schemeClr val="accent1"/>
-          </a:fillRef>
-          <a:effectRef idx="0">
-            <a:schemeClr val="accent1"/>
-          </a:effectRef>
-          <a:fontRef idx="minor">
-            <a:schemeClr val="tx1"/>
-          </a:fontRef>
-        </p:style>
-      </p:cxnSp>
-      <p:sp>
-        <p:nvSpPr>
-          <p:cNvPr id="16" name="Rectangle 15">
-            <a:extLst>
-              <a:ext uri="{FF2B5EF4-FFF2-40B4-BE49-F238E27FC236}">
-                <a16:creationId xmlns:a16="http://schemas.microsoft.com/office/drawing/2014/main" id="{93DB1FA0-CA91-8544-2AB9-DA37F230CFC1}"/>
-              </a:ext>
-            </a:extLst>
-          </p:cNvPr>
-          <p:cNvSpPr/>
-          <p:nvPr/>
-        </p:nvSpPr>
-        <p:spPr>
-          <a:xfrm>
-            <a:off x="255147" y="3944168"/>
-            <a:ext cx="1376297" cy="956496"/>
-          </a:xfrm>
-          <a:prstGeom prst="rect">
-            <a:avLst/>
-          </a:prstGeom>
-          <a:solidFill>
-            <a:srgbClr val="CCE3F6"/>
-          </a:solidFill>
-          <a:ln w="28575">
-            <a:solidFill>
-              <a:srgbClr val="28AAE1"/>
-            </a:solidFill>
-          </a:ln>
-        </p:spPr>
-        <p:style>
-          <a:lnRef idx="2">
-            <a:schemeClr val="accent1">
-              <a:shade val="15000"/>
-            </a:schemeClr>
-          </a:lnRef>
-          <a:fillRef idx="1">
-            <a:schemeClr val="accent1"/>
-          </a:fillRef>
-          <a:effectRef idx="0">
-            <a:schemeClr val="accent1"/>
-          </a:effectRef>
-          <a:fontRef idx="minor">
-            <a:schemeClr val="lt1"/>
-          </a:fontRef>
-        </p:style>
-        <p:txBody>
-          <a:bodyPr rtlCol="0" anchor="ctr"/>
-          <a:lstStyle/>
-          <a:p>
-            <a:pPr algn="ctr"/>
-            <a:r>
-              <a:rPr lang="fr-FR" b="1" dirty="0">
-                <a:solidFill>
-                  <a:srgbClr val="28AAE1"/>
-                </a:solidFill>
-              </a:rPr>
-              <a:t>Écran LCD </a:t>
-            </a:r>
-          </a:p>
-        </p:txBody>
-      </p:sp>
-      <p:cxnSp>
-        <p:nvCxnSpPr>
-          <p:cNvPr id="17" name="Connecteur droit 16">
-            <a:extLst>
-              <a:ext uri="{FF2B5EF4-FFF2-40B4-BE49-F238E27FC236}">
-                <a16:creationId xmlns:a16="http://schemas.microsoft.com/office/drawing/2014/main" id="{97DE8854-F8BF-541D-ACB5-E83DF3F06318}"/>
-              </a:ext>
-            </a:extLst>
-          </p:cNvPr>
-          <p:cNvCxnSpPr/>
-          <p:nvPr/>
-        </p:nvCxnSpPr>
-        <p:spPr>
-          <a:xfrm>
-            <a:off x="1646380" y="4067383"/>
-            <a:ext cx="537042" cy="0"/>
-          </a:xfrm>
-          <a:prstGeom prst="line">
-            <a:avLst/>
-          </a:prstGeom>
-          <a:ln w="28575">
-            <a:solidFill>
-              <a:srgbClr val="28AAE1"/>
-            </a:solidFill>
-          </a:ln>
-        </p:spPr>
-        <p:style>
-          <a:lnRef idx="1">
-            <a:schemeClr val="accent1"/>
-          </a:lnRef>
-          <a:fillRef idx="0">
-            <a:schemeClr val="accent1"/>
-          </a:fillRef>
-          <a:effectRef idx="0">
-            <a:schemeClr val="accent1"/>
-          </a:effectRef>
-          <a:fontRef idx="minor">
-            <a:schemeClr val="tx1"/>
-          </a:fontRef>
-        </p:style>
-      </p:cxnSp>
-      <p:cxnSp>
-        <p:nvCxnSpPr>
-          <p:cNvPr id="19" name="Connecteur droit 18">
-            <a:extLst>
-              <a:ext uri="{FF2B5EF4-FFF2-40B4-BE49-F238E27FC236}">
-                <a16:creationId xmlns:a16="http://schemas.microsoft.com/office/drawing/2014/main" id="{67C214E9-44A8-FCDE-AD3C-7A8F008CAE4A}"/>
-              </a:ext>
-            </a:extLst>
-          </p:cNvPr>
-          <p:cNvCxnSpPr/>
-          <p:nvPr/>
-        </p:nvCxnSpPr>
-        <p:spPr>
-          <a:xfrm>
-            <a:off x="1685314" y="3021060"/>
-            <a:ext cx="537042" cy="0"/>
-          </a:xfrm>
-          <a:prstGeom prst="line">
-            <a:avLst/>
-          </a:prstGeom>
-          <a:ln w="28575">
-            <a:solidFill>
-              <a:srgbClr val="28AAE1"/>
-            </a:solidFill>
-          </a:ln>
-        </p:spPr>
-        <p:style>
-          <a:lnRef idx="1">
-            <a:schemeClr val="accent1"/>
-          </a:lnRef>
-          <a:fillRef idx="0">
-            <a:schemeClr val="accent1"/>
-          </a:fillRef>
-          <a:effectRef idx="0">
-            <a:schemeClr val="accent1"/>
-          </a:effectRef>
-          <a:fontRef idx="minor">
-            <a:schemeClr val="tx1"/>
-          </a:fontRef>
-        </p:style>
-      </p:cxnSp>
-      <p:sp>
-        <p:nvSpPr>
-          <p:cNvPr id="49" name="Rectangle 48">
-            <a:extLst>
-              <a:ext uri="{FF2B5EF4-FFF2-40B4-BE49-F238E27FC236}">
-                <a16:creationId xmlns:a16="http://schemas.microsoft.com/office/drawing/2014/main" id="{4EFB177D-477F-52CC-3E6A-439205F74410}"/>
-              </a:ext>
-            </a:extLst>
-          </p:cNvPr>
-          <p:cNvSpPr/>
-          <p:nvPr/>
-        </p:nvSpPr>
-        <p:spPr>
-          <a:xfrm>
-            <a:off x="318661" y="1146051"/>
-            <a:ext cx="1366653" cy="742332"/>
-          </a:xfrm>
-          <a:prstGeom prst="rect">
-            <a:avLst/>
-          </a:prstGeom>
-          <a:solidFill>
-            <a:srgbClr val="CCE3F6"/>
-          </a:solidFill>
-          <a:ln w="28575">
-            <a:solidFill>
-              <a:srgbClr val="28AAE1"/>
-            </a:solidFill>
-          </a:ln>
-        </p:spPr>
-        <p:style>
-          <a:lnRef idx="2">
-            <a:schemeClr val="accent1">
-              <a:shade val="15000"/>
-            </a:schemeClr>
-          </a:lnRef>
-          <a:fillRef idx="1">
-            <a:schemeClr val="accent1"/>
-          </a:fillRef>
-          <a:effectRef idx="0">
-            <a:schemeClr val="accent1"/>
-          </a:effectRef>
-          <a:fontRef idx="minor">
-            <a:schemeClr val="lt1"/>
-          </a:fontRef>
-        </p:style>
-        <p:txBody>
-          <a:bodyPr rtlCol="0" anchor="ctr"/>
-          <a:lstStyle/>
-          <a:p>
-            <a:pPr algn="ctr"/>
-            <a:r>
-              <a:rPr lang="fr-FR" b="1" dirty="0">
-                <a:solidFill>
-                  <a:srgbClr val="28AAE1"/>
-                </a:solidFill>
-              </a:rPr>
-              <a:t>Écran LCD</a:t>
-            </a:r>
-          </a:p>
-        </p:txBody>
-      </p:sp>
-      <p:sp>
-        <p:nvSpPr>
-          <p:cNvPr id="20" name="ZoneTexte 19">
-            <a:extLst>
-              <a:ext uri="{FF2B5EF4-FFF2-40B4-BE49-F238E27FC236}">
-                <a16:creationId xmlns:a16="http://schemas.microsoft.com/office/drawing/2014/main" id="{AAA3EE98-251D-B4EC-0F5E-18398B75934D}"/>
+              <a:t>De Io25</a:t>
+            </a:r>
+          </a:p>
+        </p:txBody>
+      </p:sp>
+      <p:sp>
+        <p:nvSpPr>
+          <p:cNvPr id="206" name="ZoneTexte 205">
+            <a:extLst>
+              <a:ext uri="{FF2B5EF4-FFF2-40B4-BE49-F238E27FC236}">
+                <a16:creationId xmlns:a16="http://schemas.microsoft.com/office/drawing/2014/main" id="{AE3C80C4-936E-8840-F07E-E1B827DF1426}"/>
               </a:ext>
             </a:extLst>
           </p:cNvPr>
@@ -5519,8 +6143,8 @@
         </p:nvSpPr>
         <p:spPr>
           <a:xfrm>
-            <a:off x="290585" y="3236818"/>
-            <a:ext cx="1563262" cy="261610"/>
+            <a:off x="8385357" y="2721973"/>
+            <a:ext cx="390952" cy="261610"/>
           </a:xfrm>
           <a:prstGeom prst="rect">
             <a:avLst/>
@@ -5549,17 +6173,17 @@
           <a:p>
             <a:r>
               <a:rPr lang="fr-FR" dirty="0"/>
-              <a:t>PB1 (GPIO OUT)</a:t>
-            </a:r>
-          </a:p>
-        </p:txBody>
-      </p:sp>
-      <p:sp>
-        <p:nvSpPr>
-          <p:cNvPr id="23" name="ZoneTexte 22">
-            <a:extLst>
-              <a:ext uri="{FF2B5EF4-FFF2-40B4-BE49-F238E27FC236}">
-                <a16:creationId xmlns:a16="http://schemas.microsoft.com/office/drawing/2014/main" id="{1F5D395C-610A-5CFF-4611-C1F358A844C9}"/>
+              <a:t>IN2</a:t>
+            </a:r>
+          </a:p>
+        </p:txBody>
+      </p:sp>
+      <p:sp>
+        <p:nvSpPr>
+          <p:cNvPr id="207" name="ZoneTexte 206">
+            <a:extLst>
+              <a:ext uri="{FF2B5EF4-FFF2-40B4-BE49-F238E27FC236}">
+                <a16:creationId xmlns:a16="http://schemas.microsoft.com/office/drawing/2014/main" id="{F474E2F6-B735-9461-6B55-2A9D1B42D2C8}"/>
               </a:ext>
             </a:extLst>
           </p:cNvPr>
@@ -5568,8 +6192,8 @@
         </p:nvSpPr>
         <p:spPr>
           <a:xfrm>
-            <a:off x="189063" y="4926921"/>
-            <a:ext cx="1563262" cy="430887"/>
+            <a:off x="8358263" y="2364449"/>
+            <a:ext cx="390952" cy="261610"/>
           </a:xfrm>
           <a:prstGeom prst="rect">
             <a:avLst/>
@@ -5598,110 +6222,17 @@
           <a:p>
             <a:r>
               <a:rPr lang="fr-FR" dirty="0"/>
-              <a:t>PB0, PB2 et PB8 </a:t>
-            </a:r>
-          </a:p>
-          <a:p>
-            <a:r>
-              <a:rPr lang="fr-FR" dirty="0"/>
-              <a:t>(GPIO OUT)</a:t>
-            </a:r>
-          </a:p>
-        </p:txBody>
-      </p:sp>
-      <p:cxnSp>
-        <p:nvCxnSpPr>
-          <p:cNvPr id="31" name="Connecteur droit 30">
-            <a:extLst>
-              <a:ext uri="{FF2B5EF4-FFF2-40B4-BE49-F238E27FC236}">
-                <a16:creationId xmlns:a16="http://schemas.microsoft.com/office/drawing/2014/main" id="{BF470509-C286-8D0C-7645-2E2F13E24A7D}"/>
-              </a:ext>
-            </a:extLst>
-          </p:cNvPr>
-          <p:cNvCxnSpPr>
-            <a:cxnSpLocks/>
-          </p:cNvCxnSpPr>
-          <p:nvPr/>
-        </p:nvCxnSpPr>
-        <p:spPr>
-          <a:xfrm flipH="1">
-            <a:off x="1646380" y="5357808"/>
-            <a:ext cx="522106" cy="0"/>
-          </a:xfrm>
-          <a:prstGeom prst="line">
-            <a:avLst/>
-          </a:prstGeom>
-          <a:ln w="28575">
-            <a:solidFill>
-              <a:schemeClr val="accent2"/>
-            </a:solidFill>
-            <a:tailEnd type="triangle"/>
-          </a:ln>
-        </p:spPr>
-        <p:style>
-          <a:lnRef idx="3">
-            <a:schemeClr val="accent1"/>
-          </a:lnRef>
-          <a:fillRef idx="0">
-            <a:schemeClr val="accent1"/>
-          </a:fillRef>
-          <a:effectRef idx="2">
-            <a:schemeClr val="accent1"/>
-          </a:effectRef>
-          <a:fontRef idx="minor">
-            <a:schemeClr val="tx1"/>
-          </a:fontRef>
-        </p:style>
-      </p:cxnSp>
-      <p:cxnSp>
-        <p:nvCxnSpPr>
-          <p:cNvPr id="32" name="Connecteur droit 31">
-            <a:extLst>
-              <a:ext uri="{FF2B5EF4-FFF2-40B4-BE49-F238E27FC236}">
-                <a16:creationId xmlns:a16="http://schemas.microsoft.com/office/drawing/2014/main" id="{A1027CE4-76F0-0474-4284-591EA50425CB}"/>
-              </a:ext>
-            </a:extLst>
-          </p:cNvPr>
-          <p:cNvCxnSpPr/>
-          <p:nvPr/>
-        </p:nvCxnSpPr>
-        <p:spPr>
-          <a:xfrm flipH="1">
-            <a:off x="1646380" y="5703248"/>
-            <a:ext cx="537042" cy="0"/>
-          </a:xfrm>
-          <a:prstGeom prst="line">
-            <a:avLst/>
-          </a:prstGeom>
-          <a:ln w="28575">
-            <a:solidFill>
-              <a:schemeClr val="accent2"/>
-            </a:solidFill>
-            <a:headEnd type="none"/>
-            <a:tailEnd type="triangle"/>
-          </a:ln>
-        </p:spPr>
-        <p:style>
-          <a:lnRef idx="3">
-            <a:schemeClr val="accent1"/>
-          </a:lnRef>
-          <a:fillRef idx="0">
-            <a:schemeClr val="accent1"/>
-          </a:fillRef>
-          <a:effectRef idx="2">
-            <a:schemeClr val="accent1"/>
-          </a:effectRef>
-          <a:fontRef idx="minor">
-            <a:schemeClr val="tx1"/>
-          </a:fontRef>
-        </p:style>
-      </p:cxnSp>
-      <p:sp>
-        <p:nvSpPr>
-          <p:cNvPr id="33" name="ZoneTexte 32">
-            <a:extLst>
-              <a:ext uri="{FF2B5EF4-FFF2-40B4-BE49-F238E27FC236}">
-                <a16:creationId xmlns:a16="http://schemas.microsoft.com/office/drawing/2014/main" id="{36C55E4E-6C12-5953-8E2A-B0B70F329F27}"/>
+              <a:t>IN1</a:t>
+            </a:r>
+          </a:p>
+        </p:txBody>
+      </p:sp>
+      <p:sp>
+        <p:nvSpPr>
+          <p:cNvPr id="208" name="ZoneTexte 207">
+            <a:extLst>
+              <a:ext uri="{FF2B5EF4-FFF2-40B4-BE49-F238E27FC236}">
+                <a16:creationId xmlns:a16="http://schemas.microsoft.com/office/drawing/2014/main" id="{604E4F3A-6F84-9D53-5A7A-07C757274B25}"/>
               </a:ext>
             </a:extLst>
           </p:cNvPr>
@@ -5710,8 +6241,8 @@
         </p:nvSpPr>
         <p:spPr>
           <a:xfrm>
-            <a:off x="341463" y="5079321"/>
-            <a:ext cx="1563262" cy="261610"/>
+            <a:off x="10719787" y="2317383"/>
+            <a:ext cx="390952" cy="261610"/>
           </a:xfrm>
           <a:prstGeom prst="rect">
             <a:avLst/>
@@ -5740,17 +6271,305 @@
           <a:p>
             <a:r>
               <a:rPr lang="fr-FR" dirty="0"/>
-              <a:t>Vers IN3</a:t>
-            </a:r>
-          </a:p>
-        </p:txBody>
-      </p:sp>
-      <p:sp>
-        <p:nvSpPr>
-          <p:cNvPr id="35" name="ZoneTexte 34">
-            <a:extLst>
-              <a:ext uri="{FF2B5EF4-FFF2-40B4-BE49-F238E27FC236}">
-                <a16:creationId xmlns:a16="http://schemas.microsoft.com/office/drawing/2014/main" id="{5CFD047B-419B-C27E-392C-0091B5B81A23}"/>
+              <a:t>IN3</a:t>
+            </a:r>
+          </a:p>
+        </p:txBody>
+      </p:sp>
+      <p:cxnSp>
+        <p:nvCxnSpPr>
+          <p:cNvPr id="210" name="Connecteur droit 209">
+            <a:extLst>
+              <a:ext uri="{FF2B5EF4-FFF2-40B4-BE49-F238E27FC236}">
+                <a16:creationId xmlns:a16="http://schemas.microsoft.com/office/drawing/2014/main" id="{616F7152-846D-17AD-A201-2CE95754DADC}"/>
+              </a:ext>
+            </a:extLst>
+          </p:cNvPr>
+          <p:cNvCxnSpPr>
+            <a:cxnSpLocks/>
+          </p:cNvCxnSpPr>
+          <p:nvPr/>
+        </p:nvCxnSpPr>
+        <p:spPr>
+          <a:xfrm>
+            <a:off x="5692700" y="1628888"/>
+            <a:ext cx="888755" cy="0"/>
+          </a:xfrm>
+          <a:prstGeom prst="line">
+            <a:avLst/>
+          </a:prstGeom>
+          <a:ln w="28575">
+            <a:solidFill>
+              <a:schemeClr val="accent2"/>
+            </a:solidFill>
+            <a:tailEnd type="triangle"/>
+          </a:ln>
+        </p:spPr>
+        <p:style>
+          <a:lnRef idx="3">
+            <a:schemeClr val="accent1"/>
+          </a:lnRef>
+          <a:fillRef idx="0">
+            <a:schemeClr val="accent1"/>
+          </a:fillRef>
+          <a:effectRef idx="2">
+            <a:schemeClr val="accent1"/>
+          </a:effectRef>
+          <a:fontRef idx="minor">
+            <a:schemeClr val="tx1"/>
+          </a:fontRef>
+        </p:style>
+      </p:cxnSp>
+      <p:cxnSp>
+        <p:nvCxnSpPr>
+          <p:cNvPr id="211" name="Connecteur droit 210">
+            <a:extLst>
+              <a:ext uri="{FF2B5EF4-FFF2-40B4-BE49-F238E27FC236}">
+                <a16:creationId xmlns:a16="http://schemas.microsoft.com/office/drawing/2014/main" id="{72AA17BA-62D2-5568-11B2-FB652B987461}"/>
+              </a:ext>
+            </a:extLst>
+          </p:cNvPr>
+          <p:cNvCxnSpPr>
+            <a:cxnSpLocks/>
+          </p:cNvCxnSpPr>
+          <p:nvPr/>
+        </p:nvCxnSpPr>
+        <p:spPr>
+          <a:xfrm>
+            <a:off x="5828035" y="1817759"/>
+            <a:ext cx="753420" cy="1431"/>
+          </a:xfrm>
+          <a:prstGeom prst="line">
+            <a:avLst/>
+          </a:prstGeom>
+          <a:ln w="28575">
+            <a:solidFill>
+              <a:schemeClr val="accent2"/>
+            </a:solidFill>
+            <a:tailEnd type="triangle"/>
+          </a:ln>
+        </p:spPr>
+        <p:style>
+          <a:lnRef idx="3">
+            <a:schemeClr val="accent1"/>
+          </a:lnRef>
+          <a:fillRef idx="0">
+            <a:schemeClr val="accent1"/>
+          </a:fillRef>
+          <a:effectRef idx="2">
+            <a:schemeClr val="accent1"/>
+          </a:effectRef>
+          <a:fontRef idx="minor">
+            <a:schemeClr val="tx1"/>
+          </a:fontRef>
+        </p:style>
+      </p:cxnSp>
+      <p:cxnSp>
+        <p:nvCxnSpPr>
+          <p:cNvPr id="212" name="Connecteur droit 211">
+            <a:extLst>
+              <a:ext uri="{FF2B5EF4-FFF2-40B4-BE49-F238E27FC236}">
+                <a16:creationId xmlns:a16="http://schemas.microsoft.com/office/drawing/2014/main" id="{953F6CA1-3322-B66E-4BD9-3552E7A1726D}"/>
+              </a:ext>
+            </a:extLst>
+          </p:cNvPr>
+          <p:cNvCxnSpPr>
+            <a:cxnSpLocks/>
+          </p:cNvCxnSpPr>
+          <p:nvPr/>
+        </p:nvCxnSpPr>
+        <p:spPr>
+          <a:xfrm>
+            <a:off x="5951220" y="1961618"/>
+            <a:ext cx="645475" cy="0"/>
+          </a:xfrm>
+          <a:prstGeom prst="line">
+            <a:avLst/>
+          </a:prstGeom>
+          <a:ln w="28575">
+            <a:solidFill>
+              <a:schemeClr val="accent2"/>
+            </a:solidFill>
+            <a:tailEnd type="triangle"/>
+          </a:ln>
+        </p:spPr>
+        <p:style>
+          <a:lnRef idx="3">
+            <a:schemeClr val="accent1"/>
+          </a:lnRef>
+          <a:fillRef idx="0">
+            <a:schemeClr val="accent1"/>
+          </a:fillRef>
+          <a:effectRef idx="2">
+            <a:schemeClr val="accent1"/>
+          </a:effectRef>
+          <a:fontRef idx="minor">
+            <a:schemeClr val="tx1"/>
+          </a:fontRef>
+        </p:style>
+      </p:cxnSp>
+      <p:cxnSp>
+        <p:nvCxnSpPr>
+          <p:cNvPr id="218" name="Connecteur droit 217">
+            <a:extLst>
+              <a:ext uri="{FF2B5EF4-FFF2-40B4-BE49-F238E27FC236}">
+                <a16:creationId xmlns:a16="http://schemas.microsoft.com/office/drawing/2014/main" id="{EB75D3F2-1136-2264-15EC-CEFC4AD35876}"/>
+              </a:ext>
+            </a:extLst>
+          </p:cNvPr>
+          <p:cNvCxnSpPr>
+            <a:cxnSpLocks/>
+          </p:cNvCxnSpPr>
+          <p:nvPr/>
+        </p:nvCxnSpPr>
+        <p:spPr>
+          <a:xfrm>
+            <a:off x="5563161" y="1463235"/>
+            <a:ext cx="7059" cy="691370"/>
+          </a:xfrm>
+          <a:prstGeom prst="line">
+            <a:avLst/>
+          </a:prstGeom>
+          <a:ln w="28575"/>
+        </p:spPr>
+        <p:style>
+          <a:lnRef idx="1">
+            <a:schemeClr val="accent2"/>
+          </a:lnRef>
+          <a:fillRef idx="0">
+            <a:schemeClr val="accent2"/>
+          </a:fillRef>
+          <a:effectRef idx="0">
+            <a:schemeClr val="accent2"/>
+          </a:effectRef>
+          <a:fontRef idx="minor">
+            <a:schemeClr val="tx1"/>
+          </a:fontRef>
+        </p:style>
+      </p:cxnSp>
+      <p:cxnSp>
+        <p:nvCxnSpPr>
+          <p:cNvPr id="222" name="Connecteur droit 221">
+            <a:extLst>
+              <a:ext uri="{FF2B5EF4-FFF2-40B4-BE49-F238E27FC236}">
+                <a16:creationId xmlns:a16="http://schemas.microsoft.com/office/drawing/2014/main" id="{C9E4A6D7-A8E0-B891-BE06-347BE362FCF2}"/>
+              </a:ext>
+            </a:extLst>
+          </p:cNvPr>
+          <p:cNvCxnSpPr>
+            <a:cxnSpLocks/>
+          </p:cNvCxnSpPr>
+          <p:nvPr/>
+        </p:nvCxnSpPr>
+        <p:spPr>
+          <a:xfrm>
+            <a:off x="5692700" y="1615933"/>
+            <a:ext cx="0" cy="538672"/>
+          </a:xfrm>
+          <a:prstGeom prst="line">
+            <a:avLst/>
+          </a:prstGeom>
+          <a:ln w="28575"/>
+        </p:spPr>
+        <p:style>
+          <a:lnRef idx="1">
+            <a:schemeClr val="accent2"/>
+          </a:lnRef>
+          <a:fillRef idx="0">
+            <a:schemeClr val="accent2"/>
+          </a:fillRef>
+          <a:effectRef idx="0">
+            <a:schemeClr val="accent2"/>
+          </a:effectRef>
+          <a:fontRef idx="minor">
+            <a:schemeClr val="tx1"/>
+          </a:fontRef>
+        </p:style>
+      </p:cxnSp>
+      <p:cxnSp>
+        <p:nvCxnSpPr>
+          <p:cNvPr id="225" name="Connecteur droit 224">
+            <a:extLst>
+              <a:ext uri="{FF2B5EF4-FFF2-40B4-BE49-F238E27FC236}">
+                <a16:creationId xmlns:a16="http://schemas.microsoft.com/office/drawing/2014/main" id="{03E969DF-B754-3F4F-D3DF-885EDAC13404}"/>
+              </a:ext>
+            </a:extLst>
+          </p:cNvPr>
+          <p:cNvCxnSpPr>
+            <a:cxnSpLocks/>
+          </p:cNvCxnSpPr>
+          <p:nvPr/>
+        </p:nvCxnSpPr>
+        <p:spPr>
+          <a:xfrm>
+            <a:off x="5829300" y="1817759"/>
+            <a:ext cx="0" cy="336846"/>
+          </a:xfrm>
+          <a:prstGeom prst="line">
+            <a:avLst/>
+          </a:prstGeom>
+          <a:ln w="28575"/>
+        </p:spPr>
+        <p:style>
+          <a:lnRef idx="1">
+            <a:schemeClr val="accent2"/>
+          </a:lnRef>
+          <a:fillRef idx="0">
+            <a:schemeClr val="accent2"/>
+          </a:fillRef>
+          <a:effectRef idx="0">
+            <a:schemeClr val="accent2"/>
+          </a:effectRef>
+          <a:fontRef idx="minor">
+            <a:schemeClr val="tx1"/>
+          </a:fontRef>
+        </p:style>
+      </p:cxnSp>
+      <p:cxnSp>
+        <p:nvCxnSpPr>
+          <p:cNvPr id="232" name="Connecteur droit 231">
+            <a:extLst>
+              <a:ext uri="{FF2B5EF4-FFF2-40B4-BE49-F238E27FC236}">
+                <a16:creationId xmlns:a16="http://schemas.microsoft.com/office/drawing/2014/main" id="{5744F634-D380-873F-0AD2-40D75EA2213E}"/>
+              </a:ext>
+            </a:extLst>
+          </p:cNvPr>
+          <p:cNvCxnSpPr>
+            <a:cxnSpLocks/>
+          </p:cNvCxnSpPr>
+          <p:nvPr/>
+        </p:nvCxnSpPr>
+        <p:spPr>
+          <a:xfrm>
+            <a:off x="5951220" y="1961618"/>
+            <a:ext cx="0" cy="223417"/>
+          </a:xfrm>
+          <a:prstGeom prst="line">
+            <a:avLst/>
+          </a:prstGeom>
+          <a:ln w="28575"/>
+        </p:spPr>
+        <p:style>
+          <a:lnRef idx="1">
+            <a:schemeClr val="accent2"/>
+          </a:lnRef>
+          <a:fillRef idx="0">
+            <a:schemeClr val="accent2"/>
+          </a:fillRef>
+          <a:effectRef idx="0">
+            <a:schemeClr val="accent2"/>
+          </a:effectRef>
+          <a:fontRef idx="minor">
+            <a:schemeClr val="tx1"/>
+          </a:fontRef>
+        </p:style>
+      </p:cxnSp>
+      <p:sp>
+        <p:nvSpPr>
+          <p:cNvPr id="235" name="ZoneTexte 234">
+            <a:extLst>
+              <a:ext uri="{FF2B5EF4-FFF2-40B4-BE49-F238E27FC236}">
+                <a16:creationId xmlns:a16="http://schemas.microsoft.com/office/drawing/2014/main" id="{6614E616-EF01-1CCA-08F2-88625DA114C0}"/>
               </a:ext>
             </a:extLst>
           </p:cNvPr>
@@ -5759,8 +6578,8 @@
         </p:nvSpPr>
         <p:spPr>
           <a:xfrm>
-            <a:off x="952311" y="5238912"/>
-            <a:ext cx="679133" cy="261610"/>
+            <a:off x="9442834" y="2382666"/>
+            <a:ext cx="844116" cy="261610"/>
           </a:xfrm>
           <a:prstGeom prst="rect">
             <a:avLst/>
@@ -5789,17 +6608,17 @@
           <a:p>
             <a:r>
               <a:rPr lang="fr-FR" dirty="0"/>
-              <a:t>Vers IN3</a:t>
-            </a:r>
-          </a:p>
-        </p:txBody>
-      </p:sp>
-      <p:sp>
-        <p:nvSpPr>
-          <p:cNvPr id="37" name="ZoneTexte 36">
-            <a:extLst>
-              <a:ext uri="{FF2B5EF4-FFF2-40B4-BE49-F238E27FC236}">
-                <a16:creationId xmlns:a16="http://schemas.microsoft.com/office/drawing/2014/main" id="{C5261711-7572-08B3-8B54-637F4F8B80CD}"/>
+              <a:t>VCC GND</a:t>
+            </a:r>
+          </a:p>
+        </p:txBody>
+      </p:sp>
+      <p:sp>
+        <p:nvSpPr>
+          <p:cNvPr id="236" name="ZoneTexte 235">
+            <a:extLst>
+              <a:ext uri="{FF2B5EF4-FFF2-40B4-BE49-F238E27FC236}">
+                <a16:creationId xmlns:a16="http://schemas.microsoft.com/office/drawing/2014/main" id="{CE37DC8B-B531-6CE2-C223-E58A6CEA516A}"/>
               </a:ext>
             </a:extLst>
           </p:cNvPr>
@@ -5808,8 +6627,8 @@
         </p:nvSpPr>
         <p:spPr>
           <a:xfrm>
-            <a:off x="936661" y="5558568"/>
-            <a:ext cx="694783" cy="261610"/>
+            <a:off x="9294258" y="3069925"/>
+            <a:ext cx="989256" cy="261610"/>
           </a:xfrm>
           <a:prstGeom prst="rect">
             <a:avLst/>
@@ -5838,17 +6657,17 @@
           <a:p>
             <a:r>
               <a:rPr lang="fr-FR" dirty="0"/>
-              <a:t>Vers IN4</a:t>
-            </a:r>
-          </a:p>
-        </p:txBody>
-      </p:sp>
-      <p:sp>
-        <p:nvSpPr>
-          <p:cNvPr id="38" name="ZoneTexte 37">
-            <a:extLst>
-              <a:ext uri="{FF2B5EF4-FFF2-40B4-BE49-F238E27FC236}">
-                <a16:creationId xmlns:a16="http://schemas.microsoft.com/office/drawing/2014/main" id="{FEA2F9C0-BE87-E7FF-B337-A9903AF79A26}"/>
+              <a:t>OUT3 OUT4</a:t>
+            </a:r>
+          </a:p>
+        </p:txBody>
+      </p:sp>
+      <p:sp>
+        <p:nvSpPr>
+          <p:cNvPr id="237" name="ZoneTexte 236">
+            <a:extLst>
+              <a:ext uri="{FF2B5EF4-FFF2-40B4-BE49-F238E27FC236}">
+                <a16:creationId xmlns:a16="http://schemas.microsoft.com/office/drawing/2014/main" id="{A66203BC-B78B-020F-34EB-4D361A2BB687}"/>
               </a:ext>
             </a:extLst>
           </p:cNvPr>
@@ -5857,8 +6676,8 @@
         </p:nvSpPr>
         <p:spPr>
           <a:xfrm>
-            <a:off x="10891325" y="2404696"/>
-            <a:ext cx="390952" cy="261610"/>
+            <a:off x="10268343" y="3070824"/>
+            <a:ext cx="509074" cy="261610"/>
           </a:xfrm>
           <a:prstGeom prst="rect">
             <a:avLst/>
@@ -5887,101 +6706,17 @@
           <a:p>
             <a:r>
               <a:rPr lang="fr-FR" dirty="0"/>
-              <a:t>IN3</a:t>
-            </a:r>
-          </a:p>
-        </p:txBody>
-      </p:sp>
-      <p:cxnSp>
-        <p:nvCxnSpPr>
-          <p:cNvPr id="39" name="Connecteur droit 38">
-            <a:extLst>
-              <a:ext uri="{FF2B5EF4-FFF2-40B4-BE49-F238E27FC236}">
-                <a16:creationId xmlns:a16="http://schemas.microsoft.com/office/drawing/2014/main" id="{F6AA2759-F91E-FCFB-1EFA-3F3348F2D54A}"/>
-              </a:ext>
-            </a:extLst>
-          </p:cNvPr>
-          <p:cNvCxnSpPr/>
-          <p:nvPr/>
-        </p:nvCxnSpPr>
-        <p:spPr>
-          <a:xfrm flipH="1">
-            <a:off x="10932668" y="2685745"/>
-            <a:ext cx="537042" cy="0"/>
-          </a:xfrm>
-          <a:prstGeom prst="line">
-            <a:avLst/>
-          </a:prstGeom>
-          <a:ln w="28575">
-            <a:solidFill>
-              <a:schemeClr val="accent2"/>
-            </a:solidFill>
-            <a:tailEnd type="triangle"/>
-          </a:ln>
-        </p:spPr>
-        <p:style>
-          <a:lnRef idx="3">
-            <a:schemeClr val="accent1"/>
-          </a:lnRef>
-          <a:fillRef idx="0">
-            <a:schemeClr val="accent1"/>
-          </a:fillRef>
-          <a:effectRef idx="2">
-            <a:schemeClr val="accent1"/>
-          </a:effectRef>
-          <a:fontRef idx="minor">
-            <a:schemeClr val="tx1"/>
-          </a:fontRef>
-        </p:style>
-      </p:cxnSp>
-      <p:cxnSp>
-        <p:nvCxnSpPr>
-          <p:cNvPr id="40" name="Connecteur droit 39">
-            <a:extLst>
-              <a:ext uri="{FF2B5EF4-FFF2-40B4-BE49-F238E27FC236}">
-                <a16:creationId xmlns:a16="http://schemas.microsoft.com/office/drawing/2014/main" id="{4E6144FE-C452-5707-573B-3C2018F62C2D}"/>
-              </a:ext>
-            </a:extLst>
-          </p:cNvPr>
-          <p:cNvCxnSpPr/>
-          <p:nvPr/>
-        </p:nvCxnSpPr>
-        <p:spPr>
-          <a:xfrm flipH="1">
-            <a:off x="10932668" y="2890901"/>
-            <a:ext cx="537042" cy="0"/>
-          </a:xfrm>
-          <a:prstGeom prst="line">
-            <a:avLst/>
-          </a:prstGeom>
-          <a:ln w="28575">
-            <a:solidFill>
-              <a:schemeClr val="accent2"/>
-            </a:solidFill>
-            <a:tailEnd type="triangle"/>
-          </a:ln>
-        </p:spPr>
-        <p:style>
-          <a:lnRef idx="3">
-            <a:schemeClr val="accent1"/>
-          </a:lnRef>
-          <a:fillRef idx="0">
-            <a:schemeClr val="accent1"/>
-          </a:fillRef>
-          <a:effectRef idx="2">
-            <a:schemeClr val="accent1"/>
-          </a:effectRef>
-          <a:fontRef idx="minor">
-            <a:schemeClr val="tx1"/>
-          </a:fontRef>
-        </p:style>
-      </p:cxnSp>
-      <p:sp>
-        <p:nvSpPr>
-          <p:cNvPr id="41" name="ZoneTexte 40">
-            <a:extLst>
-              <a:ext uri="{FF2B5EF4-FFF2-40B4-BE49-F238E27FC236}">
-                <a16:creationId xmlns:a16="http://schemas.microsoft.com/office/drawing/2014/main" id="{E559D9A4-FFF5-403B-FC90-E22129267DD5}"/>
+              <a:t>OUT1</a:t>
+            </a:r>
+          </a:p>
+        </p:txBody>
+      </p:sp>
+      <p:sp>
+        <p:nvSpPr>
+          <p:cNvPr id="238" name="ZoneTexte 237">
+            <a:extLst>
+              <a:ext uri="{FF2B5EF4-FFF2-40B4-BE49-F238E27FC236}">
+                <a16:creationId xmlns:a16="http://schemas.microsoft.com/office/drawing/2014/main" id="{67DFB74B-7B5F-7A03-6F7C-01BB1AD94F03}"/>
               </a:ext>
             </a:extLst>
           </p:cNvPr>
@@ -5990,8 +6725,8 @@
         </p:nvSpPr>
         <p:spPr>
           <a:xfrm>
-            <a:off x="10950203" y="2674139"/>
-            <a:ext cx="390952" cy="261610"/>
+            <a:off x="10268343" y="2931435"/>
+            <a:ext cx="558615" cy="261610"/>
           </a:xfrm>
           <a:prstGeom prst="rect">
             <a:avLst/>
@@ -6020,105 +6755,7 @@
           <a:p>
             <a:r>
               <a:rPr lang="fr-FR" dirty="0"/>
-              <a:t>IN4</a:t>
-            </a:r>
-          </a:p>
-        </p:txBody>
-      </p:sp>
-      <p:sp>
-        <p:nvSpPr>
-          <p:cNvPr id="42" name="ZoneTexte 41">
-            <a:extLst>
-              <a:ext uri="{FF2B5EF4-FFF2-40B4-BE49-F238E27FC236}">
-                <a16:creationId xmlns:a16="http://schemas.microsoft.com/office/drawing/2014/main" id="{7813F324-E34D-0A1A-1064-A44A61DAB51A}"/>
-              </a:ext>
-            </a:extLst>
-          </p:cNvPr>
-          <p:cNvSpPr txBox="1"/>
-          <p:nvPr/>
-        </p:nvSpPr>
-        <p:spPr>
-          <a:xfrm>
-            <a:off x="11397138" y="2572518"/>
-            <a:ext cx="679133" cy="261610"/>
-          </a:xfrm>
-          <a:prstGeom prst="rect">
-            <a:avLst/>
-          </a:prstGeom>
-          <a:noFill/>
-        </p:spPr>
-        <p:txBody>
-          <a:bodyPr wrap="square">
-            <a:spAutoFit/>
-          </a:bodyPr>
-          <a:lstStyle>
-            <a:defPPr>
-              <a:defRPr lang="fr-FR"/>
-            </a:defPPr>
-            <a:lvl1pPr>
-              <a:defRPr sz="1100">
-                <a:solidFill>
-                  <a:schemeClr val="tx1">
-                    <a:lumMod val="50000"/>
-                    <a:lumOff val="50000"/>
-                  </a:schemeClr>
-                </a:solidFill>
-              </a:defRPr>
-            </a:lvl1pPr>
-          </a:lstStyle>
-          <a:p>
-            <a:r>
-              <a:rPr lang="fr-FR" dirty="0"/>
-              <a:t>De PB9</a:t>
-            </a:r>
-          </a:p>
-        </p:txBody>
-      </p:sp>
-      <p:sp>
-        <p:nvSpPr>
-          <p:cNvPr id="53" name="ZoneTexte 52">
-            <a:extLst>
-              <a:ext uri="{FF2B5EF4-FFF2-40B4-BE49-F238E27FC236}">
-                <a16:creationId xmlns:a16="http://schemas.microsoft.com/office/drawing/2014/main" id="{242DC180-DD47-0F6C-F422-E38717AF5B84}"/>
-              </a:ext>
-            </a:extLst>
-          </p:cNvPr>
-          <p:cNvSpPr txBox="1"/>
-          <p:nvPr/>
-        </p:nvSpPr>
-        <p:spPr>
-          <a:xfrm>
-            <a:off x="11453121" y="2777514"/>
-            <a:ext cx="679133" cy="261610"/>
-          </a:xfrm>
-          <a:prstGeom prst="rect">
-            <a:avLst/>
-          </a:prstGeom>
-          <a:noFill/>
-        </p:spPr>
-        <p:txBody>
-          <a:bodyPr wrap="square">
-            <a:spAutoFit/>
-          </a:bodyPr>
-          <a:lstStyle>
-            <a:defPPr>
-              <a:defRPr lang="fr-FR"/>
-            </a:defPPr>
-            <a:lvl1pPr>
-              <a:defRPr sz="1100">
-                <a:solidFill>
-                  <a:schemeClr val="tx1">
-                    <a:lumMod val="50000"/>
-                    <a:lumOff val="50000"/>
-                  </a:schemeClr>
-                </a:solidFill>
-              </a:defRPr>
-            </a:lvl1pPr>
-          </a:lstStyle>
-          <a:p>
-            <a:r>
-              <a:rPr lang="fr-FR" dirty="0"/>
-              <a:t>De PB5</a:t>
+              <a:t>OUT2</a:t>
             </a:r>
           </a:p>
         </p:txBody>
@@ -6232,37 +6869,6 @@
           </a:p>
         </p:txBody>
       </p:sp>
-      <p:pic>
-        <p:nvPicPr>
-          <p:cNvPr id="8" name="Image 7">
-            <a:extLst>
-              <a:ext uri="{FF2B5EF4-FFF2-40B4-BE49-F238E27FC236}">
-                <a16:creationId xmlns:a16="http://schemas.microsoft.com/office/drawing/2014/main" id="{B82ECF7A-4C01-A751-F810-EC80AE4D3840}"/>
-              </a:ext>
-            </a:extLst>
-          </p:cNvPr>
-          <p:cNvPicPr>
-            <a:picLocks noChangeAspect="1"/>
-          </p:cNvPicPr>
-          <p:nvPr/>
-        </p:nvPicPr>
-        <p:blipFill>
-          <a:blip r:embed="rId3"/>
-          <a:srcRect t="6303" b="9132"/>
-          <a:stretch>
-            <a:fillRect/>
-          </a:stretch>
-        </p:blipFill>
-        <p:spPr>
-          <a:xfrm>
-            <a:off x="146377" y="731520"/>
-            <a:ext cx="3203598" cy="4327426"/>
-          </a:xfrm>
-          <a:prstGeom prst="rect">
-            <a:avLst/>
-          </a:prstGeom>
-        </p:spPr>
-      </p:pic>
       <p:cxnSp>
         <p:nvCxnSpPr>
           <p:cNvPr id="9" name="Connecteur droit 8">
@@ -6392,287 +6998,12 @@
           <a:p>
             <a:pPr algn="ctr"/>
             <a:r>
-              <a:rPr lang="fr-FR"/>
-              <a:t>Alim 5-12V</a:t>
-            </a:r>
-            <a:endParaRPr lang="fr-FR" dirty="0"/>
-          </a:p>
-        </p:txBody>
-      </p:sp>
-      <p:grpSp>
-        <p:nvGrpSpPr>
-          <p:cNvPr id="29" name="Groupe 28">
-            <a:extLst>
-              <a:ext uri="{FF2B5EF4-FFF2-40B4-BE49-F238E27FC236}">
-                <a16:creationId xmlns:a16="http://schemas.microsoft.com/office/drawing/2014/main" id="{3EC52FDE-A8FF-E07C-107E-9CC05DF9FB1F}"/>
-              </a:ext>
-            </a:extLst>
-          </p:cNvPr>
-          <p:cNvGrpSpPr/>
-          <p:nvPr/>
-        </p:nvGrpSpPr>
-        <p:grpSpPr>
-          <a:xfrm>
-            <a:off x="2905760" y="3659031"/>
-            <a:ext cx="3594196" cy="902809"/>
-            <a:chOff x="2905760" y="3659031"/>
-            <a:chExt cx="3614054" cy="902809"/>
-          </a:xfrm>
-        </p:grpSpPr>
-        <p:cxnSp>
-          <p:nvCxnSpPr>
-            <p:cNvPr id="25" name="Connecteur droit 24">
-              <a:extLst>
-                <a:ext uri="{FF2B5EF4-FFF2-40B4-BE49-F238E27FC236}">
-                  <a16:creationId xmlns:a16="http://schemas.microsoft.com/office/drawing/2014/main" id="{CEF807B6-B2B3-7FBA-1586-1D2BE17B85BF}"/>
-                </a:ext>
-              </a:extLst>
-            </p:cNvPr>
-            <p:cNvCxnSpPr>
-              <a:cxnSpLocks/>
-            </p:cNvCxnSpPr>
-            <p:nvPr/>
-          </p:nvCxnSpPr>
-          <p:spPr>
-            <a:xfrm>
-              <a:off x="2905760" y="4561840"/>
-              <a:ext cx="3614054" cy="0"/>
-            </a:xfrm>
-            <a:prstGeom prst="line">
-              <a:avLst/>
-            </a:prstGeom>
-            <a:ln w="38100"/>
-          </p:spPr>
-          <p:style>
-            <a:lnRef idx="3">
-              <a:schemeClr val="accent1"/>
-            </a:lnRef>
-            <a:fillRef idx="0">
-              <a:schemeClr val="accent1"/>
-            </a:fillRef>
-            <a:effectRef idx="2">
-              <a:schemeClr val="accent1"/>
-            </a:effectRef>
-            <a:fontRef idx="minor">
-              <a:schemeClr val="tx1"/>
-            </a:fontRef>
-          </p:style>
-        </p:cxnSp>
-        <p:cxnSp>
-          <p:nvCxnSpPr>
-            <p:cNvPr id="27" name="Connecteur droit 26">
-              <a:extLst>
-                <a:ext uri="{FF2B5EF4-FFF2-40B4-BE49-F238E27FC236}">
-                  <a16:creationId xmlns:a16="http://schemas.microsoft.com/office/drawing/2014/main" id="{3198C868-B6F1-EC30-C296-5156447D3AAA}"/>
-                </a:ext>
-              </a:extLst>
-            </p:cNvPr>
-            <p:cNvCxnSpPr>
-              <a:cxnSpLocks/>
-            </p:cNvCxnSpPr>
-            <p:nvPr/>
-          </p:nvCxnSpPr>
-          <p:spPr>
-            <a:xfrm flipV="1">
-              <a:off x="6519814" y="3659031"/>
-              <a:ext cx="0" cy="902809"/>
-            </a:xfrm>
-            <a:prstGeom prst="line">
-              <a:avLst/>
-            </a:prstGeom>
-            <a:ln w="38100"/>
-          </p:spPr>
-          <p:style>
-            <a:lnRef idx="3">
-              <a:schemeClr val="accent1"/>
-            </a:lnRef>
-            <a:fillRef idx="0">
-              <a:schemeClr val="accent1"/>
-            </a:fillRef>
-            <a:effectRef idx="2">
-              <a:schemeClr val="accent1"/>
-            </a:effectRef>
-            <a:fontRef idx="minor">
-              <a:schemeClr val="tx1"/>
-            </a:fontRef>
-          </p:style>
-        </p:cxnSp>
-      </p:grpSp>
-      <p:grpSp>
-        <p:nvGrpSpPr>
-          <p:cNvPr id="30" name="Groupe 29">
-            <a:extLst>
-              <a:ext uri="{FF2B5EF4-FFF2-40B4-BE49-F238E27FC236}">
-                <a16:creationId xmlns:a16="http://schemas.microsoft.com/office/drawing/2014/main" id="{2B533E32-6263-CA24-E999-18CD6750C5C1}"/>
-              </a:ext>
-            </a:extLst>
-          </p:cNvPr>
-          <p:cNvGrpSpPr/>
-          <p:nvPr/>
-        </p:nvGrpSpPr>
-        <p:grpSpPr>
-          <a:xfrm>
-            <a:off x="609600" y="3659031"/>
-            <a:ext cx="6146800" cy="1573369"/>
-            <a:chOff x="2905760" y="3659031"/>
-            <a:chExt cx="3698240" cy="902809"/>
-          </a:xfrm>
-        </p:grpSpPr>
-        <p:cxnSp>
-          <p:nvCxnSpPr>
-            <p:cNvPr id="31" name="Connecteur droit 30">
-              <a:extLst>
-                <a:ext uri="{FF2B5EF4-FFF2-40B4-BE49-F238E27FC236}">
-                  <a16:creationId xmlns:a16="http://schemas.microsoft.com/office/drawing/2014/main" id="{B2273B92-35DD-E9E1-2541-B255E248A7E7}"/>
-                </a:ext>
-              </a:extLst>
-            </p:cNvPr>
-            <p:cNvCxnSpPr/>
-            <p:nvPr/>
-          </p:nvCxnSpPr>
-          <p:spPr>
-            <a:xfrm>
-              <a:off x="2905760" y="4561840"/>
-              <a:ext cx="3698240" cy="0"/>
-            </a:xfrm>
-            <a:prstGeom prst="line">
-              <a:avLst/>
-            </a:prstGeom>
-            <a:ln w="38100"/>
-          </p:spPr>
-          <p:style>
-            <a:lnRef idx="3">
-              <a:schemeClr val="accent1"/>
-            </a:lnRef>
-            <a:fillRef idx="0">
-              <a:schemeClr val="accent1"/>
-            </a:fillRef>
-            <a:effectRef idx="2">
-              <a:schemeClr val="accent1"/>
-            </a:effectRef>
-            <a:fontRef idx="minor">
-              <a:schemeClr val="tx1"/>
-            </a:fontRef>
-          </p:style>
-        </p:cxnSp>
-        <p:cxnSp>
-          <p:nvCxnSpPr>
-            <p:cNvPr id="32" name="Connecteur droit 31">
-              <a:extLst>
-                <a:ext uri="{FF2B5EF4-FFF2-40B4-BE49-F238E27FC236}">
-                  <a16:creationId xmlns:a16="http://schemas.microsoft.com/office/drawing/2014/main" id="{3E321979-39F8-0C68-9899-7CD3A886E22D}"/>
-                </a:ext>
-              </a:extLst>
-            </p:cNvPr>
-            <p:cNvCxnSpPr>
-              <a:cxnSpLocks/>
-            </p:cNvCxnSpPr>
-            <p:nvPr/>
-          </p:nvCxnSpPr>
-          <p:spPr>
-            <a:xfrm flipV="1">
-              <a:off x="6604000" y="3659031"/>
-              <a:ext cx="0" cy="902809"/>
-            </a:xfrm>
-            <a:prstGeom prst="line">
-              <a:avLst/>
-            </a:prstGeom>
-            <a:ln w="38100"/>
-          </p:spPr>
-          <p:style>
-            <a:lnRef idx="3">
-              <a:schemeClr val="accent1"/>
-            </a:lnRef>
-            <a:fillRef idx="0">
-              <a:schemeClr val="accent1"/>
-            </a:fillRef>
-            <a:effectRef idx="2">
-              <a:schemeClr val="accent1"/>
-            </a:effectRef>
-            <a:fontRef idx="minor">
-              <a:schemeClr val="tx1"/>
-            </a:fontRef>
-          </p:style>
-        </p:cxnSp>
-      </p:grpSp>
-      <p:cxnSp>
-        <p:nvCxnSpPr>
-          <p:cNvPr id="34" name="Connecteur droit 33">
-            <a:extLst>
-              <a:ext uri="{FF2B5EF4-FFF2-40B4-BE49-F238E27FC236}">
-                <a16:creationId xmlns:a16="http://schemas.microsoft.com/office/drawing/2014/main" id="{19EA3794-163F-6FD6-DD6E-DDF25B38F86A}"/>
-              </a:ext>
-            </a:extLst>
-          </p:cNvPr>
-          <p:cNvCxnSpPr>
-            <a:cxnSpLocks/>
-          </p:cNvCxnSpPr>
-          <p:nvPr/>
-        </p:nvCxnSpPr>
-        <p:spPr>
-          <a:xfrm>
-            <a:off x="599440" y="4561840"/>
-            <a:ext cx="223520" cy="0"/>
-          </a:xfrm>
-          <a:prstGeom prst="line">
-            <a:avLst/>
-          </a:prstGeom>
-          <a:ln w="38100"/>
-        </p:spPr>
-        <p:style>
-          <a:lnRef idx="3">
-            <a:schemeClr val="accent1"/>
-          </a:lnRef>
-          <a:fillRef idx="0">
-            <a:schemeClr val="accent1"/>
-          </a:fillRef>
-          <a:effectRef idx="2">
-            <a:schemeClr val="accent1"/>
-          </a:effectRef>
-          <a:fontRef idx="minor">
-            <a:schemeClr val="tx1"/>
-          </a:fontRef>
-        </p:style>
-      </p:cxnSp>
-      <p:cxnSp>
-        <p:nvCxnSpPr>
-          <p:cNvPr id="35" name="Connecteur droit 34">
-            <a:extLst>
-              <a:ext uri="{FF2B5EF4-FFF2-40B4-BE49-F238E27FC236}">
-                <a16:creationId xmlns:a16="http://schemas.microsoft.com/office/drawing/2014/main" id="{BE58AA6C-6C8E-0D8C-5B5D-FB9A64DAE025}"/>
-              </a:ext>
-            </a:extLst>
-          </p:cNvPr>
-          <p:cNvCxnSpPr>
-            <a:cxnSpLocks/>
-          </p:cNvCxnSpPr>
-          <p:nvPr/>
-        </p:nvCxnSpPr>
-        <p:spPr>
-          <a:xfrm flipV="1">
-            <a:off x="609600" y="4561840"/>
-            <a:ext cx="0" cy="670560"/>
-          </a:xfrm>
-          <a:prstGeom prst="line">
-            <a:avLst/>
-          </a:prstGeom>
-          <a:ln w="38100"/>
-        </p:spPr>
-        <p:style>
-          <a:lnRef idx="3">
-            <a:schemeClr val="accent1"/>
-          </a:lnRef>
-          <a:fillRef idx="0">
-            <a:schemeClr val="accent1"/>
-          </a:fillRef>
-          <a:effectRef idx="2">
-            <a:schemeClr val="accent1"/>
-          </a:effectRef>
-          <a:fontRef idx="minor">
-            <a:schemeClr val="tx1"/>
-          </a:fontRef>
-        </p:style>
-      </p:cxnSp>
+              <a:rPr lang="fr-FR" dirty="0"/>
+              <a:t>Alim +5.0V</a:t>
+            </a:r>
+          </a:p>
+        </p:txBody>
+      </p:sp>
       <p:sp>
         <p:nvSpPr>
           <p:cNvPr id="38" name="ZoneTexte 37">
@@ -6687,7 +7018,7 @@
         </p:nvSpPr>
         <p:spPr>
           <a:xfrm>
-            <a:off x="6151883" y="3659030"/>
+            <a:off x="6197603" y="3659030"/>
             <a:ext cx="431777" cy="261610"/>
           </a:xfrm>
           <a:prstGeom prst="rect">
@@ -6736,7 +7067,7 @@
         </p:nvSpPr>
         <p:spPr>
           <a:xfrm>
-            <a:off x="6441998" y="3667897"/>
+            <a:off x="6464858" y="3660277"/>
             <a:ext cx="431777" cy="261610"/>
           </a:xfrm>
           <a:prstGeom prst="rect">
@@ -6884,7 +7215,7 @@
           <p:nvPr/>
         </p:nvPicPr>
         <p:blipFill>
-          <a:blip r:embed="rId4"/>
+          <a:blip r:embed="rId3"/>
           <a:stretch>
             <a:fillRect/>
           </a:stretch>
@@ -7233,7 +7564,7 @@
           <p:nvPr/>
         </p:nvPicPr>
         <p:blipFill>
-          <a:blip r:embed="rId5"/>
+          <a:blip r:embed="rId4"/>
           <a:stretch>
             <a:fillRect/>
           </a:stretch>
@@ -7432,96 +7763,6 @@
           </a:p>
         </p:txBody>
       </p:sp>
-      <p:cxnSp>
-        <p:nvCxnSpPr>
-          <p:cNvPr id="23" name="Connecteur droit 22">
-            <a:extLst>
-              <a:ext uri="{FF2B5EF4-FFF2-40B4-BE49-F238E27FC236}">
-                <a16:creationId xmlns:a16="http://schemas.microsoft.com/office/drawing/2014/main" id="{F7C41D2C-4C61-B6C4-616A-5C86EF4D0454}"/>
-              </a:ext>
-            </a:extLst>
-          </p:cNvPr>
-          <p:cNvCxnSpPr>
-            <a:cxnSpLocks/>
-          </p:cNvCxnSpPr>
-          <p:nvPr/>
-        </p:nvCxnSpPr>
-        <p:spPr>
-          <a:xfrm flipV="1">
-            <a:off x="6966674" y="3659031"/>
-            <a:ext cx="0" cy="2359804"/>
-          </a:xfrm>
-          <a:prstGeom prst="line">
-            <a:avLst/>
-          </a:prstGeom>
-          <a:ln w="38100">
-            <a:solidFill>
-              <a:schemeClr val="accent2">
-                <a:lumMod val="75000"/>
-              </a:schemeClr>
-            </a:solidFill>
-          </a:ln>
-        </p:spPr>
-        <p:style>
-          <a:lnRef idx="3">
-            <a:schemeClr val="accent1"/>
-          </a:lnRef>
-          <a:fillRef idx="0">
-            <a:schemeClr val="accent1"/>
-          </a:fillRef>
-          <a:effectRef idx="2">
-            <a:schemeClr val="accent1"/>
-          </a:effectRef>
-          <a:fontRef idx="minor">
-            <a:schemeClr val="tx1"/>
-          </a:fontRef>
-        </p:style>
-      </p:cxnSp>
-      <p:cxnSp>
-        <p:nvCxnSpPr>
-          <p:cNvPr id="24" name="Connecteur droit 23">
-            <a:extLst>
-              <a:ext uri="{FF2B5EF4-FFF2-40B4-BE49-F238E27FC236}">
-                <a16:creationId xmlns:a16="http://schemas.microsoft.com/office/drawing/2014/main" id="{38A71B2D-6FD4-12C6-602E-AB1240C2FFD5}"/>
-              </a:ext>
-            </a:extLst>
-          </p:cNvPr>
-          <p:cNvCxnSpPr>
-            <a:cxnSpLocks/>
-          </p:cNvCxnSpPr>
-          <p:nvPr/>
-        </p:nvCxnSpPr>
-        <p:spPr>
-          <a:xfrm flipV="1">
-            <a:off x="7251710" y="3659031"/>
-            <a:ext cx="17836" cy="2579723"/>
-          </a:xfrm>
-          <a:prstGeom prst="line">
-            <a:avLst/>
-          </a:prstGeom>
-          <a:ln w="38100">
-            <a:solidFill>
-              <a:schemeClr val="accent2">
-                <a:lumMod val="75000"/>
-              </a:schemeClr>
-            </a:solidFill>
-          </a:ln>
-        </p:spPr>
-        <p:style>
-          <a:lnRef idx="3">
-            <a:schemeClr val="accent1"/>
-          </a:lnRef>
-          <a:fillRef idx="0">
-            <a:schemeClr val="accent1"/>
-          </a:fillRef>
-          <a:effectRef idx="2">
-            <a:schemeClr val="accent1"/>
-          </a:effectRef>
-          <a:fontRef idx="minor">
-            <a:schemeClr val="tx1"/>
-          </a:fontRef>
-        </p:style>
-      </p:cxnSp>
       <p:sp>
         <p:nvSpPr>
           <p:cNvPr id="26" name="ZoneTexte 25">
@@ -7536,7 +7777,7 @@
         </p:nvSpPr>
         <p:spPr>
           <a:xfrm>
-            <a:off x="6924064" y="3712513"/>
+            <a:off x="6840412" y="3666650"/>
             <a:ext cx="431777" cy="261610"/>
           </a:xfrm>
           <a:prstGeom prst="rect">
@@ -7585,7 +7826,7 @@
         </p:nvSpPr>
         <p:spPr>
           <a:xfrm>
-            <a:off x="7251710" y="3712513"/>
+            <a:off x="7085164" y="3666833"/>
             <a:ext cx="431777" cy="261610"/>
           </a:xfrm>
           <a:prstGeom prst="rect">
@@ -7622,10 +7863,10 @@
       </p:sp>
       <p:cxnSp>
         <p:nvCxnSpPr>
-          <p:cNvPr id="42" name="Connecteur droit 41">
-            <a:extLst>
-              <a:ext uri="{FF2B5EF4-FFF2-40B4-BE49-F238E27FC236}">
-                <a16:creationId xmlns:a16="http://schemas.microsoft.com/office/drawing/2014/main" id="{8D26CD56-0696-8296-0746-D3A03A39CE0C}"/>
+          <p:cNvPr id="2" name="Connecteur droit 1">
+            <a:extLst>
+              <a:ext uri="{FF2B5EF4-FFF2-40B4-BE49-F238E27FC236}">
+                <a16:creationId xmlns:a16="http://schemas.microsoft.com/office/drawing/2014/main" id="{D3EA1D08-026C-3A32-4849-AE55BB28F1E5}"/>
               </a:ext>
             </a:extLst>
           </p:cNvPr>
@@ -7635,19 +7876,18 @@
           <p:nvPr/>
         </p:nvCxnSpPr>
         <p:spPr>
-          <a:xfrm>
-            <a:off x="300942" y="6003208"/>
-            <a:ext cx="6665732" cy="0"/>
+          <a:xfrm flipV="1">
+            <a:off x="6499957" y="3641260"/>
+            <a:ext cx="0" cy="686900"/>
           </a:xfrm>
           <a:prstGeom prst="line">
             <a:avLst/>
           </a:prstGeom>
-          <a:ln w="38100">
+          <a:ln w="28575">
             <a:solidFill>
-              <a:schemeClr val="accent2">
-                <a:lumMod val="75000"/>
-              </a:schemeClr>
+              <a:schemeClr val="accent2"/>
             </a:solidFill>
+            <a:tailEnd type="triangle"/>
           </a:ln>
         </p:spPr>
         <p:style>
@@ -7665,237 +7905,12 @@
           </a:fontRef>
         </p:style>
       </p:cxnSp>
-      <p:cxnSp>
-        <p:nvCxnSpPr>
-          <p:cNvPr id="50" name="Connecteur droit 49">
-            <a:extLst>
-              <a:ext uri="{FF2B5EF4-FFF2-40B4-BE49-F238E27FC236}">
-                <a16:creationId xmlns:a16="http://schemas.microsoft.com/office/drawing/2014/main" id="{11AA3E7D-B01C-BB92-2EBC-27BD3E11EB99}"/>
-              </a:ext>
-            </a:extLst>
-          </p:cNvPr>
-          <p:cNvCxnSpPr>
-            <a:cxnSpLocks/>
-          </p:cNvCxnSpPr>
-          <p:nvPr/>
-        </p:nvCxnSpPr>
-        <p:spPr>
-          <a:xfrm flipV="1">
-            <a:off x="146377" y="6213481"/>
-            <a:ext cx="7128955" cy="25273"/>
-          </a:xfrm>
-          <a:prstGeom prst="line">
-            <a:avLst/>
-          </a:prstGeom>
-          <a:ln w="38100">
-            <a:solidFill>
-              <a:schemeClr val="accent2">
-                <a:lumMod val="75000"/>
-              </a:schemeClr>
-            </a:solidFill>
-          </a:ln>
-        </p:spPr>
-        <p:style>
-          <a:lnRef idx="3">
-            <a:schemeClr val="accent1"/>
-          </a:lnRef>
-          <a:fillRef idx="0">
-            <a:schemeClr val="accent1"/>
-          </a:fillRef>
-          <a:effectRef idx="2">
-            <a:schemeClr val="accent1"/>
-          </a:effectRef>
-          <a:fontRef idx="minor">
-            <a:schemeClr val="tx1"/>
-          </a:fontRef>
-        </p:style>
-      </p:cxnSp>
-      <p:cxnSp>
-        <p:nvCxnSpPr>
-          <p:cNvPr id="54" name="Connecteur droit 53">
-            <a:extLst>
-              <a:ext uri="{FF2B5EF4-FFF2-40B4-BE49-F238E27FC236}">
-                <a16:creationId xmlns:a16="http://schemas.microsoft.com/office/drawing/2014/main" id="{484C8E23-C18C-05FE-8FF3-82988D79A700}"/>
-              </a:ext>
-            </a:extLst>
-          </p:cNvPr>
-          <p:cNvCxnSpPr>
-            <a:cxnSpLocks/>
-          </p:cNvCxnSpPr>
-          <p:nvPr/>
-        </p:nvCxnSpPr>
-        <p:spPr>
-          <a:xfrm flipV="1">
-            <a:off x="312517" y="4352081"/>
-            <a:ext cx="0" cy="1662702"/>
-          </a:xfrm>
-          <a:prstGeom prst="line">
-            <a:avLst/>
-          </a:prstGeom>
-          <a:ln w="38100">
-            <a:solidFill>
-              <a:schemeClr val="accent2">
-                <a:lumMod val="75000"/>
-              </a:schemeClr>
-            </a:solidFill>
-          </a:ln>
-        </p:spPr>
-        <p:style>
-          <a:lnRef idx="3">
-            <a:schemeClr val="accent1"/>
-          </a:lnRef>
-          <a:fillRef idx="0">
-            <a:schemeClr val="accent1"/>
-          </a:fillRef>
-          <a:effectRef idx="2">
-            <a:schemeClr val="accent1"/>
-          </a:effectRef>
-          <a:fontRef idx="minor">
-            <a:schemeClr val="tx1"/>
-          </a:fontRef>
-        </p:style>
-      </p:cxnSp>
-      <p:cxnSp>
-        <p:nvCxnSpPr>
-          <p:cNvPr id="58" name="Connecteur droit 57">
-            <a:extLst>
-              <a:ext uri="{FF2B5EF4-FFF2-40B4-BE49-F238E27FC236}">
-                <a16:creationId xmlns:a16="http://schemas.microsoft.com/office/drawing/2014/main" id="{4C88C998-FE47-F0DE-1EE3-A4FF5C32070F}"/>
-              </a:ext>
-            </a:extLst>
-          </p:cNvPr>
-          <p:cNvCxnSpPr>
-            <a:cxnSpLocks/>
-          </p:cNvCxnSpPr>
-          <p:nvPr/>
-        </p:nvCxnSpPr>
-        <p:spPr>
-          <a:xfrm>
-            <a:off x="312517" y="4349957"/>
-            <a:ext cx="495782" cy="0"/>
-          </a:xfrm>
-          <a:prstGeom prst="line">
-            <a:avLst/>
-          </a:prstGeom>
-          <a:ln w="38100">
-            <a:solidFill>
-              <a:schemeClr val="accent2">
-                <a:lumMod val="75000"/>
-              </a:schemeClr>
-            </a:solidFill>
-          </a:ln>
-        </p:spPr>
-        <p:style>
-          <a:lnRef idx="3">
-            <a:schemeClr val="accent1"/>
-          </a:lnRef>
-          <a:fillRef idx="0">
-            <a:schemeClr val="accent1"/>
-          </a:fillRef>
-          <a:effectRef idx="2">
-            <a:schemeClr val="accent1"/>
-          </a:effectRef>
-          <a:fontRef idx="minor">
-            <a:schemeClr val="tx1"/>
-          </a:fontRef>
-        </p:style>
-      </p:cxnSp>
-      <p:cxnSp>
-        <p:nvCxnSpPr>
-          <p:cNvPr id="60" name="Connecteur droit 59">
-            <a:extLst>
-              <a:ext uri="{FF2B5EF4-FFF2-40B4-BE49-F238E27FC236}">
-                <a16:creationId xmlns:a16="http://schemas.microsoft.com/office/drawing/2014/main" id="{A142DE98-80AF-17AD-342F-E6B22A25B129}"/>
-              </a:ext>
-            </a:extLst>
-          </p:cNvPr>
-          <p:cNvCxnSpPr>
-            <a:cxnSpLocks/>
-          </p:cNvCxnSpPr>
-          <p:nvPr/>
-        </p:nvCxnSpPr>
-        <p:spPr>
-          <a:xfrm>
-            <a:off x="146377" y="4110435"/>
-            <a:ext cx="650347" cy="0"/>
-          </a:xfrm>
-          <a:prstGeom prst="line">
-            <a:avLst/>
-          </a:prstGeom>
-          <a:ln w="38100">
-            <a:solidFill>
-              <a:schemeClr val="accent2">
-                <a:lumMod val="75000"/>
-              </a:schemeClr>
-            </a:solidFill>
-          </a:ln>
-        </p:spPr>
-        <p:style>
-          <a:lnRef idx="3">
-            <a:schemeClr val="accent1"/>
-          </a:lnRef>
-          <a:fillRef idx="0">
-            <a:schemeClr val="accent1"/>
-          </a:fillRef>
-          <a:effectRef idx="2">
-            <a:schemeClr val="accent1"/>
-          </a:effectRef>
-          <a:fontRef idx="minor">
-            <a:schemeClr val="tx1"/>
-          </a:fontRef>
-        </p:style>
-      </p:cxnSp>
-      <p:cxnSp>
-        <p:nvCxnSpPr>
-          <p:cNvPr id="62" name="Connecteur droit 61">
-            <a:extLst>
-              <a:ext uri="{FF2B5EF4-FFF2-40B4-BE49-F238E27FC236}">
-                <a16:creationId xmlns:a16="http://schemas.microsoft.com/office/drawing/2014/main" id="{EB7FACA9-F948-1405-4375-8EB56551D90B}"/>
-              </a:ext>
-            </a:extLst>
-          </p:cNvPr>
-          <p:cNvCxnSpPr>
-            <a:cxnSpLocks/>
-          </p:cNvCxnSpPr>
-          <p:nvPr/>
-        </p:nvCxnSpPr>
-        <p:spPr>
-          <a:xfrm flipV="1">
-            <a:off x="146377" y="4110435"/>
-            <a:ext cx="0" cy="2128319"/>
-          </a:xfrm>
-          <a:prstGeom prst="line">
-            <a:avLst/>
-          </a:prstGeom>
-          <a:ln w="38100">
-            <a:solidFill>
-              <a:schemeClr val="accent2">
-                <a:lumMod val="75000"/>
-              </a:schemeClr>
-            </a:solidFill>
-          </a:ln>
-        </p:spPr>
-        <p:style>
-          <a:lnRef idx="3">
-            <a:schemeClr val="accent1"/>
-          </a:lnRef>
-          <a:fillRef idx="0">
-            <a:schemeClr val="accent1"/>
-          </a:fillRef>
-          <a:effectRef idx="2">
-            <a:schemeClr val="accent1"/>
-          </a:effectRef>
-          <a:fontRef idx="minor">
-            <a:schemeClr val="tx1"/>
-          </a:fontRef>
-        </p:style>
-      </p:cxnSp>
-      <p:sp>
-        <p:nvSpPr>
-          <p:cNvPr id="66" name="ZoneTexte 65">
-            <a:extLst>
-              <a:ext uri="{FF2B5EF4-FFF2-40B4-BE49-F238E27FC236}">
-                <a16:creationId xmlns:a16="http://schemas.microsoft.com/office/drawing/2014/main" id="{7B6D9C04-2F6D-08F0-BA5C-5CB058F4EC7F}"/>
+      <p:sp>
+        <p:nvSpPr>
+          <p:cNvPr id="19" name="ZoneTexte 18">
+            <a:extLst>
+              <a:ext uri="{FF2B5EF4-FFF2-40B4-BE49-F238E27FC236}">
+                <a16:creationId xmlns:a16="http://schemas.microsoft.com/office/drawing/2014/main" id="{31C16C12-AABB-E2E7-A29A-F9AA7B0B80CC}"/>
               </a:ext>
             </a:extLst>
           </p:cNvPr>
@@ -7904,8 +7919,8 @@
         </p:nvSpPr>
         <p:spPr>
           <a:xfrm>
-            <a:off x="215215" y="4147698"/>
-            <a:ext cx="1007318" cy="430887"/>
+            <a:off x="6152674" y="4245573"/>
+            <a:ext cx="679133" cy="261610"/>
           </a:xfrm>
           <a:prstGeom prst="rect">
             <a:avLst/>
@@ -7934,17 +7949,149 @@
           <a:p>
             <a:r>
               <a:rPr lang="fr-FR" dirty="0"/>
-              <a:t>PWM (TIM16_CH1)</a:t>
-            </a:r>
-          </a:p>
-        </p:txBody>
-      </p:sp>
-      <p:sp>
-        <p:nvSpPr>
-          <p:cNvPr id="71" name="ZoneTexte 70">
-            <a:extLst>
-              <a:ext uri="{FF2B5EF4-FFF2-40B4-BE49-F238E27FC236}">
-                <a16:creationId xmlns:a16="http://schemas.microsoft.com/office/drawing/2014/main" id="{B91AD224-25BA-90AA-8CB8-AE05395D30A8}"/>
+              <a:t>Io26</a:t>
+            </a:r>
+          </a:p>
+        </p:txBody>
+      </p:sp>
+      <p:cxnSp>
+        <p:nvCxnSpPr>
+          <p:cNvPr id="37" name="Connecteur droit 36">
+            <a:extLst>
+              <a:ext uri="{FF2B5EF4-FFF2-40B4-BE49-F238E27FC236}">
+                <a16:creationId xmlns:a16="http://schemas.microsoft.com/office/drawing/2014/main" id="{DDD61AA3-BB8C-EF6F-796F-15F5A6CEA1D8}"/>
+              </a:ext>
+            </a:extLst>
+          </p:cNvPr>
+          <p:cNvCxnSpPr>
+            <a:cxnSpLocks/>
+          </p:cNvCxnSpPr>
+          <p:nvPr/>
+        </p:nvCxnSpPr>
+        <p:spPr>
+          <a:xfrm flipV="1">
+            <a:off x="6759037" y="3641260"/>
+            <a:ext cx="0" cy="865923"/>
+          </a:xfrm>
+          <a:prstGeom prst="line">
+            <a:avLst/>
+          </a:prstGeom>
+          <a:ln w="28575">
+            <a:solidFill>
+              <a:schemeClr val="accent2"/>
+            </a:solidFill>
+            <a:tailEnd type="triangle"/>
+          </a:ln>
+        </p:spPr>
+        <p:style>
+          <a:lnRef idx="3">
+            <a:schemeClr val="accent1"/>
+          </a:lnRef>
+          <a:fillRef idx="0">
+            <a:schemeClr val="accent1"/>
+          </a:fillRef>
+          <a:effectRef idx="2">
+            <a:schemeClr val="accent1"/>
+          </a:effectRef>
+          <a:fontRef idx="minor">
+            <a:schemeClr val="tx1"/>
+          </a:fontRef>
+        </p:style>
+      </p:cxnSp>
+      <p:cxnSp>
+        <p:nvCxnSpPr>
+          <p:cNvPr id="46" name="Connecteur droit 45">
+            <a:extLst>
+              <a:ext uri="{FF2B5EF4-FFF2-40B4-BE49-F238E27FC236}">
+                <a16:creationId xmlns:a16="http://schemas.microsoft.com/office/drawing/2014/main" id="{05CEE9A4-1955-6A1C-EE9A-FF4D5EC6AD67}"/>
+              </a:ext>
+            </a:extLst>
+          </p:cNvPr>
+          <p:cNvCxnSpPr>
+            <a:cxnSpLocks/>
+          </p:cNvCxnSpPr>
+          <p:nvPr/>
+        </p:nvCxnSpPr>
+        <p:spPr>
+          <a:xfrm flipV="1">
+            <a:off x="6907313" y="3641260"/>
+            <a:ext cx="0" cy="686900"/>
+          </a:xfrm>
+          <a:prstGeom prst="line">
+            <a:avLst/>
+          </a:prstGeom>
+          <a:ln w="28575">
+            <a:solidFill>
+              <a:schemeClr val="accent2"/>
+            </a:solidFill>
+            <a:tailEnd type="triangle"/>
+          </a:ln>
+        </p:spPr>
+        <p:style>
+          <a:lnRef idx="3">
+            <a:schemeClr val="accent1"/>
+          </a:lnRef>
+          <a:fillRef idx="0">
+            <a:schemeClr val="accent1"/>
+          </a:fillRef>
+          <a:effectRef idx="2">
+            <a:schemeClr val="accent1"/>
+          </a:effectRef>
+          <a:fontRef idx="minor">
+            <a:schemeClr val="tx1"/>
+          </a:fontRef>
+        </p:style>
+      </p:cxnSp>
+      <p:cxnSp>
+        <p:nvCxnSpPr>
+          <p:cNvPr id="47" name="Connecteur droit 46">
+            <a:extLst>
+              <a:ext uri="{FF2B5EF4-FFF2-40B4-BE49-F238E27FC236}">
+                <a16:creationId xmlns:a16="http://schemas.microsoft.com/office/drawing/2014/main" id="{60328A07-C10B-0EE5-766F-3C682C9B2277}"/>
+              </a:ext>
+            </a:extLst>
+          </p:cNvPr>
+          <p:cNvCxnSpPr>
+            <a:cxnSpLocks/>
+          </p:cNvCxnSpPr>
+          <p:nvPr/>
+        </p:nvCxnSpPr>
+        <p:spPr>
+          <a:xfrm flipH="1" flipV="1">
+            <a:off x="7154649" y="3641260"/>
+            <a:ext cx="8783" cy="886758"/>
+          </a:xfrm>
+          <a:prstGeom prst="line">
+            <a:avLst/>
+          </a:prstGeom>
+          <a:ln w="28575">
+            <a:solidFill>
+              <a:schemeClr val="accent2"/>
+            </a:solidFill>
+            <a:tailEnd type="triangle"/>
+          </a:ln>
+        </p:spPr>
+        <p:style>
+          <a:lnRef idx="3">
+            <a:schemeClr val="accent1"/>
+          </a:lnRef>
+          <a:fillRef idx="0">
+            <a:schemeClr val="accent1"/>
+          </a:fillRef>
+          <a:effectRef idx="2">
+            <a:schemeClr val="accent1"/>
+          </a:effectRef>
+          <a:fontRef idx="minor">
+            <a:schemeClr val="tx1"/>
+          </a:fontRef>
+        </p:style>
+      </p:cxnSp>
+      <p:sp>
+        <p:nvSpPr>
+          <p:cNvPr id="49" name="ZoneTexte 48">
+            <a:extLst>
+              <a:ext uri="{FF2B5EF4-FFF2-40B4-BE49-F238E27FC236}">
+                <a16:creationId xmlns:a16="http://schemas.microsoft.com/office/drawing/2014/main" id="{AE753F5D-38DC-B118-51DC-F8DDB3D9CBFD}"/>
               </a:ext>
             </a:extLst>
           </p:cNvPr>
@@ -7953,8 +8100,8 @@
         </p:nvSpPr>
         <p:spPr>
           <a:xfrm>
-            <a:off x="96088" y="3823157"/>
-            <a:ext cx="839807" cy="261610"/>
+            <a:off x="6557068" y="4463398"/>
+            <a:ext cx="679133" cy="261610"/>
           </a:xfrm>
           <a:prstGeom prst="rect">
             <a:avLst/>
@@ -7983,7 +8130,105 @@
           <a:p>
             <a:r>
               <a:rPr lang="fr-FR" dirty="0"/>
-              <a:t>GPIO_OUT</a:t>
+              <a:t>Io25</a:t>
+            </a:r>
+          </a:p>
+        </p:txBody>
+      </p:sp>
+      <p:sp>
+        <p:nvSpPr>
+          <p:cNvPr id="51" name="ZoneTexte 50">
+            <a:extLst>
+              <a:ext uri="{FF2B5EF4-FFF2-40B4-BE49-F238E27FC236}">
+                <a16:creationId xmlns:a16="http://schemas.microsoft.com/office/drawing/2014/main" id="{DE5A6303-A887-E846-0757-F370C2207FCF}"/>
+              </a:ext>
+            </a:extLst>
+          </p:cNvPr>
+          <p:cNvSpPr txBox="1"/>
+          <p:nvPr/>
+        </p:nvSpPr>
+        <p:spPr>
+          <a:xfrm>
+            <a:off x="6745598" y="4266408"/>
+            <a:ext cx="449662" cy="261610"/>
+          </a:xfrm>
+          <a:prstGeom prst="rect">
+            <a:avLst/>
+          </a:prstGeom>
+          <a:noFill/>
+        </p:spPr>
+        <p:txBody>
+          <a:bodyPr wrap="square">
+            <a:spAutoFit/>
+          </a:bodyPr>
+          <a:lstStyle>
+            <a:defPPr>
+              <a:defRPr lang="fr-FR"/>
+            </a:defPPr>
+            <a:lvl1pPr>
+              <a:defRPr sz="1100">
+                <a:solidFill>
+                  <a:schemeClr val="tx1">
+                    <a:lumMod val="50000"/>
+                    <a:lumOff val="50000"/>
+                  </a:schemeClr>
+                </a:solidFill>
+              </a:defRPr>
+            </a:lvl1pPr>
+          </a:lstStyle>
+          <a:p>
+            <a:r>
+              <a:rPr lang="fr-FR" dirty="0"/>
+              <a:t>Io17</a:t>
+            </a:r>
+          </a:p>
+        </p:txBody>
+      </p:sp>
+      <p:sp>
+        <p:nvSpPr>
+          <p:cNvPr id="55" name="ZoneTexte 54">
+            <a:extLst>
+              <a:ext uri="{FF2B5EF4-FFF2-40B4-BE49-F238E27FC236}">
+                <a16:creationId xmlns:a16="http://schemas.microsoft.com/office/drawing/2014/main" id="{B4D42D58-31E6-4077-F8BA-5D7A634CE265}"/>
+              </a:ext>
+            </a:extLst>
+          </p:cNvPr>
+          <p:cNvSpPr txBox="1"/>
+          <p:nvPr/>
+        </p:nvSpPr>
+        <p:spPr>
+          <a:xfrm>
+            <a:off x="6985350" y="4463398"/>
+            <a:ext cx="679133" cy="261610"/>
+          </a:xfrm>
+          <a:prstGeom prst="rect">
+            <a:avLst/>
+          </a:prstGeom>
+          <a:noFill/>
+        </p:spPr>
+        <p:txBody>
+          <a:bodyPr wrap="square">
+            <a:spAutoFit/>
+          </a:bodyPr>
+          <a:lstStyle>
+            <a:defPPr>
+              <a:defRPr lang="fr-FR"/>
+            </a:defPPr>
+            <a:lvl1pPr>
+              <a:defRPr sz="1100">
+                <a:solidFill>
+                  <a:schemeClr val="tx1">
+                    <a:lumMod val="50000"/>
+                    <a:lumOff val="50000"/>
+                  </a:schemeClr>
+                </a:solidFill>
+              </a:defRPr>
+            </a:lvl1pPr>
+          </a:lstStyle>
+          <a:p>
+            <a:r>
+              <a:rPr lang="fr-FR" dirty="0"/>
+              <a:t>Io16</a:t>
             </a:r>
           </a:p>
         </p:txBody>
@@ -7992,1567 +8237,6 @@
     <p:extLst>
       <p:ext uri="{BB962C8B-B14F-4D97-AF65-F5344CB8AC3E}">
         <p14:creationId xmlns:p14="http://schemas.microsoft.com/office/powerpoint/2010/main" val="3643778766"/>
-      </p:ext>
-    </p:extLst>
-  </p:cSld>
-  <p:clrMapOvr>
-    <a:masterClrMapping/>
-  </p:clrMapOvr>
-</p:sld>
-</file>
-
-<file path=ppt/slides/slide3.xml><?xml version="1.0" encoding="utf-8"?>
-<p:sld xmlns:a="http://schemas.openxmlformats.org/drawingml/2006/main" xmlns:r="http://schemas.openxmlformats.org/officeDocument/2006/relationships" xmlns:p="http://schemas.openxmlformats.org/presentationml/2006/main">
-  <p:cSld>
-    <p:spTree>
-      <p:nvGrpSpPr>
-        <p:cNvPr id="1" name="">
-          <a:extLst>
-            <a:ext uri="{FF2B5EF4-FFF2-40B4-BE49-F238E27FC236}">
-              <a16:creationId xmlns:a16="http://schemas.microsoft.com/office/drawing/2014/main" id="{A0A99D58-D264-F00F-6A3E-237A4A061E23}"/>
-            </a:ext>
-          </a:extLst>
-        </p:cNvPr>
-        <p:cNvGrpSpPr/>
-        <p:nvPr/>
-      </p:nvGrpSpPr>
-      <p:grpSpPr>
-        <a:xfrm>
-          <a:off x="0" y="0"/>
-          <a:ext cx="0" cy="0"/>
-          <a:chOff x="0" y="0"/>
-          <a:chExt cx="0" cy="0"/>
-        </a:xfrm>
-      </p:grpSpPr>
-      <p:pic>
-        <p:nvPicPr>
-          <p:cNvPr id="8" name="Image 7">
-            <a:extLst>
-              <a:ext uri="{FF2B5EF4-FFF2-40B4-BE49-F238E27FC236}">
-                <a16:creationId xmlns:a16="http://schemas.microsoft.com/office/drawing/2014/main" id="{ABE45881-1B2F-B297-B3A8-65B3D874790D}"/>
-              </a:ext>
-            </a:extLst>
-          </p:cNvPr>
-          <p:cNvPicPr>
-            <a:picLocks noChangeAspect="1"/>
-          </p:cNvPicPr>
-          <p:nvPr/>
-        </p:nvPicPr>
-        <p:blipFill>
-          <a:blip r:embed="rId2"/>
-          <a:srcRect t="6303" b="9132"/>
-          <a:stretch>
-            <a:fillRect/>
-          </a:stretch>
-        </p:blipFill>
-        <p:spPr>
-          <a:xfrm>
-            <a:off x="2201319" y="904618"/>
-            <a:ext cx="3203598" cy="4327426"/>
-          </a:xfrm>
-          <a:prstGeom prst="rect">
-            <a:avLst/>
-          </a:prstGeom>
-        </p:spPr>
-      </p:pic>
-      <p:sp>
-        <p:nvSpPr>
-          <p:cNvPr id="2" name="Ellipse 1">
-            <a:extLst>
-              <a:ext uri="{FF2B5EF4-FFF2-40B4-BE49-F238E27FC236}">
-                <a16:creationId xmlns:a16="http://schemas.microsoft.com/office/drawing/2014/main" id="{41FE021D-B56A-9474-1104-3C92745DB4BC}"/>
-              </a:ext>
-            </a:extLst>
-          </p:cNvPr>
-          <p:cNvSpPr/>
-          <p:nvPr/>
-        </p:nvSpPr>
-        <p:spPr>
-          <a:xfrm>
-            <a:off x="7421504" y="2515869"/>
-            <a:ext cx="121919" cy="125469"/>
-          </a:xfrm>
-          <a:prstGeom prst="ellipse">
-            <a:avLst/>
-          </a:prstGeom>
-          <a:solidFill>
-            <a:schemeClr val="tx1"/>
-          </a:solidFill>
-          <a:ln>
-            <a:noFill/>
-          </a:ln>
-        </p:spPr>
-        <p:style>
-          <a:lnRef idx="2">
-            <a:schemeClr val="accent1">
-              <a:shade val="15000"/>
-            </a:schemeClr>
-          </a:lnRef>
-          <a:fillRef idx="1">
-            <a:schemeClr val="accent1"/>
-          </a:fillRef>
-          <a:effectRef idx="0">
-            <a:schemeClr val="accent1"/>
-          </a:effectRef>
-          <a:fontRef idx="minor">
-            <a:schemeClr val="lt1"/>
-          </a:fontRef>
-        </p:style>
-        <p:txBody>
-          <a:bodyPr rtlCol="0" anchor="ctr"/>
-          <a:lstStyle>
-            <a:defPPr>
-              <a:defRPr lang="fr-FR"/>
-            </a:defPPr>
-            <a:lvl1pPr marL="0" algn="l" defTabSz="914400" rtl="0" eaLnBrk="1" latinLnBrk="0" hangingPunct="1">
-              <a:defRPr sz="1800" kern="1200">
-                <a:solidFill>
-                  <a:schemeClr val="lt1"/>
-                </a:solidFill>
-                <a:latin typeface="+mn-lt"/>
-                <a:ea typeface="+mn-ea"/>
-                <a:cs typeface="+mn-cs"/>
-              </a:defRPr>
-            </a:lvl1pPr>
-            <a:lvl2pPr marL="457200" algn="l" defTabSz="914400" rtl="0" eaLnBrk="1" latinLnBrk="0" hangingPunct="1">
-              <a:defRPr sz="1800" kern="1200">
-                <a:solidFill>
-                  <a:schemeClr val="lt1"/>
-                </a:solidFill>
-                <a:latin typeface="+mn-lt"/>
-                <a:ea typeface="+mn-ea"/>
-                <a:cs typeface="+mn-cs"/>
-              </a:defRPr>
-            </a:lvl2pPr>
-            <a:lvl3pPr marL="914400" algn="l" defTabSz="914400" rtl="0" eaLnBrk="1" latinLnBrk="0" hangingPunct="1">
-              <a:defRPr sz="1800" kern="1200">
-                <a:solidFill>
-                  <a:schemeClr val="lt1"/>
-                </a:solidFill>
-                <a:latin typeface="+mn-lt"/>
-                <a:ea typeface="+mn-ea"/>
-                <a:cs typeface="+mn-cs"/>
-              </a:defRPr>
-            </a:lvl3pPr>
-            <a:lvl4pPr marL="1371600" algn="l" defTabSz="914400" rtl="0" eaLnBrk="1" latinLnBrk="0" hangingPunct="1">
-              <a:defRPr sz="1800" kern="1200">
-                <a:solidFill>
-                  <a:schemeClr val="lt1"/>
-                </a:solidFill>
-                <a:latin typeface="+mn-lt"/>
-                <a:ea typeface="+mn-ea"/>
-                <a:cs typeface="+mn-cs"/>
-              </a:defRPr>
-            </a:lvl4pPr>
-            <a:lvl5pPr marL="1828800" algn="l" defTabSz="914400" rtl="0" eaLnBrk="1" latinLnBrk="0" hangingPunct="1">
-              <a:defRPr sz="1800" kern="1200">
-                <a:solidFill>
-                  <a:schemeClr val="lt1"/>
-                </a:solidFill>
-                <a:latin typeface="+mn-lt"/>
-                <a:ea typeface="+mn-ea"/>
-                <a:cs typeface="+mn-cs"/>
-              </a:defRPr>
-            </a:lvl5pPr>
-            <a:lvl6pPr marL="2286000" algn="l" defTabSz="914400" rtl="0" eaLnBrk="1" latinLnBrk="0" hangingPunct="1">
-              <a:defRPr sz="1800" kern="1200">
-                <a:solidFill>
-                  <a:schemeClr val="lt1"/>
-                </a:solidFill>
-                <a:latin typeface="+mn-lt"/>
-                <a:ea typeface="+mn-ea"/>
-                <a:cs typeface="+mn-cs"/>
-              </a:defRPr>
-            </a:lvl6pPr>
-            <a:lvl7pPr marL="2743200" algn="l" defTabSz="914400" rtl="0" eaLnBrk="1" latinLnBrk="0" hangingPunct="1">
-              <a:defRPr sz="1800" kern="1200">
-                <a:solidFill>
-                  <a:schemeClr val="lt1"/>
-                </a:solidFill>
-                <a:latin typeface="+mn-lt"/>
-                <a:ea typeface="+mn-ea"/>
-                <a:cs typeface="+mn-cs"/>
-              </a:defRPr>
-            </a:lvl7pPr>
-            <a:lvl8pPr marL="3200400" algn="l" defTabSz="914400" rtl="0" eaLnBrk="1" latinLnBrk="0" hangingPunct="1">
-              <a:defRPr sz="1800" kern="1200">
-                <a:solidFill>
-                  <a:schemeClr val="lt1"/>
-                </a:solidFill>
-                <a:latin typeface="+mn-lt"/>
-                <a:ea typeface="+mn-ea"/>
-                <a:cs typeface="+mn-cs"/>
-              </a:defRPr>
-            </a:lvl8pPr>
-            <a:lvl9pPr marL="3657600" algn="l" defTabSz="914400" rtl="0" eaLnBrk="1" latinLnBrk="0" hangingPunct="1">
-              <a:defRPr sz="1800" kern="1200">
-                <a:solidFill>
-                  <a:schemeClr val="lt1"/>
-                </a:solidFill>
-                <a:latin typeface="+mn-lt"/>
-                <a:ea typeface="+mn-ea"/>
-                <a:cs typeface="+mn-cs"/>
-              </a:defRPr>
-            </a:lvl9pPr>
-          </a:lstStyle>
-          <a:p>
-            <a:pPr algn="ctr"/>
-            <a:endParaRPr lang="fr-FR"/>
-          </a:p>
-        </p:txBody>
-      </p:sp>
-      <p:pic>
-        <p:nvPicPr>
-          <p:cNvPr id="10" name="Image 9">
-            <a:extLst>
-              <a:ext uri="{FF2B5EF4-FFF2-40B4-BE49-F238E27FC236}">
-                <a16:creationId xmlns:a16="http://schemas.microsoft.com/office/drawing/2014/main" id="{9CF412A5-CF9B-F5BA-DD8F-2112AF97E7F1}"/>
-              </a:ext>
-            </a:extLst>
-          </p:cNvPr>
-          <p:cNvPicPr>
-            <a:picLocks noChangeAspect="1"/>
-          </p:cNvPicPr>
-          <p:nvPr/>
-        </p:nvPicPr>
-        <p:blipFill>
-          <a:blip r:embed="rId3"/>
-          <a:stretch>
-            <a:fillRect/>
-          </a:stretch>
-        </p:blipFill>
-        <p:spPr>
-          <a:xfrm rot="5400000">
-            <a:off x="6684178" y="2394214"/>
-            <a:ext cx="3680779" cy="1493649"/>
-          </a:xfrm>
-          <a:prstGeom prst="rect">
-            <a:avLst/>
-          </a:prstGeom>
-        </p:spPr>
-      </p:pic>
-      <p:cxnSp>
-        <p:nvCxnSpPr>
-          <p:cNvPr id="15" name="Connecteur : en angle 14">
-            <a:extLst>
-              <a:ext uri="{FF2B5EF4-FFF2-40B4-BE49-F238E27FC236}">
-                <a16:creationId xmlns:a16="http://schemas.microsoft.com/office/drawing/2014/main" id="{1EDFEE63-3142-2BD9-42D3-FC782743E97C}"/>
-              </a:ext>
-            </a:extLst>
-          </p:cNvPr>
-          <p:cNvCxnSpPr>
-            <a:cxnSpLocks/>
-          </p:cNvCxnSpPr>
-          <p:nvPr/>
-        </p:nvCxnSpPr>
-        <p:spPr>
-          <a:xfrm rot="10800000" flipV="1">
-            <a:off x="4632961" y="1694686"/>
-            <a:ext cx="3144785" cy="256034"/>
-          </a:xfrm>
-          <a:prstGeom prst="bentConnector3">
-            <a:avLst>
-              <a:gd name="adj1" fmla="val 79804"/>
-            </a:avLst>
-          </a:prstGeom>
-          <a:ln w="28575">
-            <a:solidFill>
-              <a:schemeClr val="tx1"/>
-            </a:solidFill>
-          </a:ln>
-        </p:spPr>
-        <p:style>
-          <a:lnRef idx="1">
-            <a:schemeClr val="accent1"/>
-          </a:lnRef>
-          <a:fillRef idx="0">
-            <a:schemeClr val="accent1"/>
-          </a:fillRef>
-          <a:effectRef idx="0">
-            <a:schemeClr val="accent1"/>
-          </a:effectRef>
-          <a:fontRef idx="minor">
-            <a:schemeClr val="tx1"/>
-          </a:fontRef>
-        </p:style>
-      </p:cxnSp>
-      <p:cxnSp>
-        <p:nvCxnSpPr>
-          <p:cNvPr id="21" name="Connecteur : en angle 20">
-            <a:extLst>
-              <a:ext uri="{FF2B5EF4-FFF2-40B4-BE49-F238E27FC236}">
-                <a16:creationId xmlns:a16="http://schemas.microsoft.com/office/drawing/2014/main" id="{17AD9A32-EF59-00C0-E318-3B873D2683F6}"/>
-              </a:ext>
-            </a:extLst>
-          </p:cNvPr>
-          <p:cNvCxnSpPr>
-            <a:cxnSpLocks/>
-          </p:cNvCxnSpPr>
-          <p:nvPr/>
-        </p:nvCxnSpPr>
-        <p:spPr>
-          <a:xfrm rot="10800000">
-            <a:off x="7187184" y="1694687"/>
-            <a:ext cx="590562" cy="347472"/>
-          </a:xfrm>
-          <a:prstGeom prst="bentConnector3">
-            <a:avLst>
-              <a:gd name="adj1" fmla="val 50000"/>
-            </a:avLst>
-          </a:prstGeom>
-          <a:ln w="28575">
-            <a:solidFill>
-              <a:schemeClr val="tx1"/>
-            </a:solidFill>
-          </a:ln>
-        </p:spPr>
-        <p:style>
-          <a:lnRef idx="1">
-            <a:schemeClr val="accent1"/>
-          </a:lnRef>
-          <a:fillRef idx="0">
-            <a:schemeClr val="accent1"/>
-          </a:fillRef>
-          <a:effectRef idx="0">
-            <a:schemeClr val="accent1"/>
-          </a:effectRef>
-          <a:fontRef idx="minor">
-            <a:schemeClr val="tx1"/>
-          </a:fontRef>
-        </p:style>
-      </p:cxnSp>
-      <p:cxnSp>
-        <p:nvCxnSpPr>
-          <p:cNvPr id="46" name="Connecteur : en angle 45">
-            <a:extLst>
-              <a:ext uri="{FF2B5EF4-FFF2-40B4-BE49-F238E27FC236}">
-                <a16:creationId xmlns:a16="http://schemas.microsoft.com/office/drawing/2014/main" id="{9DAE1BC9-4184-274D-DF7B-71B4BC030847}"/>
-              </a:ext>
-            </a:extLst>
-          </p:cNvPr>
-          <p:cNvCxnSpPr>
-            <a:cxnSpLocks/>
-          </p:cNvCxnSpPr>
-          <p:nvPr/>
-        </p:nvCxnSpPr>
-        <p:spPr>
-          <a:xfrm rot="16200000" flipV="1">
-            <a:off x="7194239" y="1982911"/>
-            <a:ext cx="871730" cy="295278"/>
-          </a:xfrm>
-          <a:prstGeom prst="bentConnector3">
-            <a:avLst>
-              <a:gd name="adj1" fmla="val -1748"/>
-            </a:avLst>
-          </a:prstGeom>
-          <a:ln w="28575">
-            <a:solidFill>
-              <a:schemeClr val="tx1"/>
-            </a:solidFill>
-          </a:ln>
-        </p:spPr>
-        <p:style>
-          <a:lnRef idx="1">
-            <a:schemeClr val="accent1"/>
-          </a:lnRef>
-          <a:fillRef idx="0">
-            <a:schemeClr val="accent1"/>
-          </a:fillRef>
-          <a:effectRef idx="0">
-            <a:schemeClr val="accent1"/>
-          </a:effectRef>
-          <a:fontRef idx="minor">
-            <a:schemeClr val="tx1"/>
-          </a:fontRef>
-        </p:style>
-      </p:cxnSp>
-      <p:cxnSp>
-        <p:nvCxnSpPr>
-          <p:cNvPr id="51" name="Connecteur : en angle 50">
-            <a:extLst>
-              <a:ext uri="{FF2B5EF4-FFF2-40B4-BE49-F238E27FC236}">
-                <a16:creationId xmlns:a16="http://schemas.microsoft.com/office/drawing/2014/main" id="{0BBF572C-32D1-FB1D-2E75-06FF5514F8B5}"/>
-              </a:ext>
-            </a:extLst>
-          </p:cNvPr>
-          <p:cNvCxnSpPr>
-            <a:cxnSpLocks/>
-          </p:cNvCxnSpPr>
-          <p:nvPr/>
-        </p:nvCxnSpPr>
-        <p:spPr>
-          <a:xfrm rot="16200000" flipV="1">
-            <a:off x="6457217" y="3536802"/>
-            <a:ext cx="2357070" cy="306571"/>
-          </a:xfrm>
-          <a:prstGeom prst="bentConnector3">
-            <a:avLst>
-              <a:gd name="adj1" fmla="val 344"/>
-            </a:avLst>
-          </a:prstGeom>
-          <a:ln w="28575">
-            <a:solidFill>
-              <a:schemeClr val="tx1"/>
-            </a:solidFill>
-          </a:ln>
-        </p:spPr>
-        <p:style>
-          <a:lnRef idx="1">
-            <a:schemeClr val="accent1"/>
-          </a:lnRef>
-          <a:fillRef idx="0">
-            <a:schemeClr val="accent1"/>
-          </a:fillRef>
-          <a:effectRef idx="0">
-            <a:schemeClr val="accent1"/>
-          </a:effectRef>
-          <a:fontRef idx="minor">
-            <a:schemeClr val="tx1"/>
-          </a:fontRef>
-        </p:style>
-      </p:cxnSp>
-      <p:sp>
-        <p:nvSpPr>
-          <p:cNvPr id="61" name="Ellipse 60">
-            <a:extLst>
-              <a:ext uri="{FF2B5EF4-FFF2-40B4-BE49-F238E27FC236}">
-                <a16:creationId xmlns:a16="http://schemas.microsoft.com/office/drawing/2014/main" id="{D8B4858F-6114-DE06-4F8A-FA17D8B35BC5}"/>
-              </a:ext>
-            </a:extLst>
-          </p:cNvPr>
-          <p:cNvSpPr/>
-          <p:nvPr/>
-        </p:nvSpPr>
-        <p:spPr>
-          <a:xfrm>
-            <a:off x="7421502" y="1999371"/>
-            <a:ext cx="121919" cy="125469"/>
-          </a:xfrm>
-          <a:prstGeom prst="ellipse">
-            <a:avLst/>
-          </a:prstGeom>
-          <a:solidFill>
-            <a:schemeClr val="tx1"/>
-          </a:solidFill>
-          <a:ln>
-            <a:noFill/>
-          </a:ln>
-        </p:spPr>
-        <p:style>
-          <a:lnRef idx="2">
-            <a:schemeClr val="accent1">
-              <a:shade val="15000"/>
-            </a:schemeClr>
-          </a:lnRef>
-          <a:fillRef idx="1">
-            <a:schemeClr val="accent1"/>
-          </a:fillRef>
-          <a:effectRef idx="0">
-            <a:schemeClr val="accent1"/>
-          </a:effectRef>
-          <a:fontRef idx="minor">
-            <a:schemeClr val="lt1"/>
-          </a:fontRef>
-        </p:style>
-        <p:txBody>
-          <a:bodyPr rtlCol="0" anchor="ctr"/>
-          <a:lstStyle>
-            <a:defPPr>
-              <a:defRPr lang="fr-FR"/>
-            </a:defPPr>
-            <a:lvl1pPr marL="0" algn="l" defTabSz="914400" rtl="0" eaLnBrk="1" latinLnBrk="0" hangingPunct="1">
-              <a:defRPr sz="1800" kern="1200">
-                <a:solidFill>
-                  <a:schemeClr val="lt1"/>
-                </a:solidFill>
-                <a:latin typeface="+mn-lt"/>
-                <a:ea typeface="+mn-ea"/>
-                <a:cs typeface="+mn-cs"/>
-              </a:defRPr>
-            </a:lvl1pPr>
-            <a:lvl2pPr marL="457200" algn="l" defTabSz="914400" rtl="0" eaLnBrk="1" latinLnBrk="0" hangingPunct="1">
-              <a:defRPr sz="1800" kern="1200">
-                <a:solidFill>
-                  <a:schemeClr val="lt1"/>
-                </a:solidFill>
-                <a:latin typeface="+mn-lt"/>
-                <a:ea typeface="+mn-ea"/>
-                <a:cs typeface="+mn-cs"/>
-              </a:defRPr>
-            </a:lvl2pPr>
-            <a:lvl3pPr marL="914400" algn="l" defTabSz="914400" rtl="0" eaLnBrk="1" latinLnBrk="0" hangingPunct="1">
-              <a:defRPr sz="1800" kern="1200">
-                <a:solidFill>
-                  <a:schemeClr val="lt1"/>
-                </a:solidFill>
-                <a:latin typeface="+mn-lt"/>
-                <a:ea typeface="+mn-ea"/>
-                <a:cs typeface="+mn-cs"/>
-              </a:defRPr>
-            </a:lvl3pPr>
-            <a:lvl4pPr marL="1371600" algn="l" defTabSz="914400" rtl="0" eaLnBrk="1" latinLnBrk="0" hangingPunct="1">
-              <a:defRPr sz="1800" kern="1200">
-                <a:solidFill>
-                  <a:schemeClr val="lt1"/>
-                </a:solidFill>
-                <a:latin typeface="+mn-lt"/>
-                <a:ea typeface="+mn-ea"/>
-                <a:cs typeface="+mn-cs"/>
-              </a:defRPr>
-            </a:lvl4pPr>
-            <a:lvl5pPr marL="1828800" algn="l" defTabSz="914400" rtl="0" eaLnBrk="1" latinLnBrk="0" hangingPunct="1">
-              <a:defRPr sz="1800" kern="1200">
-                <a:solidFill>
-                  <a:schemeClr val="lt1"/>
-                </a:solidFill>
-                <a:latin typeface="+mn-lt"/>
-                <a:ea typeface="+mn-ea"/>
-                <a:cs typeface="+mn-cs"/>
-              </a:defRPr>
-            </a:lvl5pPr>
-            <a:lvl6pPr marL="2286000" algn="l" defTabSz="914400" rtl="0" eaLnBrk="1" latinLnBrk="0" hangingPunct="1">
-              <a:defRPr sz="1800" kern="1200">
-                <a:solidFill>
-                  <a:schemeClr val="lt1"/>
-                </a:solidFill>
-                <a:latin typeface="+mn-lt"/>
-                <a:ea typeface="+mn-ea"/>
-                <a:cs typeface="+mn-cs"/>
-              </a:defRPr>
-            </a:lvl6pPr>
-            <a:lvl7pPr marL="2743200" algn="l" defTabSz="914400" rtl="0" eaLnBrk="1" latinLnBrk="0" hangingPunct="1">
-              <a:defRPr sz="1800" kern="1200">
-                <a:solidFill>
-                  <a:schemeClr val="lt1"/>
-                </a:solidFill>
-                <a:latin typeface="+mn-lt"/>
-                <a:ea typeface="+mn-ea"/>
-                <a:cs typeface="+mn-cs"/>
-              </a:defRPr>
-            </a:lvl7pPr>
-            <a:lvl8pPr marL="3200400" algn="l" defTabSz="914400" rtl="0" eaLnBrk="1" latinLnBrk="0" hangingPunct="1">
-              <a:defRPr sz="1800" kern="1200">
-                <a:solidFill>
-                  <a:schemeClr val="lt1"/>
-                </a:solidFill>
-                <a:latin typeface="+mn-lt"/>
-                <a:ea typeface="+mn-ea"/>
-                <a:cs typeface="+mn-cs"/>
-              </a:defRPr>
-            </a:lvl8pPr>
-            <a:lvl9pPr marL="3657600" algn="l" defTabSz="914400" rtl="0" eaLnBrk="1" latinLnBrk="0" hangingPunct="1">
-              <a:defRPr sz="1800" kern="1200">
-                <a:solidFill>
-                  <a:schemeClr val="lt1"/>
-                </a:solidFill>
-                <a:latin typeface="+mn-lt"/>
-                <a:ea typeface="+mn-ea"/>
-                <a:cs typeface="+mn-cs"/>
-              </a:defRPr>
-            </a:lvl9pPr>
-          </a:lstStyle>
-          <a:p>
-            <a:pPr algn="ctr"/>
-            <a:endParaRPr lang="fr-FR"/>
-          </a:p>
-        </p:txBody>
-      </p:sp>
-      <p:sp>
-        <p:nvSpPr>
-          <p:cNvPr id="63" name="Ellipse 62">
-            <a:extLst>
-              <a:ext uri="{FF2B5EF4-FFF2-40B4-BE49-F238E27FC236}">
-                <a16:creationId xmlns:a16="http://schemas.microsoft.com/office/drawing/2014/main" id="{7DC105F4-3152-A172-083F-F2105F2F9BA1}"/>
-              </a:ext>
-            </a:extLst>
-          </p:cNvPr>
-          <p:cNvSpPr/>
-          <p:nvPr/>
-        </p:nvSpPr>
-        <p:spPr>
-          <a:xfrm>
-            <a:off x="7421502" y="1631950"/>
-            <a:ext cx="121919" cy="125469"/>
-          </a:xfrm>
-          <a:prstGeom prst="ellipse">
-            <a:avLst/>
-          </a:prstGeom>
-          <a:solidFill>
-            <a:schemeClr val="tx1"/>
-          </a:solidFill>
-          <a:ln>
-            <a:noFill/>
-          </a:ln>
-        </p:spPr>
-        <p:style>
-          <a:lnRef idx="2">
-            <a:schemeClr val="accent1">
-              <a:shade val="15000"/>
-            </a:schemeClr>
-          </a:lnRef>
-          <a:fillRef idx="1">
-            <a:schemeClr val="accent1"/>
-          </a:fillRef>
-          <a:effectRef idx="0">
-            <a:schemeClr val="accent1"/>
-          </a:effectRef>
-          <a:fontRef idx="minor">
-            <a:schemeClr val="lt1"/>
-          </a:fontRef>
-        </p:style>
-        <p:txBody>
-          <a:bodyPr rtlCol="0" anchor="ctr"/>
-          <a:lstStyle>
-            <a:defPPr>
-              <a:defRPr lang="fr-FR"/>
-            </a:defPPr>
-            <a:lvl1pPr marL="0" algn="l" defTabSz="914400" rtl="0" eaLnBrk="1" latinLnBrk="0" hangingPunct="1">
-              <a:defRPr sz="1800" kern="1200">
-                <a:solidFill>
-                  <a:schemeClr val="lt1"/>
-                </a:solidFill>
-                <a:latin typeface="+mn-lt"/>
-                <a:ea typeface="+mn-ea"/>
-                <a:cs typeface="+mn-cs"/>
-              </a:defRPr>
-            </a:lvl1pPr>
-            <a:lvl2pPr marL="457200" algn="l" defTabSz="914400" rtl="0" eaLnBrk="1" latinLnBrk="0" hangingPunct="1">
-              <a:defRPr sz="1800" kern="1200">
-                <a:solidFill>
-                  <a:schemeClr val="lt1"/>
-                </a:solidFill>
-                <a:latin typeface="+mn-lt"/>
-                <a:ea typeface="+mn-ea"/>
-                <a:cs typeface="+mn-cs"/>
-              </a:defRPr>
-            </a:lvl2pPr>
-            <a:lvl3pPr marL="914400" algn="l" defTabSz="914400" rtl="0" eaLnBrk="1" latinLnBrk="0" hangingPunct="1">
-              <a:defRPr sz="1800" kern="1200">
-                <a:solidFill>
-                  <a:schemeClr val="lt1"/>
-                </a:solidFill>
-                <a:latin typeface="+mn-lt"/>
-                <a:ea typeface="+mn-ea"/>
-                <a:cs typeface="+mn-cs"/>
-              </a:defRPr>
-            </a:lvl3pPr>
-            <a:lvl4pPr marL="1371600" algn="l" defTabSz="914400" rtl="0" eaLnBrk="1" latinLnBrk="0" hangingPunct="1">
-              <a:defRPr sz="1800" kern="1200">
-                <a:solidFill>
-                  <a:schemeClr val="lt1"/>
-                </a:solidFill>
-                <a:latin typeface="+mn-lt"/>
-                <a:ea typeface="+mn-ea"/>
-                <a:cs typeface="+mn-cs"/>
-              </a:defRPr>
-            </a:lvl4pPr>
-            <a:lvl5pPr marL="1828800" algn="l" defTabSz="914400" rtl="0" eaLnBrk="1" latinLnBrk="0" hangingPunct="1">
-              <a:defRPr sz="1800" kern="1200">
-                <a:solidFill>
-                  <a:schemeClr val="lt1"/>
-                </a:solidFill>
-                <a:latin typeface="+mn-lt"/>
-                <a:ea typeface="+mn-ea"/>
-                <a:cs typeface="+mn-cs"/>
-              </a:defRPr>
-            </a:lvl5pPr>
-            <a:lvl6pPr marL="2286000" algn="l" defTabSz="914400" rtl="0" eaLnBrk="1" latinLnBrk="0" hangingPunct="1">
-              <a:defRPr sz="1800" kern="1200">
-                <a:solidFill>
-                  <a:schemeClr val="lt1"/>
-                </a:solidFill>
-                <a:latin typeface="+mn-lt"/>
-                <a:ea typeface="+mn-ea"/>
-                <a:cs typeface="+mn-cs"/>
-              </a:defRPr>
-            </a:lvl6pPr>
-            <a:lvl7pPr marL="2743200" algn="l" defTabSz="914400" rtl="0" eaLnBrk="1" latinLnBrk="0" hangingPunct="1">
-              <a:defRPr sz="1800" kern="1200">
-                <a:solidFill>
-                  <a:schemeClr val="lt1"/>
-                </a:solidFill>
-                <a:latin typeface="+mn-lt"/>
-                <a:ea typeface="+mn-ea"/>
-                <a:cs typeface="+mn-cs"/>
-              </a:defRPr>
-            </a:lvl7pPr>
-            <a:lvl8pPr marL="3200400" algn="l" defTabSz="914400" rtl="0" eaLnBrk="1" latinLnBrk="0" hangingPunct="1">
-              <a:defRPr sz="1800" kern="1200">
-                <a:solidFill>
-                  <a:schemeClr val="lt1"/>
-                </a:solidFill>
-                <a:latin typeface="+mn-lt"/>
-                <a:ea typeface="+mn-ea"/>
-                <a:cs typeface="+mn-cs"/>
-              </a:defRPr>
-            </a:lvl8pPr>
-            <a:lvl9pPr marL="3657600" algn="l" defTabSz="914400" rtl="0" eaLnBrk="1" latinLnBrk="0" hangingPunct="1">
-              <a:defRPr sz="1800" kern="1200">
-                <a:solidFill>
-                  <a:schemeClr val="lt1"/>
-                </a:solidFill>
-                <a:latin typeface="+mn-lt"/>
-                <a:ea typeface="+mn-ea"/>
-                <a:cs typeface="+mn-cs"/>
-              </a:defRPr>
-            </a:lvl9pPr>
-          </a:lstStyle>
-          <a:p>
-            <a:pPr algn="ctr"/>
-            <a:endParaRPr lang="fr-FR"/>
-          </a:p>
-        </p:txBody>
-      </p:sp>
-      <p:cxnSp>
-        <p:nvCxnSpPr>
-          <p:cNvPr id="64" name="Connecteur : en angle 63">
-            <a:extLst>
-              <a:ext uri="{FF2B5EF4-FFF2-40B4-BE49-F238E27FC236}">
-                <a16:creationId xmlns:a16="http://schemas.microsoft.com/office/drawing/2014/main" id="{5CA227E4-F22E-27FD-97AE-718E9B776CC5}"/>
-              </a:ext>
-            </a:extLst>
-          </p:cNvPr>
-          <p:cNvCxnSpPr>
-            <a:cxnSpLocks/>
-          </p:cNvCxnSpPr>
-          <p:nvPr/>
-        </p:nvCxnSpPr>
-        <p:spPr>
-          <a:xfrm rot="10800000" flipV="1">
-            <a:off x="4655550" y="1847028"/>
-            <a:ext cx="3122192" cy="2664012"/>
-          </a:xfrm>
-          <a:prstGeom prst="bentConnector3">
-            <a:avLst>
-              <a:gd name="adj1" fmla="val 75431"/>
-            </a:avLst>
-          </a:prstGeom>
-          <a:ln w="28575">
-            <a:solidFill>
-              <a:srgbClr val="C00000"/>
-            </a:solidFill>
-          </a:ln>
-        </p:spPr>
-        <p:style>
-          <a:lnRef idx="1">
-            <a:schemeClr val="accent1"/>
-          </a:lnRef>
-          <a:fillRef idx="0">
-            <a:schemeClr val="accent1"/>
-          </a:fillRef>
-          <a:effectRef idx="0">
-            <a:schemeClr val="accent1"/>
-          </a:effectRef>
-          <a:fontRef idx="minor">
-            <a:schemeClr val="tx1"/>
-          </a:fontRef>
-        </p:style>
-      </p:cxnSp>
-      <p:cxnSp>
-        <p:nvCxnSpPr>
-          <p:cNvPr id="69" name="Connecteur : en angle 68">
-            <a:extLst>
-              <a:ext uri="{FF2B5EF4-FFF2-40B4-BE49-F238E27FC236}">
-                <a16:creationId xmlns:a16="http://schemas.microsoft.com/office/drawing/2014/main" id="{2828A225-5755-D770-FAD5-91F9601F5909}"/>
-              </a:ext>
-            </a:extLst>
-          </p:cNvPr>
-          <p:cNvCxnSpPr>
-            <a:cxnSpLocks/>
-          </p:cNvCxnSpPr>
-          <p:nvPr/>
-        </p:nvCxnSpPr>
-        <p:spPr>
-          <a:xfrm rot="10800000">
-            <a:off x="4773169" y="4511041"/>
-            <a:ext cx="3027167" cy="134053"/>
-          </a:xfrm>
-          <a:prstGeom prst="bentConnector3">
-            <a:avLst>
-              <a:gd name="adj1" fmla="val 78193"/>
-            </a:avLst>
-          </a:prstGeom>
-          <a:ln w="28575">
-            <a:solidFill>
-              <a:srgbClr val="C00000"/>
-            </a:solidFill>
-          </a:ln>
-        </p:spPr>
-        <p:style>
-          <a:lnRef idx="1">
-            <a:schemeClr val="accent1"/>
-          </a:lnRef>
-          <a:fillRef idx="0">
-            <a:schemeClr val="accent1"/>
-          </a:fillRef>
-          <a:effectRef idx="0">
-            <a:schemeClr val="accent1"/>
-          </a:effectRef>
-          <a:fontRef idx="minor">
-            <a:schemeClr val="tx1"/>
-          </a:fontRef>
-        </p:style>
-      </p:cxnSp>
-      <p:cxnSp>
-        <p:nvCxnSpPr>
-          <p:cNvPr id="75" name="Connecteur : en angle 74">
-            <a:extLst>
-              <a:ext uri="{FF2B5EF4-FFF2-40B4-BE49-F238E27FC236}">
-                <a16:creationId xmlns:a16="http://schemas.microsoft.com/office/drawing/2014/main" id="{B003E5F4-8821-A960-BFE3-42EC4612303A}"/>
-              </a:ext>
-            </a:extLst>
-          </p:cNvPr>
-          <p:cNvCxnSpPr>
-            <a:cxnSpLocks/>
-          </p:cNvCxnSpPr>
-          <p:nvPr/>
-        </p:nvCxnSpPr>
-        <p:spPr>
-          <a:xfrm rot="10800000">
-            <a:off x="2743201" y="713694"/>
-            <a:ext cx="5034551" cy="1703369"/>
-          </a:xfrm>
-          <a:prstGeom prst="bentConnector3">
-            <a:avLst>
-              <a:gd name="adj1" fmla="val 13221"/>
-            </a:avLst>
-          </a:prstGeom>
-          <a:ln w="28575">
-            <a:solidFill>
-              <a:schemeClr val="accent1"/>
-            </a:solidFill>
-          </a:ln>
-        </p:spPr>
-        <p:style>
-          <a:lnRef idx="1">
-            <a:schemeClr val="accent1"/>
-          </a:lnRef>
-          <a:fillRef idx="0">
-            <a:schemeClr val="accent1"/>
-          </a:fillRef>
-          <a:effectRef idx="0">
-            <a:schemeClr val="accent1"/>
-          </a:effectRef>
-          <a:fontRef idx="minor">
-            <a:schemeClr val="tx1"/>
-          </a:fontRef>
-        </p:style>
-      </p:cxnSp>
-      <p:cxnSp>
-        <p:nvCxnSpPr>
-          <p:cNvPr id="77" name="Connecteur : en angle 76">
-            <a:extLst>
-              <a:ext uri="{FF2B5EF4-FFF2-40B4-BE49-F238E27FC236}">
-                <a16:creationId xmlns:a16="http://schemas.microsoft.com/office/drawing/2014/main" id="{801449BE-5FAA-2B29-7BEA-DA92D5393F36}"/>
-              </a:ext>
-            </a:extLst>
-          </p:cNvPr>
-          <p:cNvCxnSpPr>
-            <a:cxnSpLocks/>
-          </p:cNvCxnSpPr>
-          <p:nvPr/>
-        </p:nvCxnSpPr>
-        <p:spPr>
-          <a:xfrm rot="16200000" flipH="1">
-            <a:off x="2449938" y="1006957"/>
-            <a:ext cx="1043724" cy="457200"/>
-          </a:xfrm>
-          <a:prstGeom prst="bentConnector3">
-            <a:avLst>
-              <a:gd name="adj1" fmla="val 98185"/>
-            </a:avLst>
-          </a:prstGeom>
-          <a:ln w="28575">
-            <a:solidFill>
-              <a:schemeClr val="accent1"/>
-            </a:solidFill>
-          </a:ln>
-        </p:spPr>
-        <p:style>
-          <a:lnRef idx="1">
-            <a:schemeClr val="accent1"/>
-          </a:lnRef>
-          <a:fillRef idx="0">
-            <a:schemeClr val="accent1"/>
-          </a:fillRef>
-          <a:effectRef idx="0">
-            <a:schemeClr val="accent1"/>
-          </a:effectRef>
-          <a:fontRef idx="minor">
-            <a:schemeClr val="tx1"/>
-          </a:fontRef>
-        </p:style>
-      </p:cxnSp>
-      <p:sp>
-        <p:nvSpPr>
-          <p:cNvPr id="79" name="Ellipse 78">
-            <a:extLst>
-              <a:ext uri="{FF2B5EF4-FFF2-40B4-BE49-F238E27FC236}">
-                <a16:creationId xmlns:a16="http://schemas.microsoft.com/office/drawing/2014/main" id="{9C748B13-29FD-F4B9-0CAF-4175C79092C3}"/>
-              </a:ext>
-            </a:extLst>
-          </p:cNvPr>
-          <p:cNvSpPr/>
-          <p:nvPr/>
-        </p:nvSpPr>
-        <p:spPr>
-          <a:xfrm>
-            <a:off x="5366545" y="4434600"/>
-            <a:ext cx="121919" cy="125469"/>
-          </a:xfrm>
-          <a:prstGeom prst="ellipse">
-            <a:avLst/>
-          </a:prstGeom>
-          <a:solidFill>
-            <a:srgbClr val="C00000"/>
-          </a:solidFill>
-          <a:ln>
-            <a:noFill/>
-          </a:ln>
-        </p:spPr>
-        <p:style>
-          <a:lnRef idx="2">
-            <a:schemeClr val="accent1">
-              <a:shade val="15000"/>
-            </a:schemeClr>
-          </a:lnRef>
-          <a:fillRef idx="1">
-            <a:schemeClr val="accent1"/>
-          </a:fillRef>
-          <a:effectRef idx="0">
-            <a:schemeClr val="accent1"/>
-          </a:effectRef>
-          <a:fontRef idx="minor">
-            <a:schemeClr val="lt1"/>
-          </a:fontRef>
-        </p:style>
-        <p:txBody>
-          <a:bodyPr rtlCol="0" anchor="ctr"/>
-          <a:lstStyle>
-            <a:defPPr>
-              <a:defRPr lang="fr-FR"/>
-            </a:defPPr>
-            <a:lvl1pPr marL="0" algn="l" defTabSz="914400" rtl="0" eaLnBrk="1" latinLnBrk="0" hangingPunct="1">
-              <a:defRPr sz="1800" kern="1200">
-                <a:solidFill>
-                  <a:schemeClr val="lt1"/>
-                </a:solidFill>
-                <a:latin typeface="+mn-lt"/>
-                <a:ea typeface="+mn-ea"/>
-                <a:cs typeface="+mn-cs"/>
-              </a:defRPr>
-            </a:lvl1pPr>
-            <a:lvl2pPr marL="457200" algn="l" defTabSz="914400" rtl="0" eaLnBrk="1" latinLnBrk="0" hangingPunct="1">
-              <a:defRPr sz="1800" kern="1200">
-                <a:solidFill>
-                  <a:schemeClr val="lt1"/>
-                </a:solidFill>
-                <a:latin typeface="+mn-lt"/>
-                <a:ea typeface="+mn-ea"/>
-                <a:cs typeface="+mn-cs"/>
-              </a:defRPr>
-            </a:lvl2pPr>
-            <a:lvl3pPr marL="914400" algn="l" defTabSz="914400" rtl="0" eaLnBrk="1" latinLnBrk="0" hangingPunct="1">
-              <a:defRPr sz="1800" kern="1200">
-                <a:solidFill>
-                  <a:schemeClr val="lt1"/>
-                </a:solidFill>
-                <a:latin typeface="+mn-lt"/>
-                <a:ea typeface="+mn-ea"/>
-                <a:cs typeface="+mn-cs"/>
-              </a:defRPr>
-            </a:lvl3pPr>
-            <a:lvl4pPr marL="1371600" algn="l" defTabSz="914400" rtl="0" eaLnBrk="1" latinLnBrk="0" hangingPunct="1">
-              <a:defRPr sz="1800" kern="1200">
-                <a:solidFill>
-                  <a:schemeClr val="lt1"/>
-                </a:solidFill>
-                <a:latin typeface="+mn-lt"/>
-                <a:ea typeface="+mn-ea"/>
-                <a:cs typeface="+mn-cs"/>
-              </a:defRPr>
-            </a:lvl4pPr>
-            <a:lvl5pPr marL="1828800" algn="l" defTabSz="914400" rtl="0" eaLnBrk="1" latinLnBrk="0" hangingPunct="1">
-              <a:defRPr sz="1800" kern="1200">
-                <a:solidFill>
-                  <a:schemeClr val="lt1"/>
-                </a:solidFill>
-                <a:latin typeface="+mn-lt"/>
-                <a:ea typeface="+mn-ea"/>
-                <a:cs typeface="+mn-cs"/>
-              </a:defRPr>
-            </a:lvl5pPr>
-            <a:lvl6pPr marL="2286000" algn="l" defTabSz="914400" rtl="0" eaLnBrk="1" latinLnBrk="0" hangingPunct="1">
-              <a:defRPr sz="1800" kern="1200">
-                <a:solidFill>
-                  <a:schemeClr val="lt1"/>
-                </a:solidFill>
-                <a:latin typeface="+mn-lt"/>
-                <a:ea typeface="+mn-ea"/>
-                <a:cs typeface="+mn-cs"/>
-              </a:defRPr>
-            </a:lvl6pPr>
-            <a:lvl7pPr marL="2743200" algn="l" defTabSz="914400" rtl="0" eaLnBrk="1" latinLnBrk="0" hangingPunct="1">
-              <a:defRPr sz="1800" kern="1200">
-                <a:solidFill>
-                  <a:schemeClr val="lt1"/>
-                </a:solidFill>
-                <a:latin typeface="+mn-lt"/>
-                <a:ea typeface="+mn-ea"/>
-                <a:cs typeface="+mn-cs"/>
-              </a:defRPr>
-            </a:lvl7pPr>
-            <a:lvl8pPr marL="3200400" algn="l" defTabSz="914400" rtl="0" eaLnBrk="1" latinLnBrk="0" hangingPunct="1">
-              <a:defRPr sz="1800" kern="1200">
-                <a:solidFill>
-                  <a:schemeClr val="lt1"/>
-                </a:solidFill>
-                <a:latin typeface="+mn-lt"/>
-                <a:ea typeface="+mn-ea"/>
-                <a:cs typeface="+mn-cs"/>
-              </a:defRPr>
-            </a:lvl8pPr>
-            <a:lvl9pPr marL="3657600" algn="l" defTabSz="914400" rtl="0" eaLnBrk="1" latinLnBrk="0" hangingPunct="1">
-              <a:defRPr sz="1800" kern="1200">
-                <a:solidFill>
-                  <a:schemeClr val="lt1"/>
-                </a:solidFill>
-                <a:latin typeface="+mn-lt"/>
-                <a:ea typeface="+mn-ea"/>
-                <a:cs typeface="+mn-cs"/>
-              </a:defRPr>
-            </a:lvl9pPr>
-          </a:lstStyle>
-          <a:p>
-            <a:pPr algn="ctr"/>
-            <a:endParaRPr lang="fr-FR"/>
-          </a:p>
-        </p:txBody>
-      </p:sp>
-      <p:cxnSp>
-        <p:nvCxnSpPr>
-          <p:cNvPr id="89" name="Connecteur : en angle 88">
-            <a:extLst>
-              <a:ext uri="{FF2B5EF4-FFF2-40B4-BE49-F238E27FC236}">
-                <a16:creationId xmlns:a16="http://schemas.microsoft.com/office/drawing/2014/main" id="{7EA4A7A5-957F-5FB1-FE07-9CA1CBB01FDC}"/>
-              </a:ext>
-            </a:extLst>
-          </p:cNvPr>
-          <p:cNvCxnSpPr>
-            <a:cxnSpLocks/>
-          </p:cNvCxnSpPr>
-          <p:nvPr/>
-        </p:nvCxnSpPr>
-        <p:spPr>
-          <a:xfrm rot="10800000">
-            <a:off x="2575561" y="568286"/>
-            <a:ext cx="5224777" cy="2221071"/>
-          </a:xfrm>
-          <a:prstGeom prst="bentConnector3">
-            <a:avLst>
-              <a:gd name="adj1" fmla="val 9747"/>
-            </a:avLst>
-          </a:prstGeom>
-          <a:ln w="28575">
-            <a:solidFill>
-              <a:schemeClr val="accent1"/>
-            </a:solidFill>
-          </a:ln>
-        </p:spPr>
-        <p:style>
-          <a:lnRef idx="1">
-            <a:schemeClr val="accent1"/>
-          </a:lnRef>
-          <a:fillRef idx="0">
-            <a:schemeClr val="accent1"/>
-          </a:fillRef>
-          <a:effectRef idx="0">
-            <a:schemeClr val="accent1"/>
-          </a:effectRef>
-          <a:fontRef idx="minor">
-            <a:schemeClr val="tx1"/>
-          </a:fontRef>
-        </p:style>
-      </p:cxnSp>
-      <p:cxnSp>
-        <p:nvCxnSpPr>
-          <p:cNvPr id="90" name="Connecteur : en angle 89">
-            <a:extLst>
-              <a:ext uri="{FF2B5EF4-FFF2-40B4-BE49-F238E27FC236}">
-                <a16:creationId xmlns:a16="http://schemas.microsoft.com/office/drawing/2014/main" id="{5C475C29-6100-378D-1BAD-A7BD7C16B7B1}"/>
-              </a:ext>
-            </a:extLst>
-          </p:cNvPr>
-          <p:cNvCxnSpPr>
-            <a:cxnSpLocks/>
-          </p:cNvCxnSpPr>
-          <p:nvPr/>
-        </p:nvCxnSpPr>
-        <p:spPr>
-          <a:xfrm rot="16200000" flipH="1">
-            <a:off x="2196757" y="947078"/>
-            <a:ext cx="1382439" cy="624848"/>
-          </a:xfrm>
-          <a:prstGeom prst="bentConnector3">
-            <a:avLst>
-              <a:gd name="adj1" fmla="val 100159"/>
-            </a:avLst>
-          </a:prstGeom>
-          <a:ln w="28575">
-            <a:solidFill>
-              <a:schemeClr val="accent1"/>
-            </a:solidFill>
-          </a:ln>
-        </p:spPr>
-        <p:style>
-          <a:lnRef idx="1">
-            <a:schemeClr val="accent1"/>
-          </a:lnRef>
-          <a:fillRef idx="0">
-            <a:schemeClr val="accent1"/>
-          </a:fillRef>
-          <a:effectRef idx="0">
-            <a:schemeClr val="accent1"/>
-          </a:effectRef>
-          <a:fontRef idx="minor">
-            <a:schemeClr val="tx1"/>
-          </a:fontRef>
-        </p:style>
-      </p:cxnSp>
-      <p:cxnSp>
-        <p:nvCxnSpPr>
-          <p:cNvPr id="98" name="Connecteur : en angle 97">
-            <a:extLst>
-              <a:ext uri="{FF2B5EF4-FFF2-40B4-BE49-F238E27FC236}">
-                <a16:creationId xmlns:a16="http://schemas.microsoft.com/office/drawing/2014/main" id="{4A87AB97-5A27-6072-3E6A-7E059967F5D2}"/>
-              </a:ext>
-            </a:extLst>
-          </p:cNvPr>
-          <p:cNvCxnSpPr>
-            <a:cxnSpLocks/>
-          </p:cNvCxnSpPr>
-          <p:nvPr/>
-        </p:nvCxnSpPr>
-        <p:spPr>
-          <a:xfrm rot="10800000" flipV="1">
-            <a:off x="2377748" y="3842363"/>
-            <a:ext cx="5422588" cy="1479289"/>
-          </a:xfrm>
-          <a:prstGeom prst="bentConnector3">
-            <a:avLst>
-              <a:gd name="adj1" fmla="val 40304"/>
-            </a:avLst>
-          </a:prstGeom>
-          <a:ln w="28575">
-            <a:solidFill>
-              <a:schemeClr val="accent1"/>
-            </a:solidFill>
-          </a:ln>
-        </p:spPr>
-        <p:style>
-          <a:lnRef idx="1">
-            <a:schemeClr val="accent1"/>
-          </a:lnRef>
-          <a:fillRef idx="0">
-            <a:schemeClr val="accent1"/>
-          </a:fillRef>
-          <a:effectRef idx="0">
-            <a:schemeClr val="accent1"/>
-          </a:effectRef>
-          <a:fontRef idx="minor">
-            <a:schemeClr val="tx1"/>
-          </a:fontRef>
-        </p:style>
-      </p:cxnSp>
-      <p:cxnSp>
-        <p:nvCxnSpPr>
-          <p:cNvPr id="99" name="Connecteur : en angle 98">
-            <a:extLst>
-              <a:ext uri="{FF2B5EF4-FFF2-40B4-BE49-F238E27FC236}">
-                <a16:creationId xmlns:a16="http://schemas.microsoft.com/office/drawing/2014/main" id="{F24D680C-2288-34FE-012D-455118FA11FB}"/>
-              </a:ext>
-            </a:extLst>
-          </p:cNvPr>
-          <p:cNvCxnSpPr>
-            <a:cxnSpLocks/>
-          </p:cNvCxnSpPr>
-          <p:nvPr/>
-        </p:nvCxnSpPr>
-        <p:spPr>
-          <a:xfrm rot="5400000" flipH="1" flipV="1">
-            <a:off x="1532552" y="3658686"/>
-            <a:ext cx="2513044" cy="822651"/>
-          </a:xfrm>
-          <a:prstGeom prst="bentConnector3">
-            <a:avLst>
-              <a:gd name="adj1" fmla="val 100334"/>
-            </a:avLst>
-          </a:prstGeom>
-          <a:ln w="28575">
-            <a:solidFill>
-              <a:schemeClr val="accent1"/>
-            </a:solidFill>
-          </a:ln>
-        </p:spPr>
-        <p:style>
-          <a:lnRef idx="1">
-            <a:schemeClr val="accent1"/>
-          </a:lnRef>
-          <a:fillRef idx="0">
-            <a:schemeClr val="accent1"/>
-          </a:fillRef>
-          <a:effectRef idx="0">
-            <a:schemeClr val="accent1"/>
-          </a:effectRef>
-          <a:fontRef idx="minor">
-            <a:schemeClr val="tx1"/>
-          </a:fontRef>
-        </p:style>
-      </p:cxnSp>
-      <p:cxnSp>
-        <p:nvCxnSpPr>
-          <p:cNvPr id="119" name="Connecteur : en angle 118">
-            <a:extLst>
-              <a:ext uri="{FF2B5EF4-FFF2-40B4-BE49-F238E27FC236}">
-                <a16:creationId xmlns:a16="http://schemas.microsoft.com/office/drawing/2014/main" id="{E5140667-8DCC-ED91-C885-3CDB84F4638F}"/>
-              </a:ext>
-            </a:extLst>
-          </p:cNvPr>
-          <p:cNvCxnSpPr>
-            <a:cxnSpLocks/>
-          </p:cNvCxnSpPr>
-          <p:nvPr/>
-        </p:nvCxnSpPr>
-        <p:spPr>
-          <a:xfrm rot="10800000" flipV="1">
-            <a:off x="2514603" y="4062970"/>
-            <a:ext cx="5285739" cy="1441190"/>
-          </a:xfrm>
-          <a:prstGeom prst="bentConnector3">
-            <a:avLst>
-              <a:gd name="adj1" fmla="val 38395"/>
-            </a:avLst>
-          </a:prstGeom>
-          <a:ln w="28575">
-            <a:solidFill>
-              <a:schemeClr val="accent1"/>
-            </a:solidFill>
-          </a:ln>
-        </p:spPr>
-        <p:style>
-          <a:lnRef idx="1">
-            <a:schemeClr val="accent1"/>
-          </a:lnRef>
-          <a:fillRef idx="0">
-            <a:schemeClr val="accent1"/>
-          </a:fillRef>
-          <a:effectRef idx="0">
-            <a:schemeClr val="accent1"/>
-          </a:effectRef>
-          <a:fontRef idx="minor">
-            <a:schemeClr val="tx1"/>
-          </a:fontRef>
-        </p:style>
-      </p:cxnSp>
-      <p:cxnSp>
-        <p:nvCxnSpPr>
-          <p:cNvPr id="120" name="Connecteur : en angle 119">
-            <a:extLst>
-              <a:ext uri="{FF2B5EF4-FFF2-40B4-BE49-F238E27FC236}">
-                <a16:creationId xmlns:a16="http://schemas.microsoft.com/office/drawing/2014/main" id="{6B9C1C29-9CE2-C542-0E32-AAFFFC00C4FC}"/>
-              </a:ext>
-            </a:extLst>
-          </p:cNvPr>
-          <p:cNvCxnSpPr>
-            <a:cxnSpLocks/>
-          </p:cNvCxnSpPr>
-          <p:nvPr/>
-        </p:nvCxnSpPr>
-        <p:spPr>
-          <a:xfrm rot="5400000" flipH="1" flipV="1">
-            <a:off x="1831217" y="4112388"/>
-            <a:ext cx="2075160" cy="708386"/>
-          </a:xfrm>
-          <a:prstGeom prst="bentConnector3">
-            <a:avLst>
-              <a:gd name="adj1" fmla="val 100674"/>
-            </a:avLst>
-          </a:prstGeom>
-          <a:ln w="28575">
-            <a:solidFill>
-              <a:schemeClr val="accent1"/>
-            </a:solidFill>
-          </a:ln>
-        </p:spPr>
-        <p:style>
-          <a:lnRef idx="1">
-            <a:schemeClr val="accent1"/>
-          </a:lnRef>
-          <a:fillRef idx="0">
-            <a:schemeClr val="accent1"/>
-          </a:fillRef>
-          <a:effectRef idx="0">
-            <a:schemeClr val="accent1"/>
-          </a:effectRef>
-          <a:fontRef idx="minor">
-            <a:schemeClr val="tx1"/>
-          </a:fontRef>
-        </p:style>
-      </p:cxnSp>
-      <p:cxnSp>
-        <p:nvCxnSpPr>
-          <p:cNvPr id="135" name="Connecteur : en angle 134">
-            <a:extLst>
-              <a:ext uri="{FF2B5EF4-FFF2-40B4-BE49-F238E27FC236}">
-                <a16:creationId xmlns:a16="http://schemas.microsoft.com/office/drawing/2014/main" id="{2B0D09D1-348A-3D1B-8A6E-356478C21C57}"/>
-              </a:ext>
-            </a:extLst>
-          </p:cNvPr>
-          <p:cNvCxnSpPr>
-            <a:cxnSpLocks/>
-          </p:cNvCxnSpPr>
-          <p:nvPr/>
-        </p:nvCxnSpPr>
-        <p:spPr>
-          <a:xfrm rot="10800000" flipV="1">
-            <a:off x="2661550" y="4211071"/>
-            <a:ext cx="5116193" cy="1469041"/>
-          </a:xfrm>
-          <a:prstGeom prst="bentConnector3">
-            <a:avLst>
-              <a:gd name="adj1" fmla="val 36178"/>
-            </a:avLst>
-          </a:prstGeom>
-          <a:ln w="28575">
-            <a:solidFill>
-              <a:schemeClr val="accent1"/>
-            </a:solidFill>
-          </a:ln>
-        </p:spPr>
-        <p:style>
-          <a:lnRef idx="1">
-            <a:schemeClr val="accent1"/>
-          </a:lnRef>
-          <a:fillRef idx="0">
-            <a:schemeClr val="accent1"/>
-          </a:fillRef>
-          <a:effectRef idx="0">
-            <a:schemeClr val="accent1"/>
-          </a:effectRef>
-          <a:fontRef idx="minor">
-            <a:schemeClr val="tx1"/>
-          </a:fontRef>
-        </p:style>
-      </p:cxnSp>
-      <p:cxnSp>
-        <p:nvCxnSpPr>
-          <p:cNvPr id="136" name="Connecteur : en angle 135">
-            <a:extLst>
-              <a:ext uri="{FF2B5EF4-FFF2-40B4-BE49-F238E27FC236}">
-                <a16:creationId xmlns:a16="http://schemas.microsoft.com/office/drawing/2014/main" id="{3E2AA47D-9C77-9F3C-F157-903F2B3EF832}"/>
-              </a:ext>
-            </a:extLst>
-          </p:cNvPr>
-          <p:cNvCxnSpPr>
-            <a:cxnSpLocks/>
-          </p:cNvCxnSpPr>
-          <p:nvPr/>
-        </p:nvCxnSpPr>
-        <p:spPr>
-          <a:xfrm rot="5400000" flipH="1" flipV="1">
-            <a:off x="1909652" y="4404021"/>
-            <a:ext cx="2035445" cy="531651"/>
-          </a:xfrm>
-          <a:prstGeom prst="bentConnector3">
-            <a:avLst>
-              <a:gd name="adj1" fmla="val 100614"/>
-            </a:avLst>
-          </a:prstGeom>
-          <a:ln w="28575">
-            <a:solidFill>
-              <a:schemeClr val="accent1"/>
-            </a:solidFill>
-          </a:ln>
-        </p:spPr>
-        <p:style>
-          <a:lnRef idx="1">
-            <a:schemeClr val="accent1"/>
-          </a:lnRef>
-          <a:fillRef idx="0">
-            <a:schemeClr val="accent1"/>
-          </a:fillRef>
-          <a:effectRef idx="0">
-            <a:schemeClr val="accent1"/>
-          </a:effectRef>
-          <a:fontRef idx="minor">
-            <a:schemeClr val="tx1"/>
-          </a:fontRef>
-        </p:style>
-      </p:cxnSp>
-      <p:cxnSp>
-        <p:nvCxnSpPr>
-          <p:cNvPr id="143" name="Connecteur : en angle 142">
-            <a:extLst>
-              <a:ext uri="{FF2B5EF4-FFF2-40B4-BE49-F238E27FC236}">
-                <a16:creationId xmlns:a16="http://schemas.microsoft.com/office/drawing/2014/main" id="{FE61C6AA-68EB-ED34-9329-D2193E26DCE8}"/>
-              </a:ext>
-            </a:extLst>
-          </p:cNvPr>
-          <p:cNvCxnSpPr>
-            <a:cxnSpLocks/>
-          </p:cNvCxnSpPr>
-          <p:nvPr/>
-        </p:nvCxnSpPr>
-        <p:spPr>
-          <a:xfrm rot="10800000" flipV="1">
-            <a:off x="2811668" y="4398417"/>
-            <a:ext cx="4988668" cy="1445776"/>
-          </a:xfrm>
-          <a:prstGeom prst="bentConnector3">
-            <a:avLst>
-              <a:gd name="adj1" fmla="val 34237"/>
-            </a:avLst>
-          </a:prstGeom>
-          <a:ln w="28575">
-            <a:solidFill>
-              <a:schemeClr val="accent1"/>
-            </a:solidFill>
-          </a:ln>
-        </p:spPr>
-        <p:style>
-          <a:lnRef idx="1">
-            <a:schemeClr val="accent1"/>
-          </a:lnRef>
-          <a:fillRef idx="0">
-            <a:schemeClr val="accent1"/>
-          </a:fillRef>
-          <a:effectRef idx="0">
-            <a:schemeClr val="accent1"/>
-          </a:effectRef>
-          <a:fontRef idx="minor">
-            <a:schemeClr val="tx1"/>
-          </a:fontRef>
-        </p:style>
-      </p:cxnSp>
-      <p:cxnSp>
-        <p:nvCxnSpPr>
-          <p:cNvPr id="144" name="Connecteur : en angle 143">
-            <a:extLst>
-              <a:ext uri="{FF2B5EF4-FFF2-40B4-BE49-F238E27FC236}">
-                <a16:creationId xmlns:a16="http://schemas.microsoft.com/office/drawing/2014/main" id="{12F75BEB-293C-4EE6-BE82-731424EAD120}"/>
-              </a:ext>
-            </a:extLst>
-          </p:cNvPr>
-          <p:cNvCxnSpPr>
-            <a:cxnSpLocks/>
-          </p:cNvCxnSpPr>
-          <p:nvPr/>
-        </p:nvCxnSpPr>
-        <p:spPr>
-          <a:xfrm rot="5400000" flipH="1" flipV="1">
-            <a:off x="2009774" y="4671924"/>
-            <a:ext cx="2001659" cy="397871"/>
-          </a:xfrm>
-          <a:prstGeom prst="bentConnector3">
-            <a:avLst>
-              <a:gd name="adj1" fmla="val 100250"/>
-            </a:avLst>
-          </a:prstGeom>
-          <a:ln w="28575">
-            <a:solidFill>
-              <a:schemeClr val="accent1"/>
-            </a:solidFill>
-          </a:ln>
-        </p:spPr>
-        <p:style>
-          <a:lnRef idx="1">
-            <a:schemeClr val="accent1"/>
-          </a:lnRef>
-          <a:fillRef idx="0">
-            <a:schemeClr val="accent1"/>
-          </a:fillRef>
-          <a:effectRef idx="0">
-            <a:schemeClr val="accent1"/>
-          </a:effectRef>
-          <a:fontRef idx="minor">
-            <a:schemeClr val="tx1"/>
-          </a:fontRef>
-        </p:style>
-      </p:cxnSp>
-      <p:sp>
-        <p:nvSpPr>
-          <p:cNvPr id="151" name="ZoneTexte 150">
-            <a:extLst>
-              <a:ext uri="{FF2B5EF4-FFF2-40B4-BE49-F238E27FC236}">
-                <a16:creationId xmlns:a16="http://schemas.microsoft.com/office/drawing/2014/main" id="{28E8B2F9-4815-52C8-01DA-E2E599218D18}"/>
-              </a:ext>
-            </a:extLst>
-          </p:cNvPr>
-          <p:cNvSpPr txBox="1"/>
-          <p:nvPr/>
-        </p:nvSpPr>
-        <p:spPr>
-          <a:xfrm>
-            <a:off x="7800336" y="4508242"/>
-            <a:ext cx="304800" cy="276999"/>
-          </a:xfrm>
-          <a:prstGeom prst="rect">
-            <a:avLst/>
-          </a:prstGeom>
-          <a:noFill/>
-        </p:spPr>
-        <p:txBody>
-          <a:bodyPr wrap="square" rtlCol="0">
-            <a:spAutoFit/>
-          </a:bodyPr>
-          <a:lstStyle/>
-          <a:p>
-            <a:r>
-              <a:rPr lang="fr-FR" sz="1200" dirty="0"/>
-              <a:t>A</a:t>
-            </a:r>
-          </a:p>
-        </p:txBody>
-      </p:sp>
-      <p:sp>
-        <p:nvSpPr>
-          <p:cNvPr id="152" name="ZoneTexte 151">
-            <a:extLst>
-              <a:ext uri="{FF2B5EF4-FFF2-40B4-BE49-F238E27FC236}">
-                <a16:creationId xmlns:a16="http://schemas.microsoft.com/office/drawing/2014/main" id="{56BDD633-A90A-3545-03D5-4FFD547A1C46}"/>
-              </a:ext>
-            </a:extLst>
-          </p:cNvPr>
-          <p:cNvSpPr txBox="1"/>
-          <p:nvPr/>
-        </p:nvSpPr>
-        <p:spPr>
-          <a:xfrm>
-            <a:off x="7811634" y="4704429"/>
-            <a:ext cx="304800" cy="276999"/>
-          </a:xfrm>
-          <a:prstGeom prst="rect">
-            <a:avLst/>
-          </a:prstGeom>
-          <a:noFill/>
-        </p:spPr>
-        <p:txBody>
-          <a:bodyPr wrap="square" rtlCol="0">
-            <a:spAutoFit/>
-          </a:bodyPr>
-          <a:lstStyle/>
-          <a:p>
-            <a:r>
-              <a:rPr lang="fr-FR" sz="1200" dirty="0"/>
-              <a:t>K</a:t>
-            </a:r>
-          </a:p>
-        </p:txBody>
-      </p:sp>
-    </p:spTree>
-    <p:extLst>
-      <p:ext uri="{BB962C8B-B14F-4D97-AF65-F5344CB8AC3E}">
-        <p14:creationId xmlns:p14="http://schemas.microsoft.com/office/powerpoint/2010/main" val="2935398516"/>
       </p:ext>
     </p:extLst>
   </p:cSld>
